--- a/Docs/portfolio_apm_light.pptx
+++ b/Docs/portfolio_apm_light.pptx
@@ -13,6 +13,9 @@
     <p:sldId id="261" r:id="rId12"/>
     <p:sldId id="262" r:id="rId13"/>
     <p:sldId id="263" r:id="rId14"/>
+    <p:sldId id="274" r:id="rId25"/>
+    <p:sldId id="275" r:id="rId26"/>
+    <p:sldId id="276" r:id="rId27"/>
     <p:sldId id="264" r:id="rId15"/>
     <p:sldId id="265" r:id="rId16"/>
     <p:sldId id="266" r:id="rId17"/>
@@ -4673,7 +4676,7 @@
                 </a:solidFill>
                 <a:latin typeface="Noto Sans Mono"/>
               </a:rPr>
-              <a:t>1 / 18</a:t>
+              <a:t>1 / 21</a:t>
             </a:r>
           </a:p>
         </p:txBody>
@@ -6061,7 +6064,7 @@
                 </a:solidFill>
                 <a:latin typeface="Noto Sans Mono"/>
               </a:rPr>
-              <a:t>10 / 18</a:t>
+              <a:t>13 / 21</a:t>
             </a:r>
           </a:p>
         </p:txBody>
@@ -7881,7 +7884,7 @@
                 </a:solidFill>
                 <a:latin typeface="Noto Sans Mono"/>
               </a:rPr>
-              <a:t>11 / 18</a:t>
+              <a:t>14 / 21</a:t>
             </a:r>
           </a:p>
         </p:txBody>
@@ -9341,7 +9344,7 @@
                 </a:solidFill>
                 <a:latin typeface="Noto Sans Mono"/>
               </a:rPr>
-              <a:t>12 / 18</a:t>
+              <a:t>15 / 21</a:t>
             </a:r>
           </a:p>
         </p:txBody>
@@ -11129,7 +11132,7 @@
                 </a:solidFill>
                 <a:latin typeface="Noto Sans Mono"/>
               </a:rPr>
-              <a:t>13 / 18</a:t>
+              <a:t>16 / 21</a:t>
             </a:r>
           </a:p>
         </p:txBody>
@@ -12707,7 +12710,7 @@
                 </a:solidFill>
                 <a:latin typeface="Noto Sans Mono"/>
               </a:rPr>
-              <a:t>14 / 18</a:t>
+              <a:t>17 / 21</a:t>
             </a:r>
           </a:p>
         </p:txBody>
@@ -13192,7 +13195,7 @@
                 </a:solidFill>
                 <a:latin typeface="Noto Sans Mono"/>
               </a:rPr>
-              <a:t>15 / 18</a:t>
+              <a:t>18 / 21</a:t>
             </a:r>
           </a:p>
         </p:txBody>
@@ -13713,7 +13716,7 @@
                 </a:solidFill>
                 <a:latin typeface="Noto Sans Mono"/>
               </a:rPr>
-              <a:t>16 / 18</a:t>
+              <a:t>19 / 21</a:t>
             </a:r>
           </a:p>
         </p:txBody>
@@ -16629,6 +16632,381 @@
       </p:sp>
       <p:sp>
         <p:nvSpPr>
+          <p:cNvPr id="60" name="Rounded Rectangle 60"/>
+          <p:cNvSpPr/>
+          <p:nvPr/>
+        </p:nvSpPr>
+        <p:spPr>
+          <a:xfrm>
+            <a:off x="6217920" y="5226360"/>
+            <a:ext cx="5440680" cy="1260000"/>
+          </a:xfrm>
+          <a:prstGeom prst="roundRect">
+            <a:avLst>
+              <a:gd name="adj" fmla="val 5000"/>
+            </a:avLst>
+          </a:prstGeom>
+          <a:solidFill>
+            <a:srgbClr val="F6F8FA"/>
+          </a:solidFill>
+          <a:ln w="9525">
+            <a:solidFill>
+              <a:srgbClr val="D0D7DE"/>
+            </a:solidFill>
+          </a:ln>
+          <a:effectLst/>
+        </p:spPr>
+        <p:style>
+          <a:lnRef idx="1">
+            <a:schemeClr val="accent1"/>
+          </a:lnRef>
+          <a:fillRef idx="3">
+            <a:schemeClr val="accent1"/>
+          </a:fillRef>
+          <a:effectRef idx="2">
+            <a:schemeClr val="accent1"/>
+          </a:effectRef>
+          <a:fontRef idx="minor">
+            <a:schemeClr val="lt1"/>
+          </a:fontRef>
+        </p:style>
+        <p:txBody>
+          <a:bodyPr rtlCol="0" anchor="ctr"/>
+          <a:lstStyle/>
+          <a:p>
+            <a:pPr algn="ctr"/>
+          </a:p>
+        </p:txBody>
+      </p:sp>
+      <p:sp>
+        <p:nvSpPr>
+          <p:cNvPr id="61" name="TextBox 61"/>
+          <p:cNvSpPr txBox="1"/>
+          <p:nvPr/>
+        </p:nvSpPr>
+        <p:spPr>
+          <a:xfrm>
+            <a:off x="6419088" y="5406360"/>
+            <a:ext cx="5038344" cy="292608"/>
+          </a:xfrm>
+          <a:prstGeom prst="rect">
+            <a:avLst/>
+          </a:prstGeom>
+          <a:noFill/>
+        </p:spPr>
+        <p:txBody>
+          <a:bodyPr wrap="square" lIns="0" rIns="0" tIns="0" bIns="0" anchor="t">
+            <a:spAutoFit/>
+          </a:bodyPr>
+          <a:lstStyle/>
+          <a:p>
+            <a:pPr algn="l">
+              <a:lnSpc>
+                <a:spcPct val="125000"/>
+              </a:lnSpc>
+            </a:pPr>
+            <a:r>
+              <a:rPr sz="1300" b="1">
+                <a:solidFill>
+                  <a:srgbClr val="1F2328"/>
+                </a:solidFill>
+                <a:latin typeface="Noto Sans Mono CJK KR"/>
+              </a:rPr>
+              <a:t>로컬</a:t>
+            </a:r>
+            <a:r>
+              <a:rPr sz="1300" b="1">
+                <a:solidFill>
+                  <a:srgbClr val="1F2328"/>
+                </a:solidFill>
+                <a:latin typeface="Noto Sans Mono"/>
+              </a:rPr>
+              <a:t> </a:t>
+            </a:r>
+            <a:r>
+              <a:rPr sz="1300" b="1">
+                <a:solidFill>
+                  <a:srgbClr val="1F2328"/>
+                </a:solidFill>
+                <a:latin typeface="Noto Sans Mono CJK KR"/>
+              </a:rPr>
+              <a:t>데스크톱</a:t>
+            </a:r>
+            <a:r>
+              <a:rPr sz="1300" b="1">
+                <a:solidFill>
+                  <a:srgbClr val="1F2328"/>
+                </a:solidFill>
+                <a:latin typeface="Noto Sans Mono"/>
+              </a:rPr>
+              <a:t> (Qt)</a:t>
+            </a:r>
+          </a:p>
+        </p:txBody>
+      </p:sp>
+      <p:sp>
+        <p:nvSpPr>
+          <p:cNvPr id="62" name="Rounded Rectangle 62"/>
+          <p:cNvSpPr/>
+          <p:nvPr/>
+        </p:nvSpPr>
+        <p:spPr>
+          <a:xfrm>
+            <a:off x="6419088" y="5738968"/>
+            <a:ext cx="3400000" cy="310896"/>
+          </a:xfrm>
+          <a:prstGeom prst="roundRect">
+            <a:avLst>
+              <a:gd name="adj" fmla="val 28000"/>
+            </a:avLst>
+          </a:prstGeom>
+          <a:solidFill>
+            <a:srgbClr val="FFFFFF"/>
+          </a:solidFill>
+          <a:ln w="9525">
+            <a:solidFill>
+              <a:srgbClr val="E4E8EC"/>
+            </a:solidFill>
+          </a:ln>
+          <a:effectLst/>
+        </p:spPr>
+        <p:style>
+          <a:lnRef idx="1">
+            <a:schemeClr val="accent1"/>
+          </a:lnRef>
+          <a:fillRef idx="3">
+            <a:schemeClr val="accent1"/>
+          </a:fillRef>
+          <a:effectRef idx="2">
+            <a:schemeClr val="accent1"/>
+          </a:effectRef>
+          <a:fontRef idx="minor">
+            <a:schemeClr val="lt1"/>
+          </a:fontRef>
+        </p:style>
+        <p:txBody>
+          <a:bodyPr rtlCol="0" anchor="ctr"/>
+          <a:lstStyle/>
+          <a:p>
+            <a:pPr algn="ctr"/>
+          </a:p>
+        </p:txBody>
+      </p:sp>
+      <p:sp>
+        <p:nvSpPr>
+          <p:cNvPr id="63" name="TextBox 63"/>
+          <p:cNvSpPr txBox="1"/>
+          <p:nvPr/>
+        </p:nvSpPr>
+        <p:spPr>
+          <a:xfrm>
+            <a:off x="6419088" y="5738968"/>
+            <a:ext cx="3400000" cy="310896"/>
+          </a:xfrm>
+          <a:prstGeom prst="rect">
+            <a:avLst/>
+          </a:prstGeom>
+          <a:noFill/>
+        </p:spPr>
+        <p:txBody>
+          <a:bodyPr wrap="none" lIns="0" rIns="0" tIns="0" bIns="0" anchor="ctr">
+            <a:spAutoFit/>
+          </a:bodyPr>
+          <a:lstStyle/>
+          <a:p>
+            <a:pPr algn="ctr">
+              <a:lnSpc>
+                <a:spcPct val="125000"/>
+              </a:lnSpc>
+            </a:pPr>
+            <a:r>
+              <a:rPr sz="1050" b="0">
+                <a:solidFill>
+                  <a:srgbClr val="59636E"/>
+                </a:solidFill>
+                <a:latin typeface="Noto Sans Mono"/>
+              </a:rPr>
+              <a:t>Qt 6 (Widgets/Sql/Charts/Network)</a:t>
+            </a:r>
+          </a:p>
+        </p:txBody>
+      </p:sp>
+      <p:sp>
+        <p:nvSpPr>
+          <p:cNvPr id="64" name="Rounded Rectangle 64"/>
+          <p:cNvSpPr/>
+          <p:nvPr/>
+        </p:nvSpPr>
+        <p:spPr>
+          <a:xfrm>
+            <a:off x="6419088" y="6109864"/>
+            <a:ext cx="2200000" cy="310896"/>
+          </a:xfrm>
+          <a:prstGeom prst="roundRect">
+            <a:avLst>
+              <a:gd name="adj" fmla="val 28000"/>
+            </a:avLst>
+          </a:prstGeom>
+          <a:solidFill>
+            <a:srgbClr val="FFFFFF"/>
+          </a:solidFill>
+          <a:ln w="9525">
+            <a:solidFill>
+              <a:srgbClr val="E4E8EC"/>
+            </a:solidFill>
+          </a:ln>
+          <a:effectLst/>
+        </p:spPr>
+        <p:style>
+          <a:lnRef idx="1">
+            <a:schemeClr val="accent1"/>
+          </a:lnRef>
+          <a:fillRef idx="3">
+            <a:schemeClr val="accent1"/>
+          </a:fillRef>
+          <a:effectRef idx="2">
+            <a:schemeClr val="accent1"/>
+          </a:effectRef>
+          <a:fontRef idx="minor">
+            <a:schemeClr val="lt1"/>
+          </a:fontRef>
+        </p:style>
+        <p:txBody>
+          <a:bodyPr rtlCol="0" anchor="ctr"/>
+          <a:lstStyle/>
+          <a:p>
+            <a:pPr algn="ctr"/>
+          </a:p>
+        </p:txBody>
+      </p:sp>
+      <p:sp>
+        <p:nvSpPr>
+          <p:cNvPr id="65" name="TextBox 65"/>
+          <p:cNvSpPr txBox="1"/>
+          <p:nvPr/>
+        </p:nvSpPr>
+        <p:spPr>
+          <a:xfrm>
+            <a:off x="6419088" y="6109864"/>
+            <a:ext cx="2200000" cy="310896"/>
+          </a:xfrm>
+          <a:prstGeom prst="rect">
+            <a:avLst/>
+          </a:prstGeom>
+          <a:noFill/>
+        </p:spPr>
+        <p:txBody>
+          <a:bodyPr wrap="none" lIns="0" rIns="0" tIns="0" bIns="0" anchor="ctr">
+            <a:spAutoFit/>
+          </a:bodyPr>
+          <a:lstStyle/>
+          <a:p>
+            <a:pPr algn="ctr">
+              <a:lnSpc>
+                <a:spcPct val="125000"/>
+              </a:lnSpc>
+            </a:pPr>
+            <a:r>
+              <a:rPr sz="1050" b="0">
+                <a:solidFill>
+                  <a:srgbClr val="59636E"/>
+                </a:solidFill>
+                <a:latin typeface="Noto Sans Mono"/>
+              </a:rPr>
+              <a:t>QThread + moveToThread</a:t>
+            </a:r>
+          </a:p>
+        </p:txBody>
+      </p:sp>
+      <p:sp>
+        <p:nvSpPr>
+          <p:cNvPr id="66" name="Rounded Rectangle 66"/>
+          <p:cNvSpPr/>
+          <p:nvPr/>
+        </p:nvSpPr>
+        <p:spPr>
+          <a:xfrm>
+            <a:off x="8710528" y="6109864"/>
+            <a:ext cx="2550000" cy="310896"/>
+          </a:xfrm>
+          <a:prstGeom prst="roundRect">
+            <a:avLst>
+              <a:gd name="adj" fmla="val 28000"/>
+            </a:avLst>
+          </a:prstGeom>
+          <a:solidFill>
+            <a:srgbClr val="FFFFFF"/>
+          </a:solidFill>
+          <a:ln w="9525">
+            <a:solidFill>
+              <a:srgbClr val="E4E8EC"/>
+            </a:solidFill>
+          </a:ln>
+          <a:effectLst/>
+        </p:spPr>
+        <p:style>
+          <a:lnRef idx="1">
+            <a:schemeClr val="accent1"/>
+          </a:lnRef>
+          <a:fillRef idx="3">
+            <a:schemeClr val="accent1"/>
+          </a:fillRef>
+          <a:effectRef idx="2">
+            <a:schemeClr val="accent1"/>
+          </a:effectRef>
+          <a:fontRef idx="minor">
+            <a:schemeClr val="lt1"/>
+          </a:fontRef>
+        </p:style>
+        <p:txBody>
+          <a:bodyPr rtlCol="0" anchor="ctr"/>
+          <a:lstStyle/>
+          <a:p>
+            <a:pPr algn="ctr"/>
+          </a:p>
+        </p:txBody>
+      </p:sp>
+      <p:sp>
+        <p:nvSpPr>
+          <p:cNvPr id="67" name="TextBox 67"/>
+          <p:cNvSpPr txBox="1"/>
+          <p:nvPr/>
+        </p:nvSpPr>
+        <p:spPr>
+          <a:xfrm>
+            <a:off x="8710528" y="6109864"/>
+            <a:ext cx="2550000" cy="310896"/>
+          </a:xfrm>
+          <a:prstGeom prst="rect">
+            <a:avLst/>
+          </a:prstGeom>
+          <a:noFill/>
+        </p:spPr>
+        <p:txBody>
+          <a:bodyPr wrap="none" lIns="0" rIns="0" tIns="0" bIns="0" anchor="ctr">
+            <a:spAutoFit/>
+          </a:bodyPr>
+          <a:lstStyle/>
+          <a:p>
+            <a:pPr algn="ctr">
+              <a:lnSpc>
+                <a:spcPct val="125000"/>
+              </a:lnSpc>
+            </a:pPr>
+            <a:r>
+              <a:rPr sz="1050" b="0">
+                <a:solidFill>
+                  <a:srgbClr val="59636E"/>
+                </a:solidFill>
+                <a:latin typeface="Noto Sans Mono"/>
+              </a:rPr>
+              <a:t>QLocalSocket(Unix socket)</a:t>
+            </a:r>
+          </a:p>
+        </p:txBody>
+      </p:sp>
+      <p:sp>
+        <p:nvSpPr>
           <p:cNvPr id="55" name="TextBox 54"/>
           <p:cNvSpPr txBox="1"/>
           <p:nvPr/>
@@ -16661,7 +17039,7 @@
                 </a:solidFill>
                 <a:latin typeface="Noto Sans Mono"/>
               </a:rPr>
-              <a:t>17 / 18</a:t>
+              <a:t>20 / 21</a:t>
             </a:r>
           </a:p>
         </p:txBody>
@@ -17475,7 +17853,1284 @@
                 </a:solidFill>
                 <a:latin typeface="Noto Sans Mono"/>
               </a:rPr>
-              <a:t>18 / 18</a:t>
+              <a:t>21 / 21</a:t>
+            </a:r>
+          </a:p>
+        </p:txBody>
+      </p:sp>
+    </p:spTree>
+  </p:cSld>
+  <p:clrMapOvr>
+    <a:masterClrMapping/>
+  </p:clrMapOvr>
+</p:sld>
+</file>
+
+<file path=ppt/slides/slide19.xml><?xml version="1.0" encoding="utf-8"?>
+<p:sld xmlns:a="http://schemas.openxmlformats.org/drawingml/2006/main" xmlns:p="http://schemas.openxmlformats.org/presentationml/2006/main" xmlns:r="http://schemas.openxmlformats.org/officeDocument/2006/relationships">
+  <p:cSld>
+    <p:spTree>
+      <p:nvGrpSpPr>
+        <p:cNvPr id="1" name=""/>
+        <p:cNvGrpSpPr/>
+        <p:nvPr/>
+      </p:nvGrpSpPr>
+      <p:grpSpPr/>
+      <p:sp>
+        <p:nvSpPr>
+          <p:cNvPr id="2" name="Rectangle 1"/>
+          <p:cNvSpPr/>
+          <p:nvPr/>
+        </p:nvSpPr>
+        <p:spPr>
+          <a:xfrm>
+            <a:off x="0" y="0"/>
+            <a:ext cx="12191695" cy="6858000"/>
+          </a:xfrm>
+          <a:prstGeom prst="rect">
+            <a:avLst/>
+          </a:prstGeom>
+          <a:solidFill>
+            <a:srgbClr val="FFFFFF"/>
+          </a:solidFill>
+          <a:ln>
+            <a:noFill/>
+          </a:ln>
+          <a:effectLst/>
+        </p:spPr>
+        <p:style>
+          <a:lnRef idx="1">
+            <a:schemeClr val="accent1"/>
+          </a:lnRef>
+          <a:fillRef idx="3">
+            <a:schemeClr val="accent1"/>
+          </a:fillRef>
+          <a:effectRef idx="2">
+            <a:schemeClr val="accent1"/>
+          </a:effectRef>
+          <a:fontRef idx="minor">
+            <a:schemeClr val="lt1"/>
+          </a:fontRef>
+        </p:style>
+        <p:txBody>
+          <a:bodyPr rtlCol="0" anchor="ctr"/>
+          <a:lstStyle/>
+          <a:p>
+            <a:pPr algn="ctr"/>
+          </a:p>
+        </p:txBody>
+      </p:sp>
+      <p:sp>
+        <p:nvSpPr>
+          <p:cNvPr id="3" name="TextBox 2"/>
+          <p:cNvSpPr txBox="1"/>
+          <p:nvPr/>
+        </p:nvSpPr>
+        <p:spPr>
+          <a:xfrm>
+            <a:off x="502920" y="320040"/>
+            <a:ext cx="11155680" cy="502920"/>
+          </a:xfrm>
+          <a:prstGeom prst="rect">
+            <a:avLst/>
+          </a:prstGeom>
+          <a:noFill/>
+        </p:spPr>
+        <p:txBody>
+          <a:bodyPr wrap="square" lIns="0" rIns="0" tIns="0" bIns="0" anchor="t">
+            <a:spAutoFit/>
+          </a:bodyPr>
+          <a:lstStyle/>
+          <a:p>
+            <a:pPr algn="l">
+              <a:lnSpc>
+                <a:spcPct val="125000"/>
+              </a:lnSpc>
+            </a:pPr>
+            <a:r>
+              <a:rPr sz="2400" b="1">
+                <a:solidFill>
+                  <a:srgbClr val="1F2328"/>
+                </a:solidFill>
+                <a:latin typeface="Noto Sans Mono"/>
+              </a:rPr>
+              <a:t>Qt </a:t>
+            </a:r>
+            <a:r>
+              <a:rPr sz="2400" b="1">
+                <a:solidFill>
+                  <a:srgbClr val="1F2328"/>
+                </a:solidFill>
+                <a:latin typeface="Noto Sans Mono CJK KR"/>
+              </a:rPr>
+              <a:t>로컬</a:t>
+            </a:r>
+            <a:r>
+              <a:rPr sz="2400" b="1">
+                <a:solidFill>
+                  <a:srgbClr val="1F2328"/>
+                </a:solidFill>
+                <a:latin typeface="Noto Sans Mono"/>
+              </a:rPr>
+              <a:t> </a:t>
+            </a:r>
+            <a:r>
+              <a:rPr sz="2400" b="1">
+                <a:solidFill>
+                  <a:srgbClr val="1F2328"/>
+                </a:solidFill>
+                <a:latin typeface="Noto Sans Mono CJK KR"/>
+              </a:rPr>
+              <a:t>대시보드</a:t>
+            </a:r>
+            <a:r>
+              <a:rPr sz="2400" b="1">
+                <a:solidFill>
+                  <a:srgbClr val="1F2328"/>
+                </a:solidFill>
+                <a:latin typeface="Noto Sans Mono"/>
+              </a:rPr>
+              <a:t> (1/2)</a:t>
+            </a:r>
+          </a:p>
+        </p:txBody>
+      </p:sp>
+      <p:sp>
+        <p:nvSpPr>
+          <p:cNvPr id="4" name="Rounded Rectangle 3"/>
+          <p:cNvSpPr/>
+          <p:nvPr/>
+        </p:nvSpPr>
+        <p:spPr>
+          <a:xfrm>
+            <a:off x="502920" y="914400"/>
+            <a:ext cx="11155680" cy="2423160"/>
+          </a:xfrm>
+          <a:prstGeom prst="roundRect">
+            <a:avLst>
+              <a:gd name="adj" fmla="val 4500"/>
+            </a:avLst>
+          </a:prstGeom>
+          <a:solidFill>
+            <a:srgbClr val="F6F8FA"/>
+          </a:solidFill>
+          <a:ln w="9525">
+            <a:solidFill>
+              <a:srgbClr val="D0D7DE"/>
+            </a:solidFill>
+          </a:ln>
+          <a:effectLst/>
+        </p:spPr>
+        <p:style>
+          <a:lnRef idx="1">
+            <a:schemeClr val="accent1"/>
+          </a:lnRef>
+          <a:fillRef idx="3">
+            <a:schemeClr val="accent1"/>
+          </a:fillRef>
+          <a:effectRef idx="2">
+            <a:schemeClr val="accent1"/>
+          </a:effectRef>
+          <a:fontRef idx="minor">
+            <a:schemeClr val="lt1"/>
+          </a:fontRef>
+        </p:style>
+        <p:txBody>
+          <a:bodyPr rtlCol="0" anchor="ctr"/>
+          <a:lstStyle/>
+          <a:p>
+            <a:pPr algn="ctr"/>
+          </a:p>
+        </p:txBody>
+      </p:sp>
+      <p:sp>
+        <p:nvSpPr>
+          <p:cNvPr id="5" name="TextBox 4"/>
+          <p:cNvSpPr txBox="1"/>
+          <p:nvPr/>
+        </p:nvSpPr>
+        <p:spPr>
+          <a:xfrm>
+            <a:off x="722376" y="1060704"/>
+            <a:ext cx="10716768" cy="274320"/>
+          </a:xfrm>
+          <a:prstGeom prst="rect">
+            <a:avLst/>
+          </a:prstGeom>
+          <a:noFill/>
+        </p:spPr>
+        <p:txBody>
+          <a:bodyPr wrap="square" lIns="0" rIns="0" tIns="0" bIns="0" anchor="t">
+            <a:spAutoFit/>
+          </a:bodyPr>
+          <a:lstStyle/>
+          <a:p>
+            <a:pPr algn="l">
+              <a:lnSpc>
+                <a:spcPct val="125000"/>
+              </a:lnSpc>
+            </a:pPr>
+            <a:r>
+              <a:rPr sz="1450" b="1">
+                <a:solidFill>
+                  <a:srgbClr val="1F2328"/>
+                </a:solidFill>
+                <a:latin typeface="Noto Sans Mono"/>
+              </a:rPr>
+              <a:t>01. </a:t>
+            </a:r>
+            <a:r>
+              <a:rPr sz="1450" b="1">
+                <a:solidFill>
+                  <a:srgbClr val="1F2328"/>
+                </a:solidFill>
+                <a:latin typeface="Noto Sans Mono CJK KR"/>
+              </a:rPr>
+              <a:t>아키텍처</a:t>
+            </a:r>
+            <a:r>
+              <a:rPr sz="1450" b="1">
+                <a:solidFill>
+                  <a:srgbClr val="1F2328"/>
+                </a:solidFill>
+                <a:latin typeface="Noto Sans Mono"/>
+              </a:rPr>
+              <a:t> </a:t>
+            </a:r>
+            <a:r>
+              <a:rPr sz="1450" b="1">
+                <a:solidFill>
+                  <a:srgbClr val="1F2328"/>
+                </a:solidFill>
+                <a:latin typeface="Noto Sans Mono CJK KR"/>
+              </a:rPr>
+              <a:t>대전환</a:t>
+            </a:r>
+            <a:r>
+              <a:rPr sz="1450" b="1">
+                <a:solidFill>
+                  <a:srgbClr val="1F2328"/>
+                </a:solidFill>
+                <a:latin typeface="Noto Sans Mono"/>
+              </a:rPr>
+              <a:t> — Console </a:t>
+            </a:r>
+            <a:r>
+              <a:rPr sz="1450" b="1">
+                <a:solidFill>
+                  <a:srgbClr val="1F2328"/>
+                </a:solidFill>
+                <a:latin typeface="Noto Sans Mono CJK KR"/>
+              </a:rPr>
+              <a:t>클라이언트</a:t>
+            </a:r>
+            <a:r>
+              <a:rPr sz="1450" b="1">
+                <a:solidFill>
+                  <a:srgbClr val="1F2328"/>
+                </a:solidFill>
+                <a:latin typeface="Noto Sans Mono"/>
+              </a:rPr>
+              <a:t> → </a:t>
+            </a:r>
+            <a:r>
+              <a:rPr sz="1450" b="1">
+                <a:solidFill>
+                  <a:srgbClr val="1F2328"/>
+                </a:solidFill>
+                <a:latin typeface="Noto Sans Mono CJK KR"/>
+              </a:rPr>
+              <a:t>로컬</a:t>
+            </a:r>
+            <a:r>
+              <a:rPr sz="1450" b="1">
+                <a:solidFill>
+                  <a:srgbClr val="1F2328"/>
+                </a:solidFill>
+                <a:latin typeface="Noto Sans Mono"/>
+              </a:rPr>
+              <a:t> </a:t>
+            </a:r>
+            <a:r>
+              <a:rPr sz="1450" b="1">
+                <a:solidFill>
+                  <a:srgbClr val="1F2328"/>
+                </a:solidFill>
+                <a:latin typeface="Noto Sans Mono CJK KR"/>
+              </a:rPr>
+              <a:t>대시보드</a:t>
+            </a:r>
+          </a:p>
+        </p:txBody>
+      </p:sp>
+      <p:sp>
+        <p:nvSpPr>
+          <p:cNvPr id="6" name="Rounded Rectangle 5"/>
+          <p:cNvSpPr/>
+          <p:nvPr/>
+        </p:nvSpPr>
+        <p:spPr>
+          <a:xfrm>
+            <a:off x="722376" y="1426464"/>
+            <a:ext cx="10716768" cy="484632"/>
+          </a:xfrm>
+          <a:prstGeom prst="roundRect">
+            <a:avLst>
+              <a:gd name="adj" fmla="val 9000"/>
+            </a:avLst>
+          </a:prstGeom>
+          <a:solidFill>
+            <a:srgbClr val="FFFFFF"/>
+          </a:solidFill>
+          <a:ln w="9525">
+            <a:solidFill>
+              <a:srgbClr val="E4E8EC"/>
+            </a:solidFill>
+          </a:ln>
+          <a:effectLst/>
+        </p:spPr>
+        <p:style>
+          <a:lnRef idx="1">
+            <a:schemeClr val="accent1"/>
+          </a:lnRef>
+          <a:fillRef idx="3">
+            <a:schemeClr val="accent1"/>
+          </a:fillRef>
+          <a:effectRef idx="2">
+            <a:schemeClr val="accent1"/>
+          </a:effectRef>
+          <a:fontRef idx="minor">
+            <a:schemeClr val="lt1"/>
+          </a:fontRef>
+        </p:style>
+        <p:txBody>
+          <a:bodyPr rtlCol="0" anchor="ctr"/>
+          <a:lstStyle/>
+          <a:p>
+            <a:pPr algn="ctr"/>
+          </a:p>
+        </p:txBody>
+      </p:sp>
+      <p:sp>
+        <p:nvSpPr>
+          <p:cNvPr id="7" name="TextBox 6"/>
+          <p:cNvSpPr txBox="1"/>
+          <p:nvPr/>
+        </p:nvSpPr>
+        <p:spPr>
+          <a:xfrm>
+            <a:off x="868680" y="1508760"/>
+            <a:ext cx="10424160" cy="182880"/>
+          </a:xfrm>
+          <a:prstGeom prst="rect">
+            <a:avLst/>
+          </a:prstGeom>
+          <a:noFill/>
+        </p:spPr>
+        <p:txBody>
+          <a:bodyPr wrap="square" lIns="0" rIns="0" tIns="0" bIns="0" anchor="t">
+            <a:spAutoFit/>
+          </a:bodyPr>
+          <a:lstStyle/>
+          <a:p>
+            <a:pPr algn="l">
+              <a:lnSpc>
+                <a:spcPct val="125000"/>
+              </a:lnSpc>
+            </a:pPr>
+            <a:r>
+              <a:rPr sz="1000" b="1">
+                <a:solidFill>
+                  <a:srgbClr val="6E7781"/>
+                </a:solidFill>
+                <a:latin typeface="Noto Sans Mono CJK KR"/>
+              </a:rPr>
+              <a:t>문제</a:t>
+            </a:r>
+          </a:p>
+        </p:txBody>
+      </p:sp>
+      <p:sp>
+        <p:nvSpPr>
+          <p:cNvPr id="8" name="TextBox 7"/>
+          <p:cNvSpPr txBox="1"/>
+          <p:nvPr/>
+        </p:nvSpPr>
+        <p:spPr>
+          <a:xfrm>
+            <a:off x="868680" y="1700784"/>
+            <a:ext cx="10424160" cy="155448"/>
+          </a:xfrm>
+          <a:prstGeom prst="rect">
+            <a:avLst/>
+          </a:prstGeom>
+          <a:noFill/>
+        </p:spPr>
+        <p:txBody>
+          <a:bodyPr wrap="square" lIns="0" rIns="0" tIns="0" bIns="0" anchor="t">
+            <a:spAutoFit/>
+          </a:bodyPr>
+          <a:lstStyle/>
+          <a:p>
+            <a:pPr algn="l">
+              <a:lnSpc>
+                <a:spcPct val="125000"/>
+              </a:lnSpc>
+            </a:pPr>
+            <a:r>
+              <a:rPr sz="1100" b="0">
+                <a:solidFill>
+                  <a:srgbClr val="59636E"/>
+                </a:solidFill>
+                <a:latin typeface="Noto Sans CJK KR"/>
+              </a:rPr>
+              <a:t>Qt를 Console 웹 API에 붙이면, Console이 죽을 때 로컬 화면까지 같이 죽는다.</a:t>
+            </a:r>
+          </a:p>
+        </p:txBody>
+      </p:sp>
+      <p:sp>
+        <p:nvSpPr>
+          <p:cNvPr id="9" name="Rounded Rectangle 8"/>
+          <p:cNvSpPr/>
+          <p:nvPr/>
+        </p:nvSpPr>
+        <p:spPr>
+          <a:xfrm>
+            <a:off x="722376" y="2020824"/>
+            <a:ext cx="10716768" cy="484632"/>
+          </a:xfrm>
+          <a:prstGeom prst="roundRect">
+            <a:avLst>
+              <a:gd name="adj" fmla="val 9000"/>
+            </a:avLst>
+          </a:prstGeom>
+          <a:solidFill>
+            <a:srgbClr val="FFFFFF"/>
+          </a:solidFill>
+          <a:ln w="9525">
+            <a:solidFill>
+              <a:srgbClr val="E4E8EC"/>
+            </a:solidFill>
+          </a:ln>
+          <a:effectLst/>
+        </p:spPr>
+        <p:style>
+          <a:lnRef idx="1">
+            <a:schemeClr val="accent1"/>
+          </a:lnRef>
+          <a:fillRef idx="3">
+            <a:schemeClr val="accent1"/>
+          </a:fillRef>
+          <a:effectRef idx="2">
+            <a:schemeClr val="accent1"/>
+          </a:effectRef>
+          <a:fontRef idx="minor">
+            <a:schemeClr val="lt1"/>
+          </a:fontRef>
+        </p:style>
+        <p:txBody>
+          <a:bodyPr rtlCol="0" anchor="ctr"/>
+          <a:lstStyle/>
+          <a:p>
+            <a:pPr algn="ctr"/>
+          </a:p>
+        </p:txBody>
+      </p:sp>
+      <p:sp>
+        <p:nvSpPr>
+          <p:cNvPr id="10" name="TextBox 9"/>
+          <p:cNvSpPr txBox="1"/>
+          <p:nvPr/>
+        </p:nvSpPr>
+        <p:spPr>
+          <a:xfrm>
+            <a:off x="868680" y="2103120"/>
+            <a:ext cx="10424160" cy="182880"/>
+          </a:xfrm>
+          <a:prstGeom prst="rect">
+            <a:avLst/>
+          </a:prstGeom>
+          <a:noFill/>
+        </p:spPr>
+        <p:txBody>
+          <a:bodyPr wrap="square" lIns="0" rIns="0" tIns="0" bIns="0" anchor="t">
+            <a:spAutoFit/>
+          </a:bodyPr>
+          <a:lstStyle/>
+          <a:p>
+            <a:pPr algn="l">
+              <a:lnSpc>
+                <a:spcPct val="125000"/>
+              </a:lnSpc>
+            </a:pPr>
+            <a:r>
+              <a:rPr sz="1000" b="1">
+                <a:solidFill>
+                  <a:srgbClr val="0969DA"/>
+                </a:solidFill>
+                <a:latin typeface="Noto Sans Mono CJK KR"/>
+              </a:rPr>
+              <a:t>판단</a:t>
+            </a:r>
+          </a:p>
+        </p:txBody>
+      </p:sp>
+      <p:sp>
+        <p:nvSpPr>
+          <p:cNvPr id="11" name="TextBox 10"/>
+          <p:cNvSpPr txBox="1"/>
+          <p:nvPr/>
+        </p:nvSpPr>
+        <p:spPr>
+          <a:xfrm>
+            <a:off x="868680" y="2295144"/>
+            <a:ext cx="10424160" cy="155448"/>
+          </a:xfrm>
+          <a:prstGeom prst="rect">
+            <a:avLst/>
+          </a:prstGeom>
+          <a:noFill/>
+        </p:spPr>
+        <p:txBody>
+          <a:bodyPr wrap="square" lIns="0" rIns="0" tIns="0" bIns="0" anchor="t">
+            <a:spAutoFit/>
+          </a:bodyPr>
+          <a:lstStyle/>
+          <a:p>
+            <a:pPr algn="l">
+              <a:lnSpc>
+                <a:spcPct val="125000"/>
+              </a:lnSpc>
+            </a:pPr>
+            <a:r>
+              <a:rPr sz="1100" b="0">
+                <a:solidFill>
+                  <a:srgbClr val="59636E"/>
+                </a:solidFill>
+                <a:latin typeface="Noto Sans CJK KR"/>
+              </a:rPr>
+              <a:t>Qt는 Console을 모르게 하고, 장비 로컬의 Collector/Agent DB를 직접 읽게 한다.</a:t>
+            </a:r>
+          </a:p>
+        </p:txBody>
+      </p:sp>
+      <p:sp>
+        <p:nvSpPr>
+          <p:cNvPr id="12" name="Rounded Rectangle 11"/>
+          <p:cNvSpPr/>
+          <p:nvPr/>
+        </p:nvSpPr>
+        <p:spPr>
+          <a:xfrm>
+            <a:off x="722376" y="2615184"/>
+            <a:ext cx="10716768" cy="484632"/>
+          </a:xfrm>
+          <a:prstGeom prst="roundRect">
+            <a:avLst>
+              <a:gd name="adj" fmla="val 9000"/>
+            </a:avLst>
+          </a:prstGeom>
+          <a:solidFill>
+            <a:srgbClr val="FFFFFF"/>
+          </a:solidFill>
+          <a:ln w="9525">
+            <a:solidFill>
+              <a:srgbClr val="E4E8EC"/>
+            </a:solidFill>
+          </a:ln>
+          <a:effectLst/>
+        </p:spPr>
+        <p:style>
+          <a:lnRef idx="1">
+            <a:schemeClr val="accent1"/>
+          </a:lnRef>
+          <a:fillRef idx="3">
+            <a:schemeClr val="accent1"/>
+          </a:fillRef>
+          <a:effectRef idx="2">
+            <a:schemeClr val="accent1"/>
+          </a:effectRef>
+          <a:fontRef idx="minor">
+            <a:schemeClr val="lt1"/>
+          </a:fontRef>
+        </p:style>
+        <p:txBody>
+          <a:bodyPr rtlCol="0" anchor="ctr"/>
+          <a:lstStyle/>
+          <a:p>
+            <a:pPr algn="ctr"/>
+          </a:p>
+        </p:txBody>
+      </p:sp>
+      <p:sp>
+        <p:nvSpPr>
+          <p:cNvPr id="13" name="TextBox 12"/>
+          <p:cNvSpPr txBox="1"/>
+          <p:nvPr/>
+        </p:nvSpPr>
+        <p:spPr>
+          <a:xfrm>
+            <a:off x="868680" y="2697480"/>
+            <a:ext cx="10424160" cy="182880"/>
+          </a:xfrm>
+          <a:prstGeom prst="rect">
+            <a:avLst/>
+          </a:prstGeom>
+          <a:noFill/>
+        </p:spPr>
+        <p:txBody>
+          <a:bodyPr wrap="square" lIns="0" rIns="0" tIns="0" bIns="0" anchor="t">
+            <a:spAutoFit/>
+          </a:bodyPr>
+          <a:lstStyle/>
+          <a:p>
+            <a:pPr algn="l">
+              <a:lnSpc>
+                <a:spcPct val="125000"/>
+              </a:lnSpc>
+            </a:pPr>
+            <a:r>
+              <a:rPr sz="1000" b="1">
+                <a:solidFill>
+                  <a:srgbClr val="1A7F37"/>
+                </a:solidFill>
+                <a:latin typeface="Noto Sans Mono CJK KR"/>
+              </a:rPr>
+              <a:t>해결</a:t>
+            </a:r>
+          </a:p>
+        </p:txBody>
+      </p:sp>
+      <p:sp>
+        <p:nvSpPr>
+          <p:cNvPr id="14" name="TextBox 13"/>
+          <p:cNvSpPr txBox="1"/>
+          <p:nvPr/>
+        </p:nvSpPr>
+        <p:spPr>
+          <a:xfrm>
+            <a:off x="868680" y="2889504"/>
+            <a:ext cx="10424160" cy="155448"/>
+          </a:xfrm>
+          <a:prstGeom prst="rect">
+            <a:avLst/>
+          </a:prstGeom>
+          <a:noFill/>
+        </p:spPr>
+        <p:txBody>
+          <a:bodyPr wrap="square" lIns="0" rIns="0" tIns="0" bIns="0" anchor="t">
+            <a:spAutoFit/>
+          </a:bodyPr>
+          <a:lstStyle/>
+          <a:p>
+            <a:pPr algn="l">
+              <a:lnSpc>
+                <a:spcPct val="125000"/>
+              </a:lnSpc>
+            </a:pPr>
+            <a:r>
+              <a:rPr sz="1100" b="0">
+                <a:solidFill>
+                  <a:srgbClr val="1A7F37"/>
+                </a:solidFill>
+                <a:latin typeface="Noto Sans CJK KR"/>
+              </a:rPr>
+              <a:t>Collector를 장비마다 1:1로 배치해도 코드 변경 0 — 배치만 바꿔 로컬 전환 완료.</a:t>
+            </a:r>
+          </a:p>
+        </p:txBody>
+      </p:sp>
+      <p:sp>
+        <p:nvSpPr>
+          <p:cNvPr id="15" name="Rounded Rectangle 14"/>
+          <p:cNvSpPr/>
+          <p:nvPr/>
+        </p:nvSpPr>
+        <p:spPr>
+          <a:xfrm>
+            <a:off x="502920" y="3520440"/>
+            <a:ext cx="11155680" cy="2770632"/>
+          </a:xfrm>
+          <a:prstGeom prst="roundRect">
+            <a:avLst>
+              <a:gd name="adj" fmla="val 4500"/>
+            </a:avLst>
+          </a:prstGeom>
+          <a:solidFill>
+            <a:srgbClr val="F6F8FA"/>
+          </a:solidFill>
+          <a:ln w="9525">
+            <a:solidFill>
+              <a:srgbClr val="D0D7DE"/>
+            </a:solidFill>
+          </a:ln>
+          <a:effectLst/>
+        </p:spPr>
+        <p:style>
+          <a:lnRef idx="1">
+            <a:schemeClr val="accent1"/>
+          </a:lnRef>
+          <a:fillRef idx="3">
+            <a:schemeClr val="accent1"/>
+          </a:fillRef>
+          <a:effectRef idx="2">
+            <a:schemeClr val="accent1"/>
+          </a:effectRef>
+          <a:fontRef idx="minor">
+            <a:schemeClr val="lt1"/>
+          </a:fontRef>
+        </p:style>
+        <p:txBody>
+          <a:bodyPr rtlCol="0" anchor="ctr"/>
+          <a:lstStyle/>
+          <a:p>
+            <a:pPr algn="ctr"/>
+          </a:p>
+        </p:txBody>
+      </p:sp>
+      <p:sp>
+        <p:nvSpPr>
+          <p:cNvPr id="16" name="TextBox 15"/>
+          <p:cNvSpPr txBox="1"/>
+          <p:nvPr/>
+        </p:nvSpPr>
+        <p:spPr>
+          <a:xfrm>
+            <a:off x="722376" y="3666744"/>
+            <a:ext cx="10716768" cy="274320"/>
+          </a:xfrm>
+          <a:prstGeom prst="rect">
+            <a:avLst/>
+          </a:prstGeom>
+          <a:noFill/>
+        </p:spPr>
+        <p:txBody>
+          <a:bodyPr wrap="square" lIns="0" rIns="0" tIns="0" bIns="0" anchor="t">
+            <a:spAutoFit/>
+          </a:bodyPr>
+          <a:lstStyle/>
+          <a:p>
+            <a:pPr algn="l">
+              <a:lnSpc>
+                <a:spcPct val="125000"/>
+              </a:lnSpc>
+            </a:pPr>
+            <a:r>
+              <a:rPr sz="1450" b="1">
+                <a:solidFill>
+                  <a:srgbClr val="1F2328"/>
+                </a:solidFill>
+                <a:latin typeface="Noto Sans Mono"/>
+              </a:rPr>
+              <a:t>02. </a:t>
+            </a:r>
+            <a:r>
+              <a:rPr sz="1450" b="1">
+                <a:solidFill>
+                  <a:srgbClr val="1F2328"/>
+                </a:solidFill>
+                <a:latin typeface="Noto Sans Mono CJK KR"/>
+              </a:rPr>
+              <a:t>알림</a:t>
+            </a:r>
+            <a:r>
+              <a:rPr sz="1450" b="1">
+                <a:solidFill>
+                  <a:srgbClr val="1F2328"/>
+                </a:solidFill>
+                <a:latin typeface="Noto Sans Mono"/>
+              </a:rPr>
+              <a:t> </a:t>
+            </a:r>
+            <a:r>
+              <a:rPr sz="1450" b="1">
+                <a:solidFill>
+                  <a:srgbClr val="1F2328"/>
+                </a:solidFill>
+                <a:latin typeface="Noto Sans Mono CJK KR"/>
+              </a:rPr>
+              <a:t>판단</a:t>
+            </a:r>
+            <a:r>
+              <a:rPr sz="1450" b="1">
+                <a:solidFill>
+                  <a:srgbClr val="1F2328"/>
+                </a:solidFill>
+                <a:latin typeface="Noto Sans Mono"/>
+              </a:rPr>
+              <a:t> </a:t>
+            </a:r>
+            <a:r>
+              <a:rPr sz="1450" b="1">
+                <a:solidFill>
+                  <a:srgbClr val="1F2328"/>
+                </a:solidFill>
+                <a:latin typeface="Noto Sans Mono CJK KR"/>
+              </a:rPr>
+              <a:t>위치</a:t>
+            </a:r>
+            <a:r>
+              <a:rPr sz="1450" b="1">
+                <a:solidFill>
+                  <a:srgbClr val="1F2328"/>
+                </a:solidFill>
+                <a:latin typeface="Noto Sans Mono"/>
+              </a:rPr>
+              <a:t> — Collector</a:t>
+            </a:r>
+            <a:r>
+              <a:rPr sz="1450" b="1">
+                <a:solidFill>
+                  <a:srgbClr val="1F2328"/>
+                </a:solidFill>
+                <a:latin typeface="Noto Sans Mono CJK KR"/>
+              </a:rPr>
+              <a:t>가</a:t>
+            </a:r>
+            <a:r>
+              <a:rPr sz="1450" b="1">
+                <a:solidFill>
+                  <a:srgbClr val="1F2328"/>
+                </a:solidFill>
+                <a:latin typeface="Noto Sans Mono"/>
+              </a:rPr>
+              <a:t> </a:t>
+            </a:r>
+            <a:r>
+              <a:rPr sz="1450" b="1">
+                <a:solidFill>
+                  <a:srgbClr val="1F2328"/>
+                </a:solidFill>
+                <a:latin typeface="Noto Sans Mono CJK KR"/>
+              </a:rPr>
+              <a:t>아니라</a:t>
+            </a:r>
+            <a:r>
+              <a:rPr sz="1450" b="1">
+                <a:solidFill>
+                  <a:srgbClr val="1F2328"/>
+                </a:solidFill>
+                <a:latin typeface="Noto Sans Mono"/>
+              </a:rPr>
+              <a:t> Agent</a:t>
+            </a:r>
+          </a:p>
+        </p:txBody>
+      </p:sp>
+      <p:sp>
+        <p:nvSpPr>
+          <p:cNvPr id="17" name="Rounded Rectangle 16"/>
+          <p:cNvSpPr/>
+          <p:nvPr/>
+        </p:nvSpPr>
+        <p:spPr>
+          <a:xfrm>
+            <a:off x="722376" y="4032504"/>
+            <a:ext cx="10716768" cy="484632"/>
+          </a:xfrm>
+          <a:prstGeom prst="roundRect">
+            <a:avLst>
+              <a:gd name="adj" fmla="val 9000"/>
+            </a:avLst>
+          </a:prstGeom>
+          <a:solidFill>
+            <a:srgbClr val="FFFFFF"/>
+          </a:solidFill>
+          <a:ln w="9525">
+            <a:solidFill>
+              <a:srgbClr val="E4E8EC"/>
+            </a:solidFill>
+          </a:ln>
+          <a:effectLst/>
+        </p:spPr>
+        <p:style>
+          <a:lnRef idx="1">
+            <a:schemeClr val="accent1"/>
+          </a:lnRef>
+          <a:fillRef idx="3">
+            <a:schemeClr val="accent1"/>
+          </a:fillRef>
+          <a:effectRef idx="2">
+            <a:schemeClr val="accent1"/>
+          </a:effectRef>
+          <a:fontRef idx="minor">
+            <a:schemeClr val="lt1"/>
+          </a:fontRef>
+        </p:style>
+        <p:txBody>
+          <a:bodyPr rtlCol="0" anchor="ctr"/>
+          <a:lstStyle/>
+          <a:p>
+            <a:pPr algn="ctr"/>
+          </a:p>
+        </p:txBody>
+      </p:sp>
+      <p:sp>
+        <p:nvSpPr>
+          <p:cNvPr id="18" name="TextBox 17"/>
+          <p:cNvSpPr txBox="1"/>
+          <p:nvPr/>
+        </p:nvSpPr>
+        <p:spPr>
+          <a:xfrm>
+            <a:off x="868680" y="4114800"/>
+            <a:ext cx="10424160" cy="182880"/>
+          </a:xfrm>
+          <a:prstGeom prst="rect">
+            <a:avLst/>
+          </a:prstGeom>
+          <a:noFill/>
+        </p:spPr>
+        <p:txBody>
+          <a:bodyPr wrap="square" lIns="0" rIns="0" tIns="0" bIns="0" anchor="t">
+            <a:spAutoFit/>
+          </a:bodyPr>
+          <a:lstStyle/>
+          <a:p>
+            <a:pPr algn="l">
+              <a:lnSpc>
+                <a:spcPct val="125000"/>
+              </a:lnSpc>
+            </a:pPr>
+            <a:r>
+              <a:rPr sz="1000" b="1">
+                <a:solidFill>
+                  <a:srgbClr val="6E7781"/>
+                </a:solidFill>
+                <a:latin typeface="Noto Sans Mono CJK KR"/>
+              </a:rPr>
+              <a:t>문제</a:t>
+            </a:r>
+          </a:p>
+        </p:txBody>
+      </p:sp>
+      <p:sp>
+        <p:nvSpPr>
+          <p:cNvPr id="19" name="TextBox 18"/>
+          <p:cNvSpPr txBox="1"/>
+          <p:nvPr/>
+        </p:nvSpPr>
+        <p:spPr>
+          <a:xfrm>
+            <a:off x="868680" y="4306824"/>
+            <a:ext cx="10424160" cy="155448"/>
+          </a:xfrm>
+          <a:prstGeom prst="rect">
+            <a:avLst/>
+          </a:prstGeom>
+          <a:noFill/>
+        </p:spPr>
+        <p:txBody>
+          <a:bodyPr wrap="square" lIns="0" rIns="0" tIns="0" bIns="0" anchor="t">
+            <a:spAutoFit/>
+          </a:bodyPr>
+          <a:lstStyle/>
+          <a:p>
+            <a:pPr algn="l">
+              <a:lnSpc>
+                <a:spcPct val="125000"/>
+              </a:lnSpc>
+            </a:pPr>
+            <a:r>
+              <a:rPr sz="1100" b="0">
+                <a:solidFill>
+                  <a:srgbClr val="59636E"/>
+                </a:solidFill>
+                <a:latin typeface="Noto Sans CJK KR"/>
+              </a:rPr>
+              <a:t>로컬 알림 판단 로직을 처음엔 Collector에 넣으려 했다.</a:t>
+            </a:r>
+          </a:p>
+        </p:txBody>
+      </p:sp>
+      <p:sp>
+        <p:nvSpPr>
+          <p:cNvPr id="20" name="Rounded Rectangle 19"/>
+          <p:cNvSpPr/>
+          <p:nvPr/>
+        </p:nvSpPr>
+        <p:spPr>
+          <a:xfrm>
+            <a:off x="722376" y="4626864"/>
+            <a:ext cx="10716768" cy="658368"/>
+          </a:xfrm>
+          <a:prstGeom prst="roundRect">
+            <a:avLst>
+              <a:gd name="adj" fmla="val 9000"/>
+            </a:avLst>
+          </a:prstGeom>
+          <a:solidFill>
+            <a:srgbClr val="FFFFFF"/>
+          </a:solidFill>
+          <a:ln w="9525">
+            <a:solidFill>
+              <a:srgbClr val="E4E8EC"/>
+            </a:solidFill>
+          </a:ln>
+          <a:effectLst/>
+        </p:spPr>
+        <p:style>
+          <a:lnRef idx="1">
+            <a:schemeClr val="accent1"/>
+          </a:lnRef>
+          <a:fillRef idx="3">
+            <a:schemeClr val="accent1"/>
+          </a:fillRef>
+          <a:effectRef idx="2">
+            <a:schemeClr val="accent1"/>
+          </a:effectRef>
+          <a:fontRef idx="minor">
+            <a:schemeClr val="lt1"/>
+          </a:fontRef>
+        </p:style>
+        <p:txBody>
+          <a:bodyPr rtlCol="0" anchor="ctr"/>
+          <a:lstStyle/>
+          <a:p>
+            <a:pPr algn="ctr"/>
+          </a:p>
+        </p:txBody>
+      </p:sp>
+      <p:sp>
+        <p:nvSpPr>
+          <p:cNvPr id="21" name="TextBox 20"/>
+          <p:cNvSpPr txBox="1"/>
+          <p:nvPr/>
+        </p:nvSpPr>
+        <p:spPr>
+          <a:xfrm>
+            <a:off x="868680" y="4709160"/>
+            <a:ext cx="10424160" cy="182880"/>
+          </a:xfrm>
+          <a:prstGeom prst="rect">
+            <a:avLst/>
+          </a:prstGeom>
+          <a:noFill/>
+        </p:spPr>
+        <p:txBody>
+          <a:bodyPr wrap="square" lIns="0" rIns="0" tIns="0" bIns="0" anchor="t">
+            <a:spAutoFit/>
+          </a:bodyPr>
+          <a:lstStyle/>
+          <a:p>
+            <a:pPr algn="l">
+              <a:lnSpc>
+                <a:spcPct val="125000"/>
+              </a:lnSpc>
+            </a:pPr>
+            <a:r>
+              <a:rPr sz="1000" b="1">
+                <a:solidFill>
+                  <a:srgbClr val="0969DA"/>
+                </a:solidFill>
+                <a:latin typeface="Noto Sans Mono CJK KR"/>
+              </a:rPr>
+              <a:t>판단</a:t>
+            </a:r>
+          </a:p>
+        </p:txBody>
+      </p:sp>
+      <p:sp>
+        <p:nvSpPr>
+          <p:cNvPr id="22" name="TextBox 21"/>
+          <p:cNvSpPr txBox="1"/>
+          <p:nvPr/>
+        </p:nvSpPr>
+        <p:spPr>
+          <a:xfrm>
+            <a:off x="868680" y="4901184"/>
+            <a:ext cx="10424160" cy="329184"/>
+          </a:xfrm>
+          <a:prstGeom prst="rect">
+            <a:avLst/>
+          </a:prstGeom>
+          <a:noFill/>
+        </p:spPr>
+        <p:txBody>
+          <a:bodyPr wrap="square" lIns="0" rIns="0" tIns="0" bIns="0" anchor="t">
+            <a:spAutoFit/>
+          </a:bodyPr>
+          <a:lstStyle/>
+          <a:p>
+            <a:pPr algn="l">
+              <a:lnSpc>
+                <a:spcPct val="125000"/>
+              </a:lnSpc>
+            </a:pPr>
+            <a:r>
+              <a:rPr sz="1100" b="0">
+                <a:solidFill>
+                  <a:srgbClr val="59636E"/>
+                </a:solidFill>
+                <a:latin typeface="Noto Sans CJK KR"/>
+              </a:rPr>
+              <a:t>Collector가 알림까지 하면 역할 침해 + 연결 끊김 시 알림까지 같이 죽는 문제.</a:t>
+            </a:r>
+          </a:p>
+        </p:txBody>
+      </p:sp>
+      <p:sp>
+        <p:nvSpPr>
+          <p:cNvPr id="23" name="Rounded Rectangle 22"/>
+          <p:cNvSpPr/>
+          <p:nvPr/>
+        </p:nvSpPr>
+        <p:spPr>
+          <a:xfrm>
+            <a:off x="722376" y="5394960"/>
+            <a:ext cx="10716768" cy="658368"/>
+          </a:xfrm>
+          <a:prstGeom prst="roundRect">
+            <a:avLst>
+              <a:gd name="adj" fmla="val 9000"/>
+            </a:avLst>
+          </a:prstGeom>
+          <a:solidFill>
+            <a:srgbClr val="FFFFFF"/>
+          </a:solidFill>
+          <a:ln w="9525">
+            <a:solidFill>
+              <a:srgbClr val="E4E8EC"/>
+            </a:solidFill>
+          </a:ln>
+          <a:effectLst/>
+        </p:spPr>
+        <p:style>
+          <a:lnRef idx="1">
+            <a:schemeClr val="accent1"/>
+          </a:lnRef>
+          <a:fillRef idx="3">
+            <a:schemeClr val="accent1"/>
+          </a:fillRef>
+          <a:effectRef idx="2">
+            <a:schemeClr val="accent1"/>
+          </a:effectRef>
+          <a:fontRef idx="minor">
+            <a:schemeClr val="lt1"/>
+          </a:fontRef>
+        </p:style>
+        <p:txBody>
+          <a:bodyPr rtlCol="0" anchor="ctr"/>
+          <a:lstStyle/>
+          <a:p>
+            <a:pPr algn="ctr"/>
+          </a:p>
+        </p:txBody>
+      </p:sp>
+      <p:sp>
+        <p:nvSpPr>
+          <p:cNvPr id="24" name="TextBox 23"/>
+          <p:cNvSpPr txBox="1"/>
+          <p:nvPr/>
+        </p:nvSpPr>
+        <p:spPr>
+          <a:xfrm>
+            <a:off x="868680" y="5477256"/>
+            <a:ext cx="10424160" cy="182880"/>
+          </a:xfrm>
+          <a:prstGeom prst="rect">
+            <a:avLst/>
+          </a:prstGeom>
+          <a:noFill/>
+        </p:spPr>
+        <p:txBody>
+          <a:bodyPr wrap="square" lIns="0" rIns="0" tIns="0" bIns="0" anchor="t">
+            <a:spAutoFit/>
+          </a:bodyPr>
+          <a:lstStyle/>
+          <a:p>
+            <a:pPr algn="l">
+              <a:lnSpc>
+                <a:spcPct val="125000"/>
+              </a:lnSpc>
+            </a:pPr>
+            <a:r>
+              <a:rPr sz="1000" b="1">
+                <a:solidFill>
+                  <a:srgbClr val="1A7F37"/>
+                </a:solidFill>
+                <a:latin typeface="Noto Sans Mono CJK KR"/>
+              </a:rPr>
+              <a:t>해결</a:t>
+            </a:r>
+          </a:p>
+        </p:txBody>
+      </p:sp>
+      <p:sp>
+        <p:nvSpPr>
+          <p:cNvPr id="25" name="TextBox 24"/>
+          <p:cNvSpPr txBox="1"/>
+          <p:nvPr/>
+        </p:nvSpPr>
+        <p:spPr>
+          <a:xfrm>
+            <a:off x="868680" y="5669280"/>
+            <a:ext cx="10424160" cy="329184"/>
+          </a:xfrm>
+          <a:prstGeom prst="rect">
+            <a:avLst/>
+          </a:prstGeom>
+          <a:noFill/>
+        </p:spPr>
+        <p:txBody>
+          <a:bodyPr wrap="square" lIns="0" rIns="0" tIns="0" bIns="0" anchor="t">
+            <a:spAutoFit/>
+          </a:bodyPr>
+          <a:lstStyle/>
+          <a:p>
+            <a:pPr algn="l">
+              <a:lnSpc>
+                <a:spcPct val="125000"/>
+              </a:lnSpc>
+            </a:pPr>
+            <a:r>
+              <a:rPr sz="1100" b="0">
+                <a:solidFill>
+                  <a:srgbClr val="1A7F37"/>
+                </a:solidFill>
+                <a:latin typeface="Noto Sans CJK KR"/>
+              </a:rPr>
+              <a:t>Agent가 전송 전 직접 판단, 전용 DB(agent_alerts.db)에 기록 — 장애 3종 실측 검증.</a:t>
+            </a:r>
+          </a:p>
+        </p:txBody>
+      </p:sp>
+      <p:sp>
+        <p:nvSpPr>
+          <p:cNvPr id="26" name="TextBox 25"/>
+          <p:cNvSpPr txBox="1"/>
+          <p:nvPr/>
+        </p:nvSpPr>
+        <p:spPr>
+          <a:xfrm>
+            <a:off x="11475720" y="6510528"/>
+            <a:ext cx="594360" cy="256032"/>
+          </a:xfrm>
+          <a:prstGeom prst="rect">
+            <a:avLst/>
+          </a:prstGeom>
+          <a:noFill/>
+        </p:spPr>
+        <p:txBody>
+          <a:bodyPr wrap="square" lIns="0" rIns="0" tIns="0" bIns="0" anchor="t">
+            <a:spAutoFit/>
+          </a:bodyPr>
+          <a:lstStyle/>
+          <a:p>
+            <a:pPr algn="r">
+              <a:lnSpc>
+                <a:spcPct val="125000"/>
+              </a:lnSpc>
+            </a:pPr>
+            <a:r>
+              <a:rPr sz="1050" b="0">
+                <a:solidFill>
+                  <a:srgbClr val="6E7781"/>
+                </a:solidFill>
+                <a:latin typeface="Noto Sans Mono"/>
+              </a:rPr>
+              <a:t>9 / 21</a:t>
             </a:r>
           </a:p>
         </p:txBody>
@@ -18575,7 +20230,1694 @@
                 </a:solidFill>
                 <a:latin typeface="Noto Sans Mono"/>
               </a:rPr>
-              <a:t>2 / 18</a:t>
+              <a:t>2 / 21</a:t>
+            </a:r>
+          </a:p>
+        </p:txBody>
+      </p:sp>
+    </p:spTree>
+  </p:cSld>
+  <p:clrMapOvr>
+    <a:masterClrMapping/>
+  </p:clrMapOvr>
+</p:sld>
+</file>
+
+<file path=ppt/slides/slide20.xml><?xml version="1.0" encoding="utf-8"?>
+<p:sld xmlns:a="http://schemas.openxmlformats.org/drawingml/2006/main" xmlns:p="http://schemas.openxmlformats.org/presentationml/2006/main" xmlns:r="http://schemas.openxmlformats.org/officeDocument/2006/relationships">
+  <p:cSld>
+    <p:spTree>
+      <p:nvGrpSpPr>
+        <p:cNvPr id="1" name=""/>
+        <p:cNvGrpSpPr/>
+        <p:nvPr/>
+      </p:nvGrpSpPr>
+      <p:grpSpPr/>
+      <p:sp>
+        <p:nvSpPr>
+          <p:cNvPr id="2" name="Rectangle 1"/>
+          <p:cNvSpPr/>
+          <p:nvPr/>
+        </p:nvSpPr>
+        <p:spPr>
+          <a:xfrm>
+            <a:off x="0" y="0"/>
+            <a:ext cx="12191695" cy="6858000"/>
+          </a:xfrm>
+          <a:prstGeom prst="rect">
+            <a:avLst/>
+          </a:prstGeom>
+          <a:solidFill>
+            <a:srgbClr val="FFFFFF"/>
+          </a:solidFill>
+          <a:ln>
+            <a:noFill/>
+          </a:ln>
+          <a:effectLst/>
+        </p:spPr>
+        <p:style>
+          <a:lnRef idx="1">
+            <a:schemeClr val="accent1"/>
+          </a:lnRef>
+          <a:fillRef idx="3">
+            <a:schemeClr val="accent1"/>
+          </a:fillRef>
+          <a:effectRef idx="2">
+            <a:schemeClr val="accent1"/>
+          </a:effectRef>
+          <a:fontRef idx="minor">
+            <a:schemeClr val="lt1"/>
+          </a:fontRef>
+        </p:style>
+        <p:txBody>
+          <a:bodyPr rtlCol="0" anchor="ctr"/>
+          <a:lstStyle/>
+          <a:p>
+            <a:pPr algn="ctr"/>
+          </a:p>
+        </p:txBody>
+      </p:sp>
+      <p:sp>
+        <p:nvSpPr>
+          <p:cNvPr id="3" name="TextBox 2"/>
+          <p:cNvSpPr txBox="1"/>
+          <p:nvPr/>
+        </p:nvSpPr>
+        <p:spPr>
+          <a:xfrm>
+            <a:off x="502920" y="320040"/>
+            <a:ext cx="11155680" cy="502920"/>
+          </a:xfrm>
+          <a:prstGeom prst="rect">
+            <a:avLst/>
+          </a:prstGeom>
+          <a:noFill/>
+        </p:spPr>
+        <p:txBody>
+          <a:bodyPr wrap="square" lIns="0" rIns="0" tIns="0" bIns="0" anchor="t">
+            <a:spAutoFit/>
+          </a:bodyPr>
+          <a:lstStyle/>
+          <a:p>
+            <a:pPr algn="l">
+              <a:lnSpc>
+                <a:spcPct val="125000"/>
+              </a:lnSpc>
+            </a:pPr>
+            <a:r>
+              <a:rPr sz="2400" b="1">
+                <a:solidFill>
+                  <a:srgbClr val="1F2328"/>
+                </a:solidFill>
+                <a:latin typeface="Noto Sans Mono"/>
+              </a:rPr>
+              <a:t>Qt </a:t>
+            </a:r>
+            <a:r>
+              <a:rPr sz="2400" b="1">
+                <a:solidFill>
+                  <a:srgbClr val="1F2328"/>
+                </a:solidFill>
+                <a:latin typeface="Noto Sans Mono CJK KR"/>
+              </a:rPr>
+              <a:t>로컬</a:t>
+            </a:r>
+            <a:r>
+              <a:rPr sz="2400" b="1">
+                <a:solidFill>
+                  <a:srgbClr val="1F2328"/>
+                </a:solidFill>
+                <a:latin typeface="Noto Sans Mono"/>
+              </a:rPr>
+              <a:t> </a:t>
+            </a:r>
+            <a:r>
+              <a:rPr sz="2400" b="1">
+                <a:solidFill>
+                  <a:srgbClr val="1F2328"/>
+                </a:solidFill>
+                <a:latin typeface="Noto Sans Mono CJK KR"/>
+              </a:rPr>
+              <a:t>대시보드</a:t>
+            </a:r>
+            <a:r>
+              <a:rPr sz="2400" b="1">
+                <a:solidFill>
+                  <a:srgbClr val="1F2328"/>
+                </a:solidFill>
+                <a:latin typeface="Noto Sans Mono"/>
+              </a:rPr>
+              <a:t> (2/2)</a:t>
+            </a:r>
+          </a:p>
+        </p:txBody>
+      </p:sp>
+      <p:sp>
+        <p:nvSpPr>
+          <p:cNvPr id="4" name="Rounded Rectangle 3"/>
+          <p:cNvSpPr/>
+          <p:nvPr/>
+        </p:nvSpPr>
+        <p:spPr>
+          <a:xfrm>
+            <a:off x="502920" y="914400"/>
+            <a:ext cx="11155680" cy="2423160"/>
+          </a:xfrm>
+          <a:prstGeom prst="roundRect">
+            <a:avLst>
+              <a:gd name="adj" fmla="val 4500"/>
+            </a:avLst>
+          </a:prstGeom>
+          <a:solidFill>
+            <a:srgbClr val="F6F8FA"/>
+          </a:solidFill>
+          <a:ln w="9525">
+            <a:solidFill>
+              <a:srgbClr val="D0D7DE"/>
+            </a:solidFill>
+          </a:ln>
+          <a:effectLst/>
+        </p:spPr>
+        <p:style>
+          <a:lnRef idx="1">
+            <a:schemeClr val="accent1"/>
+          </a:lnRef>
+          <a:fillRef idx="3">
+            <a:schemeClr val="accent1"/>
+          </a:fillRef>
+          <a:effectRef idx="2">
+            <a:schemeClr val="accent1"/>
+          </a:effectRef>
+          <a:fontRef idx="minor">
+            <a:schemeClr val="lt1"/>
+          </a:fontRef>
+        </p:style>
+        <p:txBody>
+          <a:bodyPr rtlCol="0" anchor="ctr"/>
+          <a:lstStyle/>
+          <a:p>
+            <a:pPr algn="ctr"/>
+          </a:p>
+        </p:txBody>
+      </p:sp>
+      <p:sp>
+        <p:nvSpPr>
+          <p:cNvPr id="5" name="TextBox 4"/>
+          <p:cNvSpPr txBox="1"/>
+          <p:nvPr/>
+        </p:nvSpPr>
+        <p:spPr>
+          <a:xfrm>
+            <a:off x="722376" y="1060704"/>
+            <a:ext cx="10716768" cy="274320"/>
+          </a:xfrm>
+          <a:prstGeom prst="rect">
+            <a:avLst/>
+          </a:prstGeom>
+          <a:noFill/>
+        </p:spPr>
+        <p:txBody>
+          <a:bodyPr wrap="square" lIns="0" rIns="0" tIns="0" bIns="0" anchor="t">
+            <a:spAutoFit/>
+          </a:bodyPr>
+          <a:lstStyle/>
+          <a:p>
+            <a:pPr algn="l">
+              <a:lnSpc>
+                <a:spcPct val="125000"/>
+              </a:lnSpc>
+            </a:pPr>
+            <a:r>
+              <a:rPr sz="1450" b="1">
+                <a:solidFill>
+                  <a:srgbClr val="1F2328"/>
+                </a:solidFill>
+                <a:latin typeface="Noto Sans Mono"/>
+              </a:rPr>
+              <a:t>03. </a:t>
+            </a:r>
+            <a:r>
+              <a:rPr sz="1450" b="1">
+                <a:solidFill>
+                  <a:srgbClr val="1F2328"/>
+                </a:solidFill>
+                <a:latin typeface="Noto Sans Mono CJK KR"/>
+              </a:rPr>
+              <a:t>차트</a:t>
+            </a:r>
+            <a:r>
+              <a:rPr sz="1450" b="1">
+                <a:solidFill>
+                  <a:srgbClr val="1F2328"/>
+                </a:solidFill>
+                <a:latin typeface="Noto Sans Mono"/>
+              </a:rPr>
+              <a:t> </a:t>
+            </a:r>
+            <a:r>
+              <a:rPr sz="1450" b="1">
+                <a:solidFill>
+                  <a:srgbClr val="1F2328"/>
+                </a:solidFill>
+                <a:latin typeface="Noto Sans Mono CJK KR"/>
+              </a:rPr>
+              <a:t>갱신</a:t>
+            </a:r>
+            <a:r>
+              <a:rPr sz="1450" b="1">
+                <a:solidFill>
+                  <a:srgbClr val="1F2328"/>
+                </a:solidFill>
+                <a:latin typeface="Noto Sans Mono"/>
+              </a:rPr>
+              <a:t> — </a:t>
+            </a:r>
+            <a:r>
+              <a:rPr sz="1450" b="1">
+                <a:solidFill>
+                  <a:srgbClr val="1F2328"/>
+                </a:solidFill>
+                <a:latin typeface="Noto Sans Mono CJK KR"/>
+              </a:rPr>
+              <a:t>폴링</a:t>
+            </a:r>
+            <a:r>
+              <a:rPr sz="1450" b="1">
+                <a:solidFill>
+                  <a:srgbClr val="1F2328"/>
+                </a:solidFill>
+                <a:latin typeface="Noto Sans Mono"/>
+              </a:rPr>
+              <a:t> </a:t>
+            </a:r>
+            <a:r>
+              <a:rPr sz="1450" b="1">
+                <a:solidFill>
+                  <a:srgbClr val="1F2328"/>
+                </a:solidFill>
+                <a:latin typeface="Noto Sans Mono CJK KR"/>
+              </a:rPr>
+              <a:t>중복점</a:t>
+            </a:r>
+            <a:r>
+              <a:rPr sz="1450" b="1">
+                <a:solidFill>
+                  <a:srgbClr val="1F2328"/>
+                </a:solidFill>
+                <a:latin typeface="Noto Sans Mono"/>
+              </a:rPr>
+              <a:t> </a:t>
+            </a:r>
+            <a:r>
+              <a:rPr sz="1450" b="1">
+                <a:solidFill>
+                  <a:srgbClr val="1F2328"/>
+                </a:solidFill>
+                <a:latin typeface="Noto Sans Mono CJK KR"/>
+              </a:rPr>
+              <a:t>버그</a:t>
+            </a:r>
+            <a:r>
+              <a:rPr sz="1450" b="1">
+                <a:solidFill>
+                  <a:srgbClr val="1F2328"/>
+                </a:solidFill>
+                <a:latin typeface="Noto Sans Mono"/>
+              </a:rPr>
+              <a:t> → </a:t>
+            </a:r>
+            <a:r>
+              <a:rPr sz="1450" b="1">
+                <a:solidFill>
+                  <a:srgbClr val="1F2328"/>
+                </a:solidFill>
+                <a:latin typeface="Noto Sans Mono CJK KR"/>
+              </a:rPr>
+              <a:t>발행</a:t>
+            </a:r>
+            <a:r>
+              <a:rPr sz="1450" b="1">
+                <a:solidFill>
+                  <a:srgbClr val="1F2328"/>
+                </a:solidFill>
+                <a:latin typeface="Noto Sans Mono"/>
+              </a:rPr>
+              <a:t>-</a:t>
+            </a:r>
+            <a:r>
+              <a:rPr sz="1450" b="1">
+                <a:solidFill>
+                  <a:srgbClr val="1F2328"/>
+                </a:solidFill>
+                <a:latin typeface="Noto Sans Mono CJK KR"/>
+              </a:rPr>
+              <a:t>구독</a:t>
+            </a:r>
+            <a:r>
+              <a:rPr sz="1450" b="1">
+                <a:solidFill>
+                  <a:srgbClr val="1F2328"/>
+                </a:solidFill>
+                <a:latin typeface="Noto Sans Mono"/>
+              </a:rPr>
+              <a:t> </a:t>
+            </a:r>
+            <a:r>
+              <a:rPr sz="1450" b="1">
+                <a:solidFill>
+                  <a:srgbClr val="1F2328"/>
+                </a:solidFill>
+                <a:latin typeface="Noto Sans Mono CJK KR"/>
+              </a:rPr>
+              <a:t>재설계</a:t>
+            </a:r>
+          </a:p>
+        </p:txBody>
+      </p:sp>
+      <p:sp>
+        <p:nvSpPr>
+          <p:cNvPr id="6" name="Rounded Rectangle 5"/>
+          <p:cNvSpPr/>
+          <p:nvPr/>
+        </p:nvSpPr>
+        <p:spPr>
+          <a:xfrm>
+            <a:off x="722376" y="1426464"/>
+            <a:ext cx="10716768" cy="484632"/>
+          </a:xfrm>
+          <a:prstGeom prst="roundRect">
+            <a:avLst>
+              <a:gd name="adj" fmla="val 9000"/>
+            </a:avLst>
+          </a:prstGeom>
+          <a:solidFill>
+            <a:srgbClr val="FFFFFF"/>
+          </a:solidFill>
+          <a:ln w="9525">
+            <a:solidFill>
+              <a:srgbClr val="E4E8EC"/>
+            </a:solidFill>
+          </a:ln>
+          <a:effectLst/>
+        </p:spPr>
+        <p:style>
+          <a:lnRef idx="1">
+            <a:schemeClr val="accent1"/>
+          </a:lnRef>
+          <a:fillRef idx="3">
+            <a:schemeClr val="accent1"/>
+          </a:fillRef>
+          <a:effectRef idx="2">
+            <a:schemeClr val="accent1"/>
+          </a:effectRef>
+          <a:fontRef idx="minor">
+            <a:schemeClr val="lt1"/>
+          </a:fontRef>
+        </p:style>
+        <p:txBody>
+          <a:bodyPr rtlCol="0" anchor="ctr"/>
+          <a:lstStyle/>
+          <a:p>
+            <a:pPr algn="ctr"/>
+          </a:p>
+        </p:txBody>
+      </p:sp>
+      <p:sp>
+        <p:nvSpPr>
+          <p:cNvPr id="7" name="TextBox 6"/>
+          <p:cNvSpPr txBox="1"/>
+          <p:nvPr/>
+        </p:nvSpPr>
+        <p:spPr>
+          <a:xfrm>
+            <a:off x="868680" y="1508760"/>
+            <a:ext cx="10424160" cy="182880"/>
+          </a:xfrm>
+          <a:prstGeom prst="rect">
+            <a:avLst/>
+          </a:prstGeom>
+          <a:noFill/>
+        </p:spPr>
+        <p:txBody>
+          <a:bodyPr wrap="square" lIns="0" rIns="0" tIns="0" bIns="0" anchor="t">
+            <a:spAutoFit/>
+          </a:bodyPr>
+          <a:lstStyle/>
+          <a:p>
+            <a:pPr algn="l">
+              <a:lnSpc>
+                <a:spcPct val="125000"/>
+              </a:lnSpc>
+            </a:pPr>
+            <a:r>
+              <a:rPr sz="1000" b="1">
+                <a:solidFill>
+                  <a:srgbClr val="6E7781"/>
+                </a:solidFill>
+                <a:latin typeface="Noto Sans Mono CJK KR"/>
+              </a:rPr>
+              <a:t>문제</a:t>
+            </a:r>
+          </a:p>
+        </p:txBody>
+      </p:sp>
+      <p:sp>
+        <p:nvSpPr>
+          <p:cNvPr id="8" name="TextBox 7"/>
+          <p:cNvSpPr txBox="1"/>
+          <p:nvPr/>
+        </p:nvSpPr>
+        <p:spPr>
+          <a:xfrm>
+            <a:off x="868680" y="1700784"/>
+            <a:ext cx="10424160" cy="155448"/>
+          </a:xfrm>
+          <a:prstGeom prst="rect">
+            <a:avLst/>
+          </a:prstGeom>
+          <a:noFill/>
+        </p:spPr>
+        <p:txBody>
+          <a:bodyPr wrap="square" lIns="0" rIns="0" tIns="0" bIns="0" anchor="t">
+            <a:spAutoFit/>
+          </a:bodyPr>
+          <a:lstStyle/>
+          <a:p>
+            <a:pPr algn="l">
+              <a:lnSpc>
+                <a:spcPct val="125000"/>
+              </a:lnSpc>
+            </a:pPr>
+            <a:r>
+              <a:rPr sz="1100" b="0">
+                <a:solidFill>
+                  <a:srgbClr val="59636E"/>
+                </a:solidFill>
+                <a:latin typeface="Noto Sans CJK KR"/>
+              </a:rPr>
+              <a:t>새로고침 버튼과 폴링 타이머가 같은 트리거를 공유해 차트에 중복 점이 찍힘.</a:t>
+            </a:r>
+          </a:p>
+        </p:txBody>
+      </p:sp>
+      <p:sp>
+        <p:nvSpPr>
+          <p:cNvPr id="9" name="Rounded Rectangle 8"/>
+          <p:cNvSpPr/>
+          <p:nvPr/>
+        </p:nvSpPr>
+        <p:spPr>
+          <a:xfrm>
+            <a:off x="722376" y="2020824"/>
+            <a:ext cx="10716768" cy="484632"/>
+          </a:xfrm>
+          <a:prstGeom prst="roundRect">
+            <a:avLst>
+              <a:gd name="adj" fmla="val 9000"/>
+            </a:avLst>
+          </a:prstGeom>
+          <a:solidFill>
+            <a:srgbClr val="FFFFFF"/>
+          </a:solidFill>
+          <a:ln w="9525">
+            <a:solidFill>
+              <a:srgbClr val="E4E8EC"/>
+            </a:solidFill>
+          </a:ln>
+          <a:effectLst/>
+        </p:spPr>
+        <p:style>
+          <a:lnRef idx="1">
+            <a:schemeClr val="accent1"/>
+          </a:lnRef>
+          <a:fillRef idx="3">
+            <a:schemeClr val="accent1"/>
+          </a:fillRef>
+          <a:effectRef idx="2">
+            <a:schemeClr val="accent1"/>
+          </a:effectRef>
+          <a:fontRef idx="minor">
+            <a:schemeClr val="lt1"/>
+          </a:fontRef>
+        </p:style>
+        <p:txBody>
+          <a:bodyPr rtlCol="0" anchor="ctr"/>
+          <a:lstStyle/>
+          <a:p>
+            <a:pPr algn="ctr"/>
+          </a:p>
+        </p:txBody>
+      </p:sp>
+      <p:sp>
+        <p:nvSpPr>
+          <p:cNvPr id="10" name="TextBox 9"/>
+          <p:cNvSpPr txBox="1"/>
+          <p:nvPr/>
+        </p:nvSpPr>
+        <p:spPr>
+          <a:xfrm>
+            <a:off x="868680" y="2103120"/>
+            <a:ext cx="10424160" cy="182880"/>
+          </a:xfrm>
+          <a:prstGeom prst="rect">
+            <a:avLst/>
+          </a:prstGeom>
+          <a:noFill/>
+        </p:spPr>
+        <p:txBody>
+          <a:bodyPr wrap="square" lIns="0" rIns="0" tIns="0" bIns="0" anchor="t">
+            <a:spAutoFit/>
+          </a:bodyPr>
+          <a:lstStyle/>
+          <a:p>
+            <a:pPr algn="l">
+              <a:lnSpc>
+                <a:spcPct val="125000"/>
+              </a:lnSpc>
+            </a:pPr>
+            <a:r>
+              <a:rPr sz="1000" b="1">
+                <a:solidFill>
+                  <a:srgbClr val="0969DA"/>
+                </a:solidFill>
+                <a:latin typeface="Noto Sans Mono CJK KR"/>
+              </a:rPr>
+              <a:t>판단</a:t>
+            </a:r>
+          </a:p>
+        </p:txBody>
+      </p:sp>
+      <p:sp>
+        <p:nvSpPr>
+          <p:cNvPr id="11" name="TextBox 10"/>
+          <p:cNvSpPr txBox="1"/>
+          <p:nvPr/>
+        </p:nvSpPr>
+        <p:spPr>
+          <a:xfrm>
+            <a:off x="868680" y="2295144"/>
+            <a:ext cx="10424160" cy="155448"/>
+          </a:xfrm>
+          <a:prstGeom prst="rect">
+            <a:avLst/>
+          </a:prstGeom>
+          <a:noFill/>
+        </p:spPr>
+        <p:txBody>
+          <a:bodyPr wrap="square" lIns="0" rIns="0" tIns="0" bIns="0" anchor="t">
+            <a:spAutoFit/>
+          </a:bodyPr>
+          <a:lstStyle/>
+          <a:p>
+            <a:pPr algn="l">
+              <a:lnSpc>
+                <a:spcPct val="125000"/>
+              </a:lnSpc>
+            </a:pPr>
+            <a:r>
+              <a:rPr sz="1100" b="0">
+                <a:solidFill>
+                  <a:srgbClr val="59636E"/>
+                </a:solidFill>
+                <a:latin typeface="Noto Sans CJK KR"/>
+              </a:rPr>
+              <a:t>갱신 이벤트와 새 데이터 도착을 분리 — Collector가 신호만 쏘고 Qt가 재조회.</a:t>
+            </a:r>
+          </a:p>
+        </p:txBody>
+      </p:sp>
+      <p:sp>
+        <p:nvSpPr>
+          <p:cNvPr id="12" name="Rounded Rectangle 11"/>
+          <p:cNvSpPr/>
+          <p:nvPr/>
+        </p:nvSpPr>
+        <p:spPr>
+          <a:xfrm>
+            <a:off x="722376" y="2615184"/>
+            <a:ext cx="10716768" cy="484632"/>
+          </a:xfrm>
+          <a:prstGeom prst="roundRect">
+            <a:avLst>
+              <a:gd name="adj" fmla="val 9000"/>
+            </a:avLst>
+          </a:prstGeom>
+          <a:solidFill>
+            <a:srgbClr val="FFFFFF"/>
+          </a:solidFill>
+          <a:ln w="9525">
+            <a:solidFill>
+              <a:srgbClr val="E4E8EC"/>
+            </a:solidFill>
+          </a:ln>
+          <a:effectLst/>
+        </p:spPr>
+        <p:style>
+          <a:lnRef idx="1">
+            <a:schemeClr val="accent1"/>
+          </a:lnRef>
+          <a:fillRef idx="3">
+            <a:schemeClr val="accent1"/>
+          </a:fillRef>
+          <a:effectRef idx="2">
+            <a:schemeClr val="accent1"/>
+          </a:effectRef>
+          <a:fontRef idx="minor">
+            <a:schemeClr val="lt1"/>
+          </a:fontRef>
+        </p:style>
+        <p:txBody>
+          <a:bodyPr rtlCol="0" anchor="ctr"/>
+          <a:lstStyle/>
+          <a:p>
+            <a:pPr algn="ctr"/>
+          </a:p>
+        </p:txBody>
+      </p:sp>
+      <p:sp>
+        <p:nvSpPr>
+          <p:cNvPr id="13" name="TextBox 12"/>
+          <p:cNvSpPr txBox="1"/>
+          <p:nvPr/>
+        </p:nvSpPr>
+        <p:spPr>
+          <a:xfrm>
+            <a:off x="868680" y="2697480"/>
+            <a:ext cx="10424160" cy="182880"/>
+          </a:xfrm>
+          <a:prstGeom prst="rect">
+            <a:avLst/>
+          </a:prstGeom>
+          <a:noFill/>
+        </p:spPr>
+        <p:txBody>
+          <a:bodyPr wrap="square" lIns="0" rIns="0" tIns="0" bIns="0" anchor="t">
+            <a:spAutoFit/>
+          </a:bodyPr>
+          <a:lstStyle/>
+          <a:p>
+            <a:pPr algn="l">
+              <a:lnSpc>
+                <a:spcPct val="125000"/>
+              </a:lnSpc>
+            </a:pPr>
+            <a:r>
+              <a:rPr sz="1000" b="1">
+                <a:solidFill>
+                  <a:srgbClr val="1A7F37"/>
+                </a:solidFill>
+                <a:latin typeface="Noto Sans Mono CJK KR"/>
+              </a:rPr>
+              <a:t>해결</a:t>
+            </a:r>
+          </a:p>
+        </p:txBody>
+      </p:sp>
+      <p:sp>
+        <p:nvSpPr>
+          <p:cNvPr id="14" name="TextBox 13"/>
+          <p:cNvSpPr txBox="1"/>
+          <p:nvPr/>
+        </p:nvSpPr>
+        <p:spPr>
+          <a:xfrm>
+            <a:off x="868680" y="2889504"/>
+            <a:ext cx="10424160" cy="155448"/>
+          </a:xfrm>
+          <a:prstGeom prst="rect">
+            <a:avLst/>
+          </a:prstGeom>
+          <a:noFill/>
+        </p:spPr>
+        <p:txBody>
+          <a:bodyPr wrap="square" lIns="0" rIns="0" tIns="0" bIns="0" anchor="t">
+            <a:spAutoFit/>
+          </a:bodyPr>
+          <a:lstStyle/>
+          <a:p>
+            <a:pPr algn="l">
+              <a:lnSpc>
+                <a:spcPct val="125000"/>
+              </a:lnSpc>
+            </a:pPr>
+            <a:r>
+              <a:rPr sz="1100" b="0">
+                <a:solidFill>
+                  <a:srgbClr val="1A7F37"/>
+                </a:solidFill>
+                <a:latin typeface="Noto Sans CJK KR"/>
+              </a:rPr>
+              <a:t>Unix domain socket 발행-구독 직접 구현, Asio↔QLocalSocket 상호운용 실증.</a:t>
+            </a:r>
+          </a:p>
+        </p:txBody>
+      </p:sp>
+      <p:sp>
+        <p:nvSpPr>
+          <p:cNvPr id="15" name="Rounded Rectangle 14"/>
+          <p:cNvSpPr/>
+          <p:nvPr/>
+        </p:nvSpPr>
+        <p:spPr>
+          <a:xfrm>
+            <a:off x="502920" y="3520440"/>
+            <a:ext cx="11155680" cy="2770632"/>
+          </a:xfrm>
+          <a:prstGeom prst="roundRect">
+            <a:avLst>
+              <a:gd name="adj" fmla="val 4500"/>
+            </a:avLst>
+          </a:prstGeom>
+          <a:solidFill>
+            <a:srgbClr val="F6F8FA"/>
+          </a:solidFill>
+          <a:ln w="9525">
+            <a:solidFill>
+              <a:srgbClr val="D0D7DE"/>
+            </a:solidFill>
+          </a:ln>
+          <a:effectLst/>
+        </p:spPr>
+        <p:style>
+          <a:lnRef idx="1">
+            <a:schemeClr val="accent1"/>
+          </a:lnRef>
+          <a:fillRef idx="3">
+            <a:schemeClr val="accent1"/>
+          </a:fillRef>
+          <a:effectRef idx="2">
+            <a:schemeClr val="accent1"/>
+          </a:effectRef>
+          <a:fontRef idx="minor">
+            <a:schemeClr val="lt1"/>
+          </a:fontRef>
+        </p:style>
+        <p:txBody>
+          <a:bodyPr rtlCol="0" anchor="ctr"/>
+          <a:lstStyle/>
+          <a:p>
+            <a:pPr algn="ctr"/>
+          </a:p>
+        </p:txBody>
+      </p:sp>
+      <p:sp>
+        <p:nvSpPr>
+          <p:cNvPr id="16" name="TextBox 15"/>
+          <p:cNvSpPr txBox="1"/>
+          <p:nvPr/>
+        </p:nvSpPr>
+        <p:spPr>
+          <a:xfrm>
+            <a:off x="722376" y="3666744"/>
+            <a:ext cx="10716768" cy="274320"/>
+          </a:xfrm>
+          <a:prstGeom prst="rect">
+            <a:avLst/>
+          </a:prstGeom>
+          <a:noFill/>
+        </p:spPr>
+        <p:txBody>
+          <a:bodyPr wrap="square" lIns="0" rIns="0" tIns="0" bIns="0" anchor="t">
+            <a:spAutoFit/>
+          </a:bodyPr>
+          <a:lstStyle/>
+          <a:p>
+            <a:pPr algn="l">
+              <a:lnSpc>
+                <a:spcPct val="125000"/>
+              </a:lnSpc>
+            </a:pPr>
+            <a:r>
+              <a:rPr sz="1450" b="1">
+                <a:solidFill>
+                  <a:srgbClr val="1F2328"/>
+                </a:solidFill>
+                <a:latin typeface="Noto Sans Mono"/>
+              </a:rPr>
+              <a:t>04. Agent </a:t>
+            </a:r>
+            <a:r>
+              <a:rPr sz="1450" b="1">
+                <a:solidFill>
+                  <a:srgbClr val="1F2328"/>
+                </a:solidFill>
+                <a:latin typeface="Noto Sans Mono CJK KR"/>
+              </a:rPr>
+              <a:t>원격</a:t>
+            </a:r>
+            <a:r>
+              <a:rPr sz="1450" b="1">
+                <a:solidFill>
+                  <a:srgbClr val="1F2328"/>
+                </a:solidFill>
+                <a:latin typeface="Noto Sans Mono"/>
+              </a:rPr>
+              <a:t> </a:t>
+            </a:r>
+            <a:r>
+              <a:rPr sz="1450" b="1">
+                <a:solidFill>
+                  <a:srgbClr val="1F2328"/>
+                </a:solidFill>
+                <a:latin typeface="Noto Sans Mono CJK KR"/>
+              </a:rPr>
+              <a:t>제어</a:t>
+            </a:r>
+            <a:r>
+              <a:rPr sz="1450" b="1">
+                <a:solidFill>
+                  <a:srgbClr val="1F2328"/>
+                </a:solidFill>
+                <a:latin typeface="Noto Sans Mono"/>
+              </a:rPr>
+              <a:t> — </a:t>
+            </a:r>
+            <a:r>
+              <a:rPr sz="1450" b="1">
+                <a:solidFill>
+                  <a:srgbClr val="1F2328"/>
+                </a:solidFill>
+                <a:latin typeface="Noto Sans Mono CJK KR"/>
+              </a:rPr>
+              <a:t>로컬</a:t>
+            </a:r>
+            <a:r>
+              <a:rPr sz="1450" b="1">
+                <a:solidFill>
+                  <a:srgbClr val="1F2328"/>
+                </a:solidFill>
+                <a:latin typeface="Noto Sans Mono"/>
+              </a:rPr>
+              <a:t> IPC</a:t>
+            </a:r>
+          </a:p>
+        </p:txBody>
+      </p:sp>
+      <p:sp>
+        <p:nvSpPr>
+          <p:cNvPr id="17" name="Rounded Rectangle 16"/>
+          <p:cNvSpPr/>
+          <p:nvPr/>
+        </p:nvSpPr>
+        <p:spPr>
+          <a:xfrm>
+            <a:off x="722376" y="4032504"/>
+            <a:ext cx="10716768" cy="484632"/>
+          </a:xfrm>
+          <a:prstGeom prst="roundRect">
+            <a:avLst>
+              <a:gd name="adj" fmla="val 9000"/>
+            </a:avLst>
+          </a:prstGeom>
+          <a:solidFill>
+            <a:srgbClr val="FFFFFF"/>
+          </a:solidFill>
+          <a:ln w="9525">
+            <a:solidFill>
+              <a:srgbClr val="E4E8EC"/>
+            </a:solidFill>
+          </a:ln>
+          <a:effectLst/>
+        </p:spPr>
+        <p:style>
+          <a:lnRef idx="1">
+            <a:schemeClr val="accent1"/>
+          </a:lnRef>
+          <a:fillRef idx="3">
+            <a:schemeClr val="accent1"/>
+          </a:fillRef>
+          <a:effectRef idx="2">
+            <a:schemeClr val="accent1"/>
+          </a:effectRef>
+          <a:fontRef idx="minor">
+            <a:schemeClr val="lt1"/>
+          </a:fontRef>
+        </p:style>
+        <p:txBody>
+          <a:bodyPr rtlCol="0" anchor="ctr"/>
+          <a:lstStyle/>
+          <a:p>
+            <a:pPr algn="ctr"/>
+          </a:p>
+        </p:txBody>
+      </p:sp>
+      <p:sp>
+        <p:nvSpPr>
+          <p:cNvPr id="18" name="TextBox 17"/>
+          <p:cNvSpPr txBox="1"/>
+          <p:nvPr/>
+        </p:nvSpPr>
+        <p:spPr>
+          <a:xfrm>
+            <a:off x="868680" y="4114800"/>
+            <a:ext cx="10424160" cy="182880"/>
+          </a:xfrm>
+          <a:prstGeom prst="rect">
+            <a:avLst/>
+          </a:prstGeom>
+          <a:noFill/>
+        </p:spPr>
+        <p:txBody>
+          <a:bodyPr wrap="square" lIns="0" rIns="0" tIns="0" bIns="0" anchor="t">
+            <a:spAutoFit/>
+          </a:bodyPr>
+          <a:lstStyle/>
+          <a:p>
+            <a:pPr algn="l">
+              <a:lnSpc>
+                <a:spcPct val="125000"/>
+              </a:lnSpc>
+            </a:pPr>
+            <a:r>
+              <a:rPr sz="1000" b="1">
+                <a:solidFill>
+                  <a:srgbClr val="6E7781"/>
+                </a:solidFill>
+                <a:latin typeface="Noto Sans Mono CJK KR"/>
+              </a:rPr>
+              <a:t>문제</a:t>
+            </a:r>
+          </a:p>
+        </p:txBody>
+      </p:sp>
+      <p:sp>
+        <p:nvSpPr>
+          <p:cNvPr id="19" name="TextBox 18"/>
+          <p:cNvSpPr txBox="1"/>
+          <p:nvPr/>
+        </p:nvSpPr>
+        <p:spPr>
+          <a:xfrm>
+            <a:off x="868680" y="4306824"/>
+            <a:ext cx="10424160" cy="155448"/>
+          </a:xfrm>
+          <a:prstGeom prst="rect">
+            <a:avLst/>
+          </a:prstGeom>
+          <a:noFill/>
+        </p:spPr>
+        <p:txBody>
+          <a:bodyPr wrap="square" lIns="0" rIns="0" tIns="0" bIns="0" anchor="t">
+            <a:spAutoFit/>
+          </a:bodyPr>
+          <a:lstStyle/>
+          <a:p>
+            <a:pPr algn="l">
+              <a:lnSpc>
+                <a:spcPct val="125000"/>
+              </a:lnSpc>
+            </a:pPr>
+            <a:r>
+              <a:rPr sz="1100" b="0">
+                <a:solidFill>
+                  <a:srgbClr val="59636E"/>
+                </a:solidFill>
+                <a:latin typeface="Noto Sans CJK KR"/>
+              </a:rPr>
+              <a:t>대시보드가 보여주기만 하면 부족 — 시작/중지/재연결 같은 조작이 필요.</a:t>
+            </a:r>
+          </a:p>
+        </p:txBody>
+      </p:sp>
+      <p:sp>
+        <p:nvSpPr>
+          <p:cNvPr id="20" name="Rounded Rectangle 19"/>
+          <p:cNvSpPr/>
+          <p:nvPr/>
+        </p:nvSpPr>
+        <p:spPr>
+          <a:xfrm>
+            <a:off x="722376" y="4626864"/>
+            <a:ext cx="10716768" cy="658368"/>
+          </a:xfrm>
+          <a:prstGeom prst="roundRect">
+            <a:avLst>
+              <a:gd name="adj" fmla="val 9000"/>
+            </a:avLst>
+          </a:prstGeom>
+          <a:solidFill>
+            <a:srgbClr val="FFFFFF"/>
+          </a:solidFill>
+          <a:ln w="9525">
+            <a:solidFill>
+              <a:srgbClr val="E4E8EC"/>
+            </a:solidFill>
+          </a:ln>
+          <a:effectLst/>
+        </p:spPr>
+        <p:style>
+          <a:lnRef idx="1">
+            <a:schemeClr val="accent1"/>
+          </a:lnRef>
+          <a:fillRef idx="3">
+            <a:schemeClr val="accent1"/>
+          </a:fillRef>
+          <a:effectRef idx="2">
+            <a:schemeClr val="accent1"/>
+          </a:effectRef>
+          <a:fontRef idx="minor">
+            <a:schemeClr val="lt1"/>
+          </a:fontRef>
+        </p:style>
+        <p:txBody>
+          <a:bodyPr rtlCol="0" anchor="ctr"/>
+          <a:lstStyle/>
+          <a:p>
+            <a:pPr algn="ctr"/>
+          </a:p>
+        </p:txBody>
+      </p:sp>
+      <p:sp>
+        <p:nvSpPr>
+          <p:cNvPr id="21" name="TextBox 20"/>
+          <p:cNvSpPr txBox="1"/>
+          <p:nvPr/>
+        </p:nvSpPr>
+        <p:spPr>
+          <a:xfrm>
+            <a:off x="868680" y="4709160"/>
+            <a:ext cx="10424160" cy="182880"/>
+          </a:xfrm>
+          <a:prstGeom prst="rect">
+            <a:avLst/>
+          </a:prstGeom>
+          <a:noFill/>
+        </p:spPr>
+        <p:txBody>
+          <a:bodyPr wrap="square" lIns="0" rIns="0" tIns="0" bIns="0" anchor="t">
+            <a:spAutoFit/>
+          </a:bodyPr>
+          <a:lstStyle/>
+          <a:p>
+            <a:pPr algn="l">
+              <a:lnSpc>
+                <a:spcPct val="125000"/>
+              </a:lnSpc>
+            </a:pPr>
+            <a:r>
+              <a:rPr sz="1000" b="1">
+                <a:solidFill>
+                  <a:srgbClr val="0969DA"/>
+                </a:solidFill>
+                <a:latin typeface="Noto Sans Mono CJK KR"/>
+              </a:rPr>
+              <a:t>판단</a:t>
+            </a:r>
+          </a:p>
+        </p:txBody>
+      </p:sp>
+      <p:sp>
+        <p:nvSpPr>
+          <p:cNvPr id="22" name="TextBox 21"/>
+          <p:cNvSpPr txBox="1"/>
+          <p:nvPr/>
+        </p:nvSpPr>
+        <p:spPr>
+          <a:xfrm>
+            <a:off x="868680" y="4901184"/>
+            <a:ext cx="10424160" cy="329184"/>
+          </a:xfrm>
+          <a:prstGeom prst="rect">
+            <a:avLst/>
+          </a:prstGeom>
+          <a:noFill/>
+        </p:spPr>
+        <p:txBody>
+          <a:bodyPr wrap="square" lIns="0" rIns="0" tIns="0" bIns="0" anchor="t">
+            <a:spAutoFit/>
+          </a:bodyPr>
+          <a:lstStyle/>
+          <a:p>
+            <a:pPr algn="l">
+              <a:lnSpc>
+                <a:spcPct val="125000"/>
+              </a:lnSpc>
+            </a:pPr>
+            <a:r>
+              <a:rPr sz="1100" b="0">
+                <a:solidFill>
+                  <a:srgbClr val="59636E"/>
+                </a:solidFill>
+                <a:latin typeface="Noto Sans CJK KR"/>
+              </a:rPr>
+              <a:t>줄바꿈 구분 JSON 프로토콜, 연결 하나당 명령 하나 — Qt는 명령마다 새로 연결.</a:t>
+            </a:r>
+          </a:p>
+        </p:txBody>
+      </p:sp>
+      <p:sp>
+        <p:nvSpPr>
+          <p:cNvPr id="23" name="Rounded Rectangle 22"/>
+          <p:cNvSpPr/>
+          <p:nvPr/>
+        </p:nvSpPr>
+        <p:spPr>
+          <a:xfrm>
+            <a:off x="722376" y="5394960"/>
+            <a:ext cx="10716768" cy="658368"/>
+          </a:xfrm>
+          <a:prstGeom prst="roundRect">
+            <a:avLst>
+              <a:gd name="adj" fmla="val 9000"/>
+            </a:avLst>
+          </a:prstGeom>
+          <a:solidFill>
+            <a:srgbClr val="FFFFFF"/>
+          </a:solidFill>
+          <a:ln w="9525">
+            <a:solidFill>
+              <a:srgbClr val="E4E8EC"/>
+            </a:solidFill>
+          </a:ln>
+          <a:effectLst/>
+        </p:spPr>
+        <p:style>
+          <a:lnRef idx="1">
+            <a:schemeClr val="accent1"/>
+          </a:lnRef>
+          <a:fillRef idx="3">
+            <a:schemeClr val="accent1"/>
+          </a:fillRef>
+          <a:effectRef idx="2">
+            <a:schemeClr val="accent1"/>
+          </a:effectRef>
+          <a:fontRef idx="minor">
+            <a:schemeClr val="lt1"/>
+          </a:fontRef>
+        </p:style>
+        <p:txBody>
+          <a:bodyPr rtlCol="0" anchor="ctr"/>
+          <a:lstStyle/>
+          <a:p>
+            <a:pPr algn="ctr"/>
+          </a:p>
+        </p:txBody>
+      </p:sp>
+      <p:sp>
+        <p:nvSpPr>
+          <p:cNvPr id="24" name="TextBox 23"/>
+          <p:cNvSpPr txBox="1"/>
+          <p:nvPr/>
+        </p:nvSpPr>
+        <p:spPr>
+          <a:xfrm>
+            <a:off x="868680" y="5477256"/>
+            <a:ext cx="10424160" cy="182880"/>
+          </a:xfrm>
+          <a:prstGeom prst="rect">
+            <a:avLst/>
+          </a:prstGeom>
+          <a:noFill/>
+        </p:spPr>
+        <p:txBody>
+          <a:bodyPr wrap="square" lIns="0" rIns="0" tIns="0" bIns="0" anchor="t">
+            <a:spAutoFit/>
+          </a:bodyPr>
+          <a:lstStyle/>
+          <a:p>
+            <a:pPr algn="l">
+              <a:lnSpc>
+                <a:spcPct val="125000"/>
+              </a:lnSpc>
+            </a:pPr>
+            <a:r>
+              <a:rPr sz="1000" b="1">
+                <a:solidFill>
+                  <a:srgbClr val="1A7F37"/>
+                </a:solidFill>
+                <a:latin typeface="Noto Sans Mono CJK KR"/>
+              </a:rPr>
+              <a:t>해결</a:t>
+            </a:r>
+          </a:p>
+        </p:txBody>
+      </p:sp>
+      <p:sp>
+        <p:nvSpPr>
+          <p:cNvPr id="25" name="TextBox 24"/>
+          <p:cNvSpPr txBox="1"/>
+          <p:nvPr/>
+        </p:nvSpPr>
+        <p:spPr>
+          <a:xfrm>
+            <a:off x="868680" y="5669280"/>
+            <a:ext cx="10424160" cy="329184"/>
+          </a:xfrm>
+          <a:prstGeom prst="rect">
+            <a:avLst/>
+          </a:prstGeom>
+          <a:noFill/>
+        </p:spPr>
+        <p:txBody>
+          <a:bodyPr wrap="square" lIns="0" rIns="0" tIns="0" bIns="0" anchor="t">
+            <a:spAutoFit/>
+          </a:bodyPr>
+          <a:lstStyle/>
+          <a:p>
+            <a:pPr algn="l">
+              <a:lnSpc>
+                <a:spcPct val="125000"/>
+              </a:lnSpc>
+            </a:pPr>
+            <a:r>
+              <a:rPr sz="1100" b="0">
+                <a:solidFill>
+                  <a:srgbClr val="1A7F37"/>
+                </a:solidFill>
+                <a:latin typeface="Noto Sans CJK KR"/>
+              </a:rPr>
+              <a:t>4개 명령 실측 검증, Agent 다운 시에도 무응답 없이 '명령 실패' 즉시 표시.</a:t>
+            </a:r>
+          </a:p>
+        </p:txBody>
+      </p:sp>
+      <p:sp>
+        <p:nvSpPr>
+          <p:cNvPr id="26" name="TextBox 25"/>
+          <p:cNvSpPr txBox="1"/>
+          <p:nvPr/>
+        </p:nvSpPr>
+        <p:spPr>
+          <a:xfrm>
+            <a:off x="11475720" y="6510528"/>
+            <a:ext cx="594360" cy="256032"/>
+          </a:xfrm>
+          <a:prstGeom prst="rect">
+            <a:avLst/>
+          </a:prstGeom>
+          <a:noFill/>
+        </p:spPr>
+        <p:txBody>
+          <a:bodyPr wrap="square" lIns="0" rIns="0" tIns="0" bIns="0" anchor="t">
+            <a:spAutoFit/>
+          </a:bodyPr>
+          <a:lstStyle/>
+          <a:p>
+            <a:pPr algn="r">
+              <a:lnSpc>
+                <a:spcPct val="125000"/>
+              </a:lnSpc>
+            </a:pPr>
+            <a:r>
+              <a:rPr sz="1050" b="0">
+                <a:solidFill>
+                  <a:srgbClr val="6E7781"/>
+                </a:solidFill>
+                <a:latin typeface="Noto Sans Mono"/>
+              </a:rPr>
+              <a:t>10 / 21</a:t>
+            </a:r>
+          </a:p>
+        </p:txBody>
+      </p:sp>
+    </p:spTree>
+  </p:cSld>
+  <p:clrMapOvr>
+    <a:masterClrMapping/>
+  </p:clrMapOvr>
+</p:sld>
+</file>
+
+<file path=ppt/slides/slide21.xml><?xml version="1.0" encoding="utf-8"?>
+<p:sld xmlns:a="http://schemas.openxmlformats.org/drawingml/2006/main" xmlns:p="http://schemas.openxmlformats.org/presentationml/2006/main" xmlns:r="http://schemas.openxmlformats.org/officeDocument/2006/relationships">
+  <p:cSld>
+    <p:spTree>
+      <p:nvGrpSpPr>
+        <p:cNvPr id="1" name=""/>
+        <p:cNvGrpSpPr/>
+        <p:nvPr/>
+      </p:nvGrpSpPr>
+      <p:grpSpPr/>
+      <p:sp>
+        <p:nvSpPr>
+          <p:cNvPr id="2" name="Rectangle 1"/>
+          <p:cNvSpPr/>
+          <p:nvPr/>
+        </p:nvSpPr>
+        <p:spPr>
+          <a:xfrm>
+            <a:off x="0" y="0"/>
+            <a:ext cx="12191695" cy="6858000"/>
+          </a:xfrm>
+          <a:prstGeom prst="rect">
+            <a:avLst/>
+          </a:prstGeom>
+          <a:solidFill>
+            <a:srgbClr val="FFFFFF"/>
+          </a:solidFill>
+          <a:ln>
+            <a:noFill/>
+          </a:ln>
+          <a:effectLst/>
+        </p:spPr>
+        <p:style>
+          <a:lnRef idx="1">
+            <a:schemeClr val="accent1"/>
+          </a:lnRef>
+          <a:fillRef idx="3">
+            <a:schemeClr val="accent1"/>
+          </a:fillRef>
+          <a:effectRef idx="2">
+            <a:schemeClr val="accent1"/>
+          </a:effectRef>
+          <a:fontRef idx="minor">
+            <a:schemeClr val="lt1"/>
+          </a:fontRef>
+        </p:style>
+        <p:txBody>
+          <a:bodyPr rtlCol="0" anchor="ctr"/>
+          <a:lstStyle/>
+          <a:p>
+            <a:pPr algn="ctr"/>
+          </a:p>
+        </p:txBody>
+      </p:sp>
+      <p:sp>
+        <p:nvSpPr>
+          <p:cNvPr id="3" name="TextBox 2"/>
+          <p:cNvSpPr txBox="1"/>
+          <p:nvPr/>
+        </p:nvSpPr>
+        <p:spPr>
+          <a:xfrm>
+            <a:off x="502920" y="320040"/>
+            <a:ext cx="9144000" cy="256032"/>
+          </a:xfrm>
+          <a:prstGeom prst="rect">
+            <a:avLst/>
+          </a:prstGeom>
+          <a:noFill/>
+        </p:spPr>
+        <p:txBody>
+          <a:bodyPr wrap="square" lIns="0" rIns="0" tIns="0" bIns="0" anchor="t">
+            <a:spAutoFit/>
+          </a:bodyPr>
+          <a:lstStyle/>
+          <a:p>
+            <a:pPr algn="l">
+              <a:lnSpc>
+                <a:spcPct val="125000"/>
+              </a:lnSpc>
+            </a:pPr>
+            <a:r>
+              <a:rPr sz="1100" b="0">
+                <a:solidFill>
+                  <a:srgbClr val="6E7781"/>
+                </a:solidFill>
+                <a:latin typeface="Noto Sans Mono"/>
+              </a:rPr>
+              <a:t>A Second Control Plane</a:t>
+            </a:r>
+          </a:p>
+        </p:txBody>
+      </p:sp>
+      <p:sp>
+        <p:nvSpPr>
+          <p:cNvPr id="4" name="TextBox 3"/>
+          <p:cNvSpPr txBox="1"/>
+          <p:nvPr/>
+        </p:nvSpPr>
+        <p:spPr>
+          <a:xfrm>
+            <a:off x="502920" y="612648"/>
+            <a:ext cx="11155680" cy="502920"/>
+          </a:xfrm>
+          <a:prstGeom prst="rect">
+            <a:avLst/>
+          </a:prstGeom>
+          <a:noFill/>
+        </p:spPr>
+        <p:txBody>
+          <a:bodyPr wrap="square" lIns="0" rIns="0" tIns="0" bIns="0" anchor="t">
+            <a:spAutoFit/>
+          </a:bodyPr>
+          <a:lstStyle/>
+          <a:p>
+            <a:pPr algn="l">
+              <a:lnSpc>
+                <a:spcPct val="125000"/>
+              </a:lnSpc>
+            </a:pPr>
+            <a:r>
+              <a:rPr sz="2400" b="1">
+                <a:solidFill>
+                  <a:srgbClr val="1F2328"/>
+                </a:solidFill>
+                <a:latin typeface="Noto Sans Mono"/>
+              </a:rPr>
+              <a:t>Qt </a:t>
+            </a:r>
+            <a:r>
+              <a:rPr sz="2400" b="1">
+                <a:solidFill>
+                  <a:srgbClr val="1F2328"/>
+                </a:solidFill>
+                <a:latin typeface="Noto Sans Mono CJK KR"/>
+              </a:rPr>
+              <a:t>로컬</a:t>
+            </a:r>
+            <a:r>
+              <a:rPr sz="2400" b="1">
+                <a:solidFill>
+                  <a:srgbClr val="1F2328"/>
+                </a:solidFill>
+                <a:latin typeface="Noto Sans Mono"/>
+              </a:rPr>
+              <a:t> </a:t>
+            </a:r>
+            <a:r>
+              <a:rPr sz="2400" b="1">
+                <a:solidFill>
+                  <a:srgbClr val="1F2328"/>
+                </a:solidFill>
+                <a:latin typeface="Noto Sans Mono CJK KR"/>
+              </a:rPr>
+              <a:t>대시보드</a:t>
+            </a:r>
+            <a:r>
+              <a:rPr sz="2400" b="1">
+                <a:solidFill>
+                  <a:srgbClr val="1F2328"/>
+                </a:solidFill>
+                <a:latin typeface="Noto Sans Mono"/>
+              </a:rPr>
+              <a:t> — </a:t>
+            </a:r>
+            <a:r>
+              <a:rPr sz="2400" b="1">
+                <a:solidFill>
+                  <a:srgbClr val="1F2328"/>
+                </a:solidFill>
+                <a:latin typeface="Noto Sans Mono CJK KR"/>
+              </a:rPr>
+              <a:t>실행</a:t>
+            </a:r>
+            <a:r>
+              <a:rPr sz="2400" b="1">
+                <a:solidFill>
+                  <a:srgbClr val="1F2328"/>
+                </a:solidFill>
+                <a:latin typeface="Noto Sans Mono"/>
+              </a:rPr>
+              <a:t> </a:t>
+            </a:r>
+            <a:r>
+              <a:rPr sz="2400" b="1">
+                <a:solidFill>
+                  <a:srgbClr val="1F2328"/>
+                </a:solidFill>
+                <a:latin typeface="Noto Sans Mono CJK KR"/>
+              </a:rPr>
+              <a:t>화면</a:t>
+            </a:r>
+          </a:p>
+        </p:txBody>
+      </p:sp>
+      <p:sp>
+        <p:nvSpPr>
+          <p:cNvPr id="5" name="TextBox 4"/>
+          <p:cNvSpPr txBox="1"/>
+          <p:nvPr/>
+        </p:nvSpPr>
+        <p:spPr>
+          <a:xfrm>
+            <a:off x="502920" y="1115568"/>
+            <a:ext cx="11155680" cy="457200"/>
+          </a:xfrm>
+          <a:prstGeom prst="rect">
+            <a:avLst/>
+          </a:prstGeom>
+          <a:noFill/>
+        </p:spPr>
+        <p:txBody>
+          <a:bodyPr wrap="square" lIns="0" rIns="0" tIns="0" bIns="0" anchor="t">
+            <a:spAutoFit/>
+          </a:bodyPr>
+          <a:lstStyle/>
+          <a:p>
+            <a:pPr algn="l">
+              <a:lnSpc>
+                <a:spcPct val="120000"/>
+              </a:lnSpc>
+            </a:pPr>
+            <a:r>
+              <a:rPr sz="1300" b="0">
+                <a:solidFill>
+                  <a:srgbClr val="59636E"/>
+                </a:solidFill>
+                <a:latin typeface="Noto Sans CJK KR"/>
+              </a:rPr>
+              <a:t>Collector+Agent+Qt를 함께 띄우고 촬영 — 제어판·상태·차트·지표·알림이 한 화면에.</a:t>
+            </a:r>
+          </a:p>
+        </p:txBody>
+      </p:sp>
+      <p:sp>
+        <p:nvSpPr>
+          <p:cNvPr id="6" name="TextBox 5"/>
+          <p:cNvSpPr txBox="1"/>
+          <p:nvPr/>
+        </p:nvSpPr>
+        <p:spPr>
+          <a:xfrm>
+            <a:off x="502920" y="1591056"/>
+            <a:ext cx="11155680" cy="256032"/>
+          </a:xfrm>
+          <a:prstGeom prst="rect">
+            <a:avLst/>
+          </a:prstGeom>
+          <a:noFill/>
+        </p:spPr>
+        <p:txBody>
+          <a:bodyPr wrap="square" lIns="0" rIns="0" tIns="0" bIns="0" anchor="t">
+            <a:spAutoFit/>
+          </a:bodyPr>
+          <a:lstStyle/>
+          <a:p>
+            <a:pPr algn="ctr">
+              <a:lnSpc>
+                <a:spcPct val="125000"/>
+              </a:lnSpc>
+            </a:pPr>
+            <a:r>
+              <a:rPr sz="1300" b="1">
+                <a:solidFill>
+                  <a:srgbClr val="1F2328"/>
+                </a:solidFill>
+                <a:latin typeface="Noto Sans Mono"/>
+              </a:rPr>
+              <a:t>APM_QtDashboard</a:t>
+            </a:r>
+          </a:p>
+        </p:txBody>
+      </p:sp>
+      <p:sp>
+        <p:nvSpPr>
+          <p:cNvPr id="7" name="Rounded Rectangle 6"/>
+          <p:cNvSpPr/>
+          <p:nvPr/>
+        </p:nvSpPr>
+        <p:spPr>
+          <a:xfrm>
+            <a:off x="3435847" y="1930000"/>
+            <a:ext cx="5320000" cy="4561128"/>
+          </a:xfrm>
+          <a:prstGeom prst="roundRect">
+            <a:avLst>
+              <a:gd name="adj" fmla="val 4000"/>
+            </a:avLst>
+          </a:prstGeom>
+          <a:solidFill>
+            <a:srgbClr val="F6F8FA"/>
+          </a:solidFill>
+          <a:ln w="9525">
+            <a:solidFill>
+              <a:srgbClr val="D0D7DE"/>
+            </a:solidFill>
+          </a:ln>
+          <a:effectLst/>
+        </p:spPr>
+        <p:style>
+          <a:lnRef idx="1">
+            <a:schemeClr val="accent1"/>
+          </a:lnRef>
+          <a:fillRef idx="3">
+            <a:schemeClr val="accent1"/>
+          </a:fillRef>
+          <a:effectRef idx="2">
+            <a:schemeClr val="accent1"/>
+          </a:effectRef>
+          <a:fontRef idx="minor">
+            <a:schemeClr val="lt1"/>
+          </a:fontRef>
+        </p:style>
+        <p:txBody>
+          <a:bodyPr rtlCol="0" anchor="ctr"/>
+          <a:lstStyle/>
+          <a:p>
+            <a:pPr algn="ctr"/>
+          </a:p>
+        </p:txBody>
+      </p:sp>
+      <p:pic>
+        <p:nvPicPr>
+          <p:cNvPr id="8" name="Picture 7" descr="qt_dashboard.png"/>
+          <p:cNvPicPr>
+            <a:picLocks noChangeAspect="1"/>
+          </p:cNvPicPr>
+          <p:nvPr/>
+        </p:nvPicPr>
+        <p:blipFill>
+          <a:blip r:embed="rId2"/>
+          <a:stretch>
+            <a:fillRect/>
+          </a:stretch>
+        </p:blipFill>
+        <p:spPr>
+          <a:xfrm>
+            <a:off x="3495847" y="1990000"/>
+            <a:ext cx="5200000" cy="4441128"/>
+          </a:xfrm>
+          <a:prstGeom prst="rect">
+            <a:avLst/>
+          </a:prstGeom>
+        </p:spPr>
+      </p:pic>
+      <p:sp>
+        <p:nvSpPr>
+          <p:cNvPr id="12" name="TextBox 11"/>
+          <p:cNvSpPr txBox="1"/>
+          <p:nvPr/>
+        </p:nvSpPr>
+        <p:spPr>
+          <a:xfrm>
+            <a:off x="11475720" y="6510528"/>
+            <a:ext cx="594360" cy="256032"/>
+          </a:xfrm>
+          <a:prstGeom prst="rect">
+            <a:avLst/>
+          </a:prstGeom>
+          <a:noFill/>
+        </p:spPr>
+        <p:txBody>
+          <a:bodyPr wrap="square" lIns="0" rIns="0" tIns="0" bIns="0" anchor="t">
+            <a:spAutoFit/>
+          </a:bodyPr>
+          <a:lstStyle/>
+          <a:p>
+            <a:pPr algn="r">
+              <a:lnSpc>
+                <a:spcPct val="125000"/>
+              </a:lnSpc>
+            </a:pPr>
+            <a:r>
+              <a:rPr sz="1050" b="0">
+                <a:solidFill>
+                  <a:srgbClr val="6E7781"/>
+                </a:solidFill>
+                <a:latin typeface="Noto Sans Mono"/>
+              </a:rPr>
+              <a:t>11 / 21</a:t>
             </a:r>
           </a:p>
         </p:txBody>
@@ -19998,7 +23340,7 @@
                 </a:solidFill>
                 <a:latin typeface="Noto Sans Mono"/>
               </a:rPr>
-              <a:t>3 / 18</a:t>
+              <a:t>3 / 21</a:t>
             </a:r>
           </a:p>
         </p:txBody>
@@ -21394,7 +24736,7 @@
                 </a:solidFill>
                 <a:latin typeface="Noto Sans Mono"/>
               </a:rPr>
-              <a:t>4 / 18</a:t>
+              <a:t>4 / 21</a:t>
             </a:r>
           </a:p>
         </p:txBody>
@@ -22710,7 +26052,7 @@
                 </a:solidFill>
                 <a:latin typeface="Noto Sans Mono"/>
               </a:rPr>
-              <a:t>5 / 18</a:t>
+              <a:t>5 / 21</a:t>
             </a:r>
           </a:p>
         </p:txBody>
@@ -23825,7 +27167,7 @@
                 </a:solidFill>
                 <a:latin typeface="Noto Sans Mono"/>
               </a:rPr>
-              <a:t>6 / 18</a:t>
+              <a:t>6 / 21</a:t>
             </a:r>
           </a:p>
         </p:txBody>
@@ -25012,7 +28354,7 @@
                 </a:solidFill>
                 <a:latin typeface="Noto Sans Mono"/>
               </a:rPr>
-              <a:t>7 / 18</a:t>
+              <a:t>7 / 21</a:t>
             </a:r>
           </a:p>
         </p:txBody>
@@ -26309,7 +29651,7 @@
                 </a:solidFill>
                 <a:latin typeface="Noto Sans Mono"/>
               </a:rPr>
-              <a:t>8 / 18</a:t>
+              <a:t>8 / 21</a:t>
             </a:r>
           </a:p>
         </p:txBody>
@@ -28884,7 +32226,7 @@
                 </a:solidFill>
                 <a:latin typeface="Noto Sans Mono"/>
               </a:rPr>
-              <a:t>9 / 18</a:t>
+              <a:t>12 / 21</a:t>
             </a:r>
           </a:p>
         </p:txBody>

--- a/Docs/portfolio_apm_light.pptx
+++ b/Docs/portfolio_apm_light.pptx
@@ -18,9 +18,9 @@
     <p:sldId id="276" r:id="rId27"/>
     <p:sldId id="264" r:id="rId15"/>
     <p:sldId id="265" r:id="rId16"/>
-    <p:sldId id="266" r:id="rId17"/>
     <p:sldId id="267" r:id="rId18"/>
     <p:sldId id="268" r:id="rId19"/>
+    <p:sldId id="277" r:id="rId28"/>
     <p:sldId id="269" r:id="rId20"/>
     <p:sldId id="270" r:id="rId21"/>
     <p:sldId id="271" r:id="rId22"/>
@@ -3531,7 +3531,7 @@
                 </a:solidFill>
                 <a:latin typeface="Noto Sans CJK KR"/>
               </a:rPr>
-              <a:t>기존 IOCP 기반 TCP 서버 경험을 Standalone Asio로 재구성한 크로스플랫폼 네트워크 코어 위에, TLS·페이로드 이중 암호화(AES-256-GCM)·메시지 프레이밍·타입 안전 직렬화를 갖춘 수집 에이전트와, .NET 8 플러그인 아키텍처 기반 실시간 대시보드까지 1인 설계·구현.</a:t>
+              <a:t>기존 IOCP 기반 TCP 서버 경험을 Standalone Asio로 재구성한 크로스플랫폼 네트워크 코어 위에, TLS·페이로드 이중 암호화(AES-256-GCM)·메시지 프레이밍·타입 안전 직렬화를 갖춘 수집 에이전트와, .NET 8 플러그인 아키텍처 기반 실시간 대시보드까지 1인 설계·구현. Console과 무관하게 같은 장비에서만 도는 Qt 로컬 대시보드+제어판도 별도 트랙으로 추가.</a:t>
             </a:r>
           </a:p>
         </p:txBody>
@@ -4295,6 +4295,138 @@
           </a:p>
         </p:txBody>
       </p:sp>
+      <p:sp>
+        <p:nvSpPr>
+          <p:cNvPr id="60" name="Rounded Rectangle 60"/>
+          <p:cNvSpPr/>
+          <p:nvPr/>
+        </p:nvSpPr>
+        <p:spPr>
+          <a:xfrm>
+            <a:off x="8446860" y="3931920"/>
+            <a:ext cx="2771145" cy="256032"/>
+          </a:xfrm>
+          <a:prstGeom prst="roundRect">
+            <a:avLst>
+              <a:gd name="adj" fmla="val 35000"/>
+            </a:avLst>
+          </a:prstGeom>
+          <a:solidFill>
+            <a:srgbClr val="F6F8FA"/>
+          </a:solidFill>
+          <a:ln w="9525">
+            <a:solidFill>
+              <a:srgbClr val="D0D7DE"/>
+            </a:solidFill>
+          </a:ln>
+          <a:effectLst/>
+        </p:spPr>
+        <p:style>
+          <a:lnRef idx="1">
+            <a:schemeClr val="accent1"/>
+          </a:lnRef>
+          <a:fillRef idx="3">
+            <a:schemeClr val="accent1"/>
+          </a:fillRef>
+          <a:effectRef idx="2">
+            <a:schemeClr val="accent1"/>
+          </a:effectRef>
+          <a:fontRef idx="minor">
+            <a:schemeClr val="lt1"/>
+          </a:fontRef>
+        </p:style>
+        <p:txBody>
+          <a:bodyPr rtlCol="0" anchor="ctr"/>
+          <a:lstStyle/>
+          <a:p>
+            <a:pPr algn="ctr"/>
+          </a:p>
+        </p:txBody>
+      </p:sp>
+      <p:sp>
+        <p:nvSpPr>
+          <p:cNvPr id="61" name="TextBox 61"/>
+          <p:cNvSpPr txBox="1"/>
+          <p:nvPr/>
+        </p:nvSpPr>
+        <p:spPr>
+          <a:xfrm>
+            <a:off x="8446860" y="3931920"/>
+            <a:ext cx="2771145" cy="256032"/>
+          </a:xfrm>
+          <a:prstGeom prst="rect">
+            <a:avLst/>
+          </a:prstGeom>
+          <a:noFill/>
+        </p:spPr>
+        <p:txBody>
+          <a:bodyPr wrap="none" lIns="0" rIns="0" tIns="0" bIns="0" anchor="ctr">
+            <a:spAutoFit/>
+          </a:bodyPr>
+          <a:lstStyle/>
+          <a:p>
+            <a:pPr algn="ctr">
+              <a:lnSpc>
+                <a:spcPct val="125000"/>
+              </a:lnSpc>
+            </a:pPr>
+            <a:r>
+              <a:rPr sz="1050" b="0">
+                <a:solidFill>
+                  <a:srgbClr val="59636E"/>
+                </a:solidFill>
+                <a:latin typeface="Noto Sans Mono"/>
+              </a:rPr>
+              <a:t>Qt </a:t>
+            </a:r>
+            <a:r>
+              <a:rPr sz="1050" b="0">
+                <a:solidFill>
+                  <a:srgbClr val="59636E"/>
+                </a:solidFill>
+                <a:latin typeface="Noto Sans Mono CJK KR"/>
+              </a:rPr>
+              <a:t>로컬</a:t>
+            </a:r>
+            <a:r>
+              <a:rPr sz="1050" b="0">
+                <a:solidFill>
+                  <a:srgbClr val="59636E"/>
+                </a:solidFill>
+                <a:latin typeface="Noto Sans Mono"/>
+              </a:rPr>
+              <a:t> </a:t>
+            </a:r>
+            <a:r>
+              <a:rPr sz="1050" b="0">
+                <a:solidFill>
+                  <a:srgbClr val="59636E"/>
+                </a:solidFill>
+                <a:latin typeface="Noto Sans Mono CJK KR"/>
+              </a:rPr>
+              <a:t>대시보드</a:t>
+            </a:r>
+            <a:r>
+              <a:rPr sz="1050" b="0">
+                <a:solidFill>
+                  <a:srgbClr val="59636E"/>
+                </a:solidFill>
+                <a:latin typeface="Noto Sans Mono"/>
+              </a:rPr>
+              <a:t>+IPC </a:t>
+            </a:r>
+            <a:r>
+              <a:rPr sz="1050" b="0">
+                <a:solidFill>
+                  <a:srgbClr val="59636E"/>
+                </a:solidFill>
+                <a:latin typeface="Noto Sans Mono CJK KR"/>
+              </a:rPr>
+              <a:t>제어</a:t>
+            </a:r>
+          </a:p>
+        </p:txBody>
+      </p:sp>
       <p:cxnSp>
         <p:nvCxnSpPr>
           <p:cNvPr id="24" name="Connector 23"/>
@@ -4520,7 +4652,7 @@
                 </a:solidFill>
                 <a:latin typeface="Noto Sans Mono"/>
               </a:rPr>
-              <a:t>27</a:t>
+              <a:t>36</a:t>
             </a:r>
           </a:p>
         </p:txBody>
@@ -4598,7 +4730,7 @@
                 </a:solidFill>
                 <a:latin typeface="Noto Sans Mono"/>
               </a:rPr>
-              <a:t>10</a:t>
+              <a:t>13.8MB</a:t>
             </a:r>
           </a:p>
         </p:txBody>
@@ -4637,7 +4769,7 @@
                 </a:solidFill>
                 <a:latin typeface="Noto Sans CJK KR"/>
               </a:rPr>
-              <a:t>버그 발견/수정</a:t>
+              <a:t>RSS 5분 고정</a:t>
             </a:r>
           </a:p>
         </p:txBody>
@@ -5695,7 +5827,7 @@
                 </a:solidFill>
                 <a:latin typeface="Noto Sans CJK KR"/>
               </a:rPr>
-              <a:t>기존 JobQueue 재사용 후 재실측 중 10초 만에 반복 크래시 — 크로스 스레드에서 처음 드러난 락 버그(다음 슬라이드 상세).</a:t>
+              <a:t>기존 JobQueue 재사용 후 재실측 중 10초 만에 반복 크래시 — 원인 불명 락 버그 — 공유 코드는 건드리지 않고 우선 우회(원인은 이후 원본과 diff로 규명, 이관 중 생긴 결함).</a:t>
             </a:r>
           </a:p>
         </p:txBody>
@@ -5821,7 +5953,7 @@
                 </a:solidFill>
                 <a:latin typeface="Noto Sans CJK KR"/>
               </a:rPr>
-              <a:t>전용 std::mutex 기반 큐로 교체 → 100/100 전원 성공, p95/p99 사실상 0ms. 300-agent도 71→229로 3배 개선.</a:t>
+              <a:t>전용 std::mutex 기반 큐로 교체 → 100/100 전원 성공, p95 0ms/p99 1,010ms로 개선. 300-agent도 71→229로 3배 개선.</a:t>
             </a:r>
           </a:p>
         </p:txBody>
@@ -6065,1826 +6197,6 @@
                 <a:latin typeface="Noto Sans Mono"/>
               </a:rPr>
               <a:t>13 / 21</a:t>
-            </a:r>
-          </a:p>
-        </p:txBody>
-      </p:sp>
-    </p:spTree>
-  </p:cSld>
-  <p:clrMapOvr>
-    <a:masterClrMapping/>
-  </p:clrMapOvr>
-</p:sld>
-</file>
-
-<file path=ppt/slides/slide11.xml><?xml version="1.0" encoding="utf-8"?>
-<p:sld xmlns:a="http://schemas.openxmlformats.org/drawingml/2006/main" xmlns:p="http://schemas.openxmlformats.org/presentationml/2006/main" xmlns:r="http://schemas.openxmlformats.org/officeDocument/2006/relationships">
-  <p:cSld>
-    <p:spTree>
-      <p:nvGrpSpPr>
-        <p:cNvPr id="1" name=""/>
-        <p:cNvGrpSpPr/>
-        <p:nvPr/>
-      </p:nvGrpSpPr>
-      <p:grpSpPr/>
-      <p:sp>
-        <p:nvSpPr>
-          <p:cNvPr id="2" name="Rectangle 1"/>
-          <p:cNvSpPr/>
-          <p:nvPr/>
-        </p:nvSpPr>
-        <p:spPr>
-          <a:xfrm>
-            <a:off x="0" y="0"/>
-            <a:ext cx="12191695" cy="6858000"/>
-          </a:xfrm>
-          <a:prstGeom prst="rect">
-            <a:avLst/>
-          </a:prstGeom>
-          <a:solidFill>
-            <a:srgbClr val="FFFFFF"/>
-          </a:solidFill>
-          <a:ln>
-            <a:noFill/>
-          </a:ln>
-          <a:effectLst/>
-        </p:spPr>
-        <p:style>
-          <a:lnRef idx="1">
-            <a:schemeClr val="accent1"/>
-          </a:lnRef>
-          <a:fillRef idx="3">
-            <a:schemeClr val="accent1"/>
-          </a:fillRef>
-          <a:effectRef idx="2">
-            <a:schemeClr val="accent1"/>
-          </a:effectRef>
-          <a:fontRef idx="minor">
-            <a:schemeClr val="lt1"/>
-          </a:fontRef>
-        </p:style>
-        <p:txBody>
-          <a:bodyPr rtlCol="0" anchor="ctr"/>
-          <a:lstStyle/>
-          <a:p>
-            <a:pPr algn="ctr"/>
-          </a:p>
-        </p:txBody>
-      </p:sp>
-      <p:sp>
-        <p:nvSpPr>
-          <p:cNvPr id="3" name="TextBox 2"/>
-          <p:cNvSpPr txBox="1"/>
-          <p:nvPr/>
-        </p:nvSpPr>
-        <p:spPr>
-          <a:xfrm>
-            <a:off x="502920" y="320040"/>
-            <a:ext cx="11155680" cy="502920"/>
-          </a:xfrm>
-          <a:prstGeom prst="rect">
-            <a:avLst/>
-          </a:prstGeom>
-          <a:noFill/>
-        </p:spPr>
-        <p:txBody>
-          <a:bodyPr wrap="square" lIns="0" rIns="0" tIns="0" bIns="0" anchor="t">
-            <a:spAutoFit/>
-          </a:bodyPr>
-          <a:lstStyle/>
-          <a:p>
-            <a:pPr algn="l">
-              <a:lnSpc>
-                <a:spcPct val="125000"/>
-              </a:lnSpc>
-            </a:pPr>
-            <a:r>
-              <a:rPr sz="2400" b="1">
-                <a:solidFill>
-                  <a:srgbClr val="1F2328"/>
-                </a:solidFill>
-                <a:latin typeface="Noto Sans Mono CJK KR"/>
-              </a:rPr>
-              <a:t>버그</a:t>
-            </a:r>
-            <a:r>
-              <a:rPr sz="2400" b="1">
-                <a:solidFill>
-                  <a:srgbClr val="1F2328"/>
-                </a:solidFill>
-                <a:latin typeface="Noto Sans Mono"/>
-              </a:rPr>
-              <a:t> </a:t>
-            </a:r>
-            <a:r>
-              <a:rPr sz="2400" b="1">
-                <a:solidFill>
-                  <a:srgbClr val="1F2328"/>
-                </a:solidFill>
-                <a:latin typeface="Noto Sans Mono CJK KR"/>
-              </a:rPr>
-              <a:t>스포트라이트</a:t>
-            </a:r>
-            <a:r>
-              <a:rPr sz="2400" b="1">
-                <a:solidFill>
-                  <a:srgbClr val="1F2328"/>
-                </a:solidFill>
-                <a:latin typeface="Noto Sans Mono"/>
-              </a:rPr>
-              <a:t> — </a:t>
-            </a:r>
-            <a:r>
-              <a:rPr sz="2400" b="1">
-                <a:solidFill>
-                  <a:srgbClr val="1F2328"/>
-                </a:solidFill>
-                <a:latin typeface="Noto Sans Mono CJK KR"/>
-              </a:rPr>
-              <a:t>공유</a:t>
-            </a:r>
-            <a:r>
-              <a:rPr sz="2400" b="1">
-                <a:solidFill>
-                  <a:srgbClr val="1F2328"/>
-                </a:solidFill>
-                <a:latin typeface="Noto Sans Mono"/>
-              </a:rPr>
-              <a:t> </a:t>
-            </a:r>
-            <a:r>
-              <a:rPr sz="2400" b="1">
-                <a:solidFill>
-                  <a:srgbClr val="1F2328"/>
-                </a:solidFill>
-                <a:latin typeface="Noto Sans Mono CJK KR"/>
-              </a:rPr>
-              <a:t>락</a:t>
-            </a:r>
-            <a:r>
-              <a:rPr sz="2400" b="1">
-                <a:solidFill>
-                  <a:srgbClr val="1F2328"/>
-                </a:solidFill>
-                <a:latin typeface="Noto Sans Mono"/>
-              </a:rPr>
-              <a:t> </a:t>
-            </a:r>
-            <a:r>
-              <a:rPr sz="2400" b="1">
-                <a:solidFill>
-                  <a:srgbClr val="1F2328"/>
-                </a:solidFill>
-                <a:latin typeface="Noto Sans Mono CJK KR"/>
-              </a:rPr>
-              <a:t>라이브러리의</a:t>
-            </a:r>
-            <a:r>
-              <a:rPr sz="2400" b="1">
-                <a:solidFill>
-                  <a:srgbClr val="1F2328"/>
-                </a:solidFill>
-                <a:latin typeface="Noto Sans Mono"/>
-              </a:rPr>
-              <a:t> </a:t>
-            </a:r>
-            <a:r>
-              <a:rPr sz="2400" b="1">
-                <a:solidFill>
-                  <a:srgbClr val="1F2328"/>
-                </a:solidFill>
-                <a:latin typeface="Noto Sans Mono CJK KR"/>
-              </a:rPr>
-              <a:t>소유권</a:t>
-            </a:r>
-            <a:r>
-              <a:rPr sz="2400" b="1">
-                <a:solidFill>
-                  <a:srgbClr val="1F2328"/>
-                </a:solidFill>
-                <a:latin typeface="Noto Sans Mono"/>
-              </a:rPr>
-              <a:t> </a:t>
-            </a:r>
-            <a:r>
-              <a:rPr sz="2400" b="1">
-                <a:solidFill>
-                  <a:srgbClr val="1F2328"/>
-                </a:solidFill>
-                <a:latin typeface="Noto Sans Mono CJK KR"/>
-              </a:rPr>
-              <a:t>버그</a:t>
-            </a:r>
-          </a:p>
-        </p:txBody>
-      </p:sp>
-      <p:sp>
-        <p:nvSpPr>
-          <p:cNvPr id="4" name="Rounded Rectangle 3"/>
-          <p:cNvSpPr/>
-          <p:nvPr/>
-        </p:nvSpPr>
-        <p:spPr>
-          <a:xfrm>
-            <a:off x="502920" y="914400"/>
-            <a:ext cx="11155680" cy="1737360"/>
-          </a:xfrm>
-          <a:prstGeom prst="roundRect">
-            <a:avLst>
-              <a:gd name="adj" fmla="val 4000"/>
-            </a:avLst>
-          </a:prstGeom>
-          <a:solidFill>
-            <a:srgbClr val="F6F8FA"/>
-          </a:solidFill>
-          <a:ln w="9525">
-            <a:solidFill>
-              <a:srgbClr val="D0D7DE"/>
-            </a:solidFill>
-          </a:ln>
-          <a:effectLst/>
-        </p:spPr>
-        <p:style>
-          <a:lnRef idx="1">
-            <a:schemeClr val="accent1"/>
-          </a:lnRef>
-          <a:fillRef idx="3">
-            <a:schemeClr val="accent1"/>
-          </a:fillRef>
-          <a:effectRef idx="2">
-            <a:schemeClr val="accent1"/>
-          </a:effectRef>
-          <a:fontRef idx="minor">
-            <a:schemeClr val="lt1"/>
-          </a:fontRef>
-        </p:style>
-        <p:txBody>
-          <a:bodyPr rtlCol="0" anchor="ctr"/>
-          <a:lstStyle/>
-          <a:p>
-            <a:pPr algn="ctr"/>
-          </a:p>
-        </p:txBody>
-      </p:sp>
-      <p:sp>
-        <p:nvSpPr>
-          <p:cNvPr id="5" name="Rectangle 4"/>
-          <p:cNvSpPr/>
-          <p:nvPr/>
-        </p:nvSpPr>
-        <p:spPr>
-          <a:xfrm>
-            <a:off x="502920" y="960120"/>
-            <a:ext cx="54864" cy="1645920"/>
-          </a:xfrm>
-          <a:prstGeom prst="rect">
-            <a:avLst/>
-          </a:prstGeom>
-          <a:solidFill>
-            <a:srgbClr val="CF222E"/>
-          </a:solidFill>
-          <a:ln>
-            <a:noFill/>
-          </a:ln>
-          <a:effectLst/>
-        </p:spPr>
-        <p:style>
-          <a:lnRef idx="1">
-            <a:schemeClr val="accent1"/>
-          </a:lnRef>
-          <a:fillRef idx="3">
-            <a:schemeClr val="accent1"/>
-          </a:fillRef>
-          <a:effectRef idx="2">
-            <a:schemeClr val="accent1"/>
-          </a:effectRef>
-          <a:fontRef idx="minor">
-            <a:schemeClr val="lt1"/>
-          </a:fontRef>
-        </p:style>
-        <p:txBody>
-          <a:bodyPr rtlCol="0" anchor="ctr"/>
-          <a:lstStyle/>
-          <a:p>
-            <a:pPr algn="ctr"/>
-          </a:p>
-        </p:txBody>
-      </p:sp>
-      <p:sp>
-        <p:nvSpPr>
-          <p:cNvPr id="6" name="TextBox 5"/>
-          <p:cNvSpPr txBox="1"/>
-          <p:nvPr/>
-        </p:nvSpPr>
-        <p:spPr>
-          <a:xfrm>
-            <a:off x="740664" y="1042416"/>
-            <a:ext cx="10698480" cy="274320"/>
-          </a:xfrm>
-          <a:prstGeom prst="rect">
-            <a:avLst/>
-          </a:prstGeom>
-          <a:noFill/>
-        </p:spPr>
-        <p:txBody>
-          <a:bodyPr wrap="square" lIns="0" rIns="0" tIns="0" bIns="0" anchor="t">
-            <a:spAutoFit/>
-          </a:bodyPr>
-          <a:lstStyle/>
-          <a:p>
-            <a:pPr algn="l">
-              <a:lnSpc>
-                <a:spcPct val="130000"/>
-              </a:lnSpc>
-            </a:pPr>
-            <a:r>
-              <a:rPr sz="1300" b="1">
-                <a:solidFill>
-                  <a:srgbClr val="CF222E"/>
-                </a:solidFill>
-                <a:latin typeface="Noto Sans Mono"/>
-              </a:rPr>
-              <a:t>✕ </a:t>
-            </a:r>
-            <a:r>
-              <a:rPr sz="1300" b="1">
-                <a:solidFill>
-                  <a:srgbClr val="CF222E"/>
-                </a:solidFill>
-                <a:latin typeface="Noto Sans Mono CJK KR"/>
-              </a:rPr>
-              <a:t>문제</a:t>
-            </a:r>
-            <a:r>
-              <a:rPr sz="1300" b="1">
-                <a:solidFill>
-                  <a:srgbClr val="CF222E"/>
-                </a:solidFill>
-                <a:latin typeface="Noto Sans Mono"/>
-              </a:rPr>
-              <a:t> — </a:t>
-            </a:r>
-            <a:r>
-              <a:rPr sz="1300" b="1">
-                <a:solidFill>
-                  <a:srgbClr val="CF222E"/>
-                </a:solidFill>
-                <a:latin typeface="Noto Sans Mono CJK KR"/>
-              </a:rPr>
-              <a:t>저장</a:t>
-            </a:r>
-            <a:r>
-              <a:rPr sz="1300" b="1">
-                <a:solidFill>
-                  <a:srgbClr val="CF222E"/>
-                </a:solidFill>
-                <a:latin typeface="Noto Sans Mono"/>
-              </a:rPr>
-              <a:t> </a:t>
-            </a:r>
-            <a:r>
-              <a:rPr sz="1300" b="1">
-                <a:solidFill>
-                  <a:srgbClr val="CF222E"/>
-                </a:solidFill>
-                <a:latin typeface="Noto Sans Mono CJK KR"/>
-              </a:rPr>
-              <a:t>비동기화</a:t>
-            </a:r>
-            <a:r>
-              <a:rPr sz="1300" b="1">
-                <a:solidFill>
-                  <a:srgbClr val="CF222E"/>
-                </a:solidFill>
-                <a:latin typeface="Noto Sans Mono"/>
-              </a:rPr>
-              <a:t> </a:t>
-            </a:r>
-            <a:r>
-              <a:rPr sz="1300" b="1">
-                <a:solidFill>
-                  <a:srgbClr val="CF222E"/>
-                </a:solidFill>
-                <a:latin typeface="Noto Sans Mono CJK KR"/>
-              </a:rPr>
-              <a:t>재실측</a:t>
-            </a:r>
-            <a:r>
-              <a:rPr sz="1300" b="1">
-                <a:solidFill>
-                  <a:srgbClr val="CF222E"/>
-                </a:solidFill>
-                <a:latin typeface="Noto Sans Mono"/>
-              </a:rPr>
-              <a:t> 6</a:t>
-            </a:r>
-            <a:r>
-              <a:rPr sz="1300" b="1">
-                <a:solidFill>
-                  <a:srgbClr val="CF222E"/>
-                </a:solidFill>
-                <a:latin typeface="Noto Sans Mono CJK KR"/>
-              </a:rPr>
-              <a:t>단계</a:t>
-            </a:r>
-            <a:r>
-              <a:rPr sz="1300" b="1">
-                <a:solidFill>
-                  <a:srgbClr val="CF222E"/>
-                </a:solidFill>
-                <a:latin typeface="Noto Sans Mono"/>
-              </a:rPr>
-              <a:t> </a:t>
-            </a:r>
-            <a:r>
-              <a:rPr sz="1300" b="1">
-                <a:solidFill>
-                  <a:srgbClr val="CF222E"/>
-                </a:solidFill>
-                <a:latin typeface="Noto Sans Mono CJK KR"/>
-              </a:rPr>
-              <a:t>전부</a:t>
-            </a:r>
-            <a:r>
-              <a:rPr sz="1300" b="1">
-                <a:solidFill>
-                  <a:srgbClr val="CF222E"/>
-                </a:solidFill>
-                <a:latin typeface="Noto Sans Mono"/>
-              </a:rPr>
-              <a:t>, </a:t>
-            </a:r>
-            <a:r>
-              <a:rPr sz="1300" b="1">
-                <a:solidFill>
-                  <a:srgbClr val="CF222E"/>
-                </a:solidFill>
-                <a:latin typeface="Noto Sans Mono CJK KR"/>
-              </a:rPr>
-              <a:t>기동</a:t>
-            </a:r>
-            <a:r>
-              <a:rPr sz="1300" b="1">
-                <a:solidFill>
-                  <a:srgbClr val="CF222E"/>
-                </a:solidFill>
-                <a:latin typeface="Noto Sans Mono"/>
-              </a:rPr>
-              <a:t> 10</a:t>
-            </a:r>
-            <a:r>
-              <a:rPr sz="1300" b="1">
-                <a:solidFill>
-                  <a:srgbClr val="CF222E"/>
-                </a:solidFill>
-                <a:latin typeface="Noto Sans Mono CJK KR"/>
-              </a:rPr>
-              <a:t>초</a:t>
-            </a:r>
-            <a:r>
-              <a:rPr sz="1300" b="1">
-                <a:solidFill>
-                  <a:srgbClr val="CF222E"/>
-                </a:solidFill>
-                <a:latin typeface="Noto Sans Mono"/>
-              </a:rPr>
-              <a:t> </a:t>
-            </a:r>
-            <a:r>
-              <a:rPr sz="1300" b="1">
-                <a:solidFill>
-                  <a:srgbClr val="CF222E"/>
-                </a:solidFill>
-                <a:latin typeface="Noto Sans Mono CJK KR"/>
-              </a:rPr>
-              <a:t>만에</a:t>
-            </a:r>
-            <a:r>
-              <a:rPr sz="1300" b="1">
-                <a:solidFill>
-                  <a:srgbClr val="CF222E"/>
-                </a:solidFill>
-                <a:latin typeface="Noto Sans Mono"/>
-              </a:rPr>
-              <a:t> </a:t>
-            </a:r>
-            <a:r>
-              <a:rPr sz="1300" b="1">
-                <a:solidFill>
-                  <a:srgbClr val="CF222E"/>
-                </a:solidFill>
-                <a:latin typeface="Noto Sans Mono CJK KR"/>
-              </a:rPr>
-              <a:t>크래시</a:t>
-            </a:r>
-          </a:p>
-        </p:txBody>
-      </p:sp>
-      <p:sp>
-        <p:nvSpPr>
-          <p:cNvPr id="7" name="Rounded Rectangle 6"/>
-          <p:cNvSpPr/>
-          <p:nvPr/>
-        </p:nvSpPr>
-        <p:spPr>
-          <a:xfrm>
-            <a:off x="740664" y="1371600"/>
-            <a:ext cx="10698480" cy="484632"/>
-          </a:xfrm>
-          <a:prstGeom prst="roundRect">
-            <a:avLst>
-              <a:gd name="adj" fmla="val 9000"/>
-            </a:avLst>
-          </a:prstGeom>
-          <a:solidFill>
-            <a:srgbClr val="FFFFFF"/>
-          </a:solidFill>
-          <a:ln w="9525">
-            <a:solidFill>
-              <a:srgbClr val="E4E8EC"/>
-            </a:solidFill>
-          </a:ln>
-          <a:effectLst/>
-        </p:spPr>
-        <p:style>
-          <a:lnRef idx="1">
-            <a:schemeClr val="accent1"/>
-          </a:lnRef>
-          <a:fillRef idx="3">
-            <a:schemeClr val="accent1"/>
-          </a:fillRef>
-          <a:effectRef idx="2">
-            <a:schemeClr val="accent1"/>
-          </a:effectRef>
-          <a:fontRef idx="minor">
-            <a:schemeClr val="lt1"/>
-          </a:fontRef>
-        </p:style>
-        <p:txBody>
-          <a:bodyPr rtlCol="0" anchor="ctr"/>
-          <a:lstStyle/>
-          <a:p>
-            <a:pPr algn="ctr"/>
-          </a:p>
-        </p:txBody>
-      </p:sp>
-      <p:sp>
-        <p:nvSpPr>
-          <p:cNvPr id="8" name="TextBox 7"/>
-          <p:cNvSpPr txBox="1"/>
-          <p:nvPr/>
-        </p:nvSpPr>
-        <p:spPr>
-          <a:xfrm>
-            <a:off x="886968" y="1453896"/>
-            <a:ext cx="10405872" cy="182880"/>
-          </a:xfrm>
-          <a:prstGeom prst="rect">
-            <a:avLst/>
-          </a:prstGeom>
-          <a:noFill/>
-        </p:spPr>
-        <p:txBody>
-          <a:bodyPr wrap="square" lIns="0" rIns="0" tIns="0" bIns="0" anchor="t">
-            <a:spAutoFit/>
-          </a:bodyPr>
-          <a:lstStyle/>
-          <a:p>
-            <a:pPr algn="l">
-              <a:lnSpc>
-                <a:spcPct val="125000"/>
-              </a:lnSpc>
-            </a:pPr>
-            <a:r>
-              <a:rPr sz="1000" b="1">
-                <a:solidFill>
-                  <a:srgbClr val="6E7781"/>
-                </a:solidFill>
-                <a:latin typeface="Noto Sans Mono CJK KR"/>
-              </a:rPr>
-              <a:t>증상</a:t>
-            </a:r>
-          </a:p>
-        </p:txBody>
-      </p:sp>
-      <p:sp>
-        <p:nvSpPr>
-          <p:cNvPr id="9" name="TextBox 8"/>
-          <p:cNvSpPr txBox="1"/>
-          <p:nvPr/>
-        </p:nvSpPr>
-        <p:spPr>
-          <a:xfrm>
-            <a:off x="886968" y="1645920"/>
-            <a:ext cx="10405872" cy="155448"/>
-          </a:xfrm>
-          <a:prstGeom prst="rect">
-            <a:avLst/>
-          </a:prstGeom>
-          <a:noFill/>
-        </p:spPr>
-        <p:txBody>
-          <a:bodyPr wrap="square" lIns="0" rIns="0" tIns="0" bIns="0" anchor="t">
-            <a:spAutoFit/>
-          </a:bodyPr>
-          <a:lstStyle/>
-          <a:p>
-            <a:pPr algn="l">
-              <a:lnSpc>
-                <a:spcPct val="125000"/>
-              </a:lnSpc>
-            </a:pPr>
-            <a:r>
-              <a:rPr sz="1100" b="0">
-                <a:solidFill>
-                  <a:srgbClr val="59636E"/>
-                </a:solidFill>
-                <a:latin typeface="Noto Sans CJK KR"/>
-              </a:rPr>
-              <a:t>GW2_CrossPlatformCore/Thread/JobQueue 재사용 후 재실측 중 모든 단계에서 Collector가 10초 만에 죽었다.</a:t>
-            </a:r>
-          </a:p>
-        </p:txBody>
-      </p:sp>
-      <p:sp>
-        <p:nvSpPr>
-          <p:cNvPr id="10" name="Rounded Rectangle 9"/>
-          <p:cNvSpPr/>
-          <p:nvPr/>
-        </p:nvSpPr>
-        <p:spPr>
-          <a:xfrm>
-            <a:off x="740664" y="1947672"/>
-            <a:ext cx="10698480" cy="484632"/>
-          </a:xfrm>
-          <a:prstGeom prst="roundRect">
-            <a:avLst>
-              <a:gd name="adj" fmla="val 9000"/>
-            </a:avLst>
-          </a:prstGeom>
-          <a:solidFill>
-            <a:srgbClr val="FFFFFF"/>
-          </a:solidFill>
-          <a:ln w="9525">
-            <a:solidFill>
-              <a:srgbClr val="E4E8EC"/>
-            </a:solidFill>
-          </a:ln>
-          <a:effectLst/>
-        </p:spPr>
-        <p:style>
-          <a:lnRef idx="1">
-            <a:schemeClr val="accent1"/>
-          </a:lnRef>
-          <a:fillRef idx="3">
-            <a:schemeClr val="accent1"/>
-          </a:fillRef>
-          <a:effectRef idx="2">
-            <a:schemeClr val="accent1"/>
-          </a:effectRef>
-          <a:fontRef idx="minor">
-            <a:schemeClr val="lt1"/>
-          </a:fontRef>
-        </p:style>
-        <p:txBody>
-          <a:bodyPr rtlCol="0" anchor="ctr"/>
-          <a:lstStyle/>
-          <a:p>
-            <a:pPr algn="ctr"/>
-          </a:p>
-        </p:txBody>
-      </p:sp>
-      <p:sp>
-        <p:nvSpPr>
-          <p:cNvPr id="11" name="TextBox 10"/>
-          <p:cNvSpPr txBox="1"/>
-          <p:nvPr/>
-        </p:nvSpPr>
-        <p:spPr>
-          <a:xfrm>
-            <a:off x="886968" y="2029968"/>
-            <a:ext cx="10405872" cy="182880"/>
-          </a:xfrm>
-          <a:prstGeom prst="rect">
-            <a:avLst/>
-          </a:prstGeom>
-          <a:noFill/>
-        </p:spPr>
-        <p:txBody>
-          <a:bodyPr wrap="square" lIns="0" rIns="0" tIns="0" bIns="0" anchor="t">
-            <a:spAutoFit/>
-          </a:bodyPr>
-          <a:lstStyle/>
-          <a:p>
-            <a:pPr algn="l">
-              <a:lnSpc>
-                <a:spcPct val="125000"/>
-              </a:lnSpc>
-            </a:pPr>
-            <a:r>
-              <a:rPr sz="1000" b="1">
-                <a:solidFill>
-                  <a:srgbClr val="6E7781"/>
-                </a:solidFill>
-                <a:latin typeface="Noto Sans Mono CJK KR"/>
-              </a:rPr>
-              <a:t>원인</a:t>
-            </a:r>
-          </a:p>
-        </p:txBody>
-      </p:sp>
-      <p:sp>
-        <p:nvSpPr>
-          <p:cNvPr id="12" name="TextBox 11"/>
-          <p:cNvSpPr txBox="1"/>
-          <p:nvPr/>
-        </p:nvSpPr>
-        <p:spPr>
-          <a:xfrm>
-            <a:off x="886968" y="2221992"/>
-            <a:ext cx="10405872" cy="155448"/>
-          </a:xfrm>
-          <a:prstGeom prst="rect">
-            <a:avLst/>
-          </a:prstGeom>
-          <a:noFill/>
-        </p:spPr>
-        <p:txBody>
-          <a:bodyPr wrap="square" lIns="0" rIns="0" tIns="0" bIns="0" anchor="t">
-            <a:spAutoFit/>
-          </a:bodyPr>
-          <a:lstStyle/>
-          <a:p>
-            <a:pPr algn="l">
-              <a:lnSpc>
-                <a:spcPct val="125000"/>
-              </a:lnSpc>
-            </a:pPr>
-            <a:r>
-              <a:rPr sz="1100" b="0">
-                <a:solidFill>
-                  <a:srgbClr val="59636E"/>
-                </a:solidFill>
-                <a:latin typeface="Noto Sans CJK KR"/>
-              </a:rPr>
-              <a:t>WriteUnlock()이 소유자 ID 비트를 안 지움 — 락이 영구 소유된 것처럼 남아 워커 스레드가 10초 스핀 후 크래시.</a:t>
-            </a:r>
-          </a:p>
-        </p:txBody>
-      </p:sp>
-      <p:sp>
-        <p:nvSpPr>
-          <p:cNvPr id="13" name="Rounded Rectangle 12"/>
-          <p:cNvSpPr/>
-          <p:nvPr/>
-        </p:nvSpPr>
-        <p:spPr>
-          <a:xfrm>
-            <a:off x="502920" y="2788920"/>
-            <a:ext cx="11155680" cy="1737360"/>
-          </a:xfrm>
-          <a:prstGeom prst="roundRect">
-            <a:avLst>
-              <a:gd name="adj" fmla="val 4000"/>
-            </a:avLst>
-          </a:prstGeom>
-          <a:solidFill>
-            <a:srgbClr val="F6F8FA"/>
-          </a:solidFill>
-          <a:ln w="9525">
-            <a:solidFill>
-              <a:srgbClr val="D0D7DE"/>
-            </a:solidFill>
-          </a:ln>
-          <a:effectLst/>
-        </p:spPr>
-        <p:style>
-          <a:lnRef idx="1">
-            <a:schemeClr val="accent1"/>
-          </a:lnRef>
-          <a:fillRef idx="3">
-            <a:schemeClr val="accent1"/>
-          </a:fillRef>
-          <a:effectRef idx="2">
-            <a:schemeClr val="accent1"/>
-          </a:effectRef>
-          <a:fontRef idx="minor">
-            <a:schemeClr val="lt1"/>
-          </a:fontRef>
-        </p:style>
-        <p:txBody>
-          <a:bodyPr rtlCol="0" anchor="ctr"/>
-          <a:lstStyle/>
-          <a:p>
-            <a:pPr algn="ctr"/>
-          </a:p>
-        </p:txBody>
-      </p:sp>
-      <p:sp>
-        <p:nvSpPr>
-          <p:cNvPr id="14" name="Rectangle 13"/>
-          <p:cNvSpPr/>
-          <p:nvPr/>
-        </p:nvSpPr>
-        <p:spPr>
-          <a:xfrm>
-            <a:off x="502920" y="2834640"/>
-            <a:ext cx="54864" cy="1645920"/>
-          </a:xfrm>
-          <a:prstGeom prst="rect">
-            <a:avLst/>
-          </a:prstGeom>
-          <a:solidFill>
-            <a:srgbClr val="1A7F37"/>
-          </a:solidFill>
-          <a:ln>
-            <a:noFill/>
-          </a:ln>
-          <a:effectLst/>
-        </p:spPr>
-        <p:style>
-          <a:lnRef idx="1">
-            <a:schemeClr val="accent1"/>
-          </a:lnRef>
-          <a:fillRef idx="3">
-            <a:schemeClr val="accent1"/>
-          </a:fillRef>
-          <a:effectRef idx="2">
-            <a:schemeClr val="accent1"/>
-          </a:effectRef>
-          <a:fontRef idx="minor">
-            <a:schemeClr val="lt1"/>
-          </a:fontRef>
-        </p:style>
-        <p:txBody>
-          <a:bodyPr rtlCol="0" anchor="ctr"/>
-          <a:lstStyle/>
-          <a:p>
-            <a:pPr algn="ctr"/>
-          </a:p>
-        </p:txBody>
-      </p:sp>
-      <p:sp>
-        <p:nvSpPr>
-          <p:cNvPr id="15" name="TextBox 14"/>
-          <p:cNvSpPr txBox="1"/>
-          <p:nvPr/>
-        </p:nvSpPr>
-        <p:spPr>
-          <a:xfrm>
-            <a:off x="740664" y="2916936"/>
-            <a:ext cx="10698480" cy="274320"/>
-          </a:xfrm>
-          <a:prstGeom prst="rect">
-            <a:avLst/>
-          </a:prstGeom>
-          <a:noFill/>
-        </p:spPr>
-        <p:txBody>
-          <a:bodyPr wrap="square" lIns="0" rIns="0" tIns="0" bIns="0" anchor="t">
-            <a:spAutoFit/>
-          </a:bodyPr>
-          <a:lstStyle/>
-          <a:p>
-            <a:pPr algn="l">
-              <a:lnSpc>
-                <a:spcPct val="130000"/>
-              </a:lnSpc>
-            </a:pPr>
-            <a:r>
-              <a:rPr sz="1300" b="1">
-                <a:solidFill>
-                  <a:srgbClr val="1A7F37"/>
-                </a:solidFill>
-                <a:latin typeface="Noto Sans Mono"/>
-              </a:rPr>
-              <a:t>✓ </a:t>
-            </a:r>
-            <a:r>
-              <a:rPr sz="1300" b="1">
-                <a:solidFill>
-                  <a:srgbClr val="1A7F37"/>
-                </a:solidFill>
-                <a:latin typeface="Noto Sans Mono CJK KR"/>
-              </a:rPr>
-              <a:t>해결</a:t>
-            </a:r>
-            <a:r>
-              <a:rPr sz="1300" b="1">
-                <a:solidFill>
-                  <a:srgbClr val="1A7F37"/>
-                </a:solidFill>
-                <a:latin typeface="Noto Sans Mono"/>
-              </a:rPr>
-              <a:t> — </a:t>
-            </a:r>
-            <a:r>
-              <a:rPr sz="1300" b="1">
-                <a:solidFill>
-                  <a:srgbClr val="1A7F37"/>
-                </a:solidFill>
-                <a:latin typeface="Noto Sans Mono CJK KR"/>
-              </a:rPr>
-              <a:t>공유</a:t>
-            </a:r>
-            <a:r>
-              <a:rPr sz="1300" b="1">
-                <a:solidFill>
-                  <a:srgbClr val="1A7F37"/>
-                </a:solidFill>
-                <a:latin typeface="Noto Sans Mono"/>
-              </a:rPr>
-              <a:t> </a:t>
-            </a:r>
-            <a:r>
-              <a:rPr sz="1300" b="1">
-                <a:solidFill>
-                  <a:srgbClr val="1A7F37"/>
-                </a:solidFill>
-                <a:latin typeface="Noto Sans Mono CJK KR"/>
-              </a:rPr>
-              <a:t>라이브러리는</a:t>
-            </a:r>
-            <a:r>
-              <a:rPr sz="1300" b="1">
-                <a:solidFill>
-                  <a:srgbClr val="1A7F37"/>
-                </a:solidFill>
-                <a:latin typeface="Noto Sans Mono"/>
-              </a:rPr>
-              <a:t> </a:t>
-            </a:r>
-            <a:r>
-              <a:rPr sz="1300" b="1">
-                <a:solidFill>
-                  <a:srgbClr val="1A7F37"/>
-                </a:solidFill>
-                <a:latin typeface="Noto Sans Mono CJK KR"/>
-              </a:rPr>
-              <a:t>안</a:t>
-            </a:r>
-            <a:r>
-              <a:rPr sz="1300" b="1">
-                <a:solidFill>
-                  <a:srgbClr val="1A7F37"/>
-                </a:solidFill>
-                <a:latin typeface="Noto Sans Mono"/>
-              </a:rPr>
-              <a:t> </a:t>
-            </a:r>
-            <a:r>
-              <a:rPr sz="1300" b="1">
-                <a:solidFill>
-                  <a:srgbClr val="1A7F37"/>
-                </a:solidFill>
-                <a:latin typeface="Noto Sans Mono CJK KR"/>
-              </a:rPr>
-              <a:t>건드리고</a:t>
-            </a:r>
-            <a:r>
-              <a:rPr sz="1300" b="1">
-                <a:solidFill>
-                  <a:srgbClr val="1A7F37"/>
-                </a:solidFill>
-                <a:latin typeface="Noto Sans Mono"/>
-              </a:rPr>
-              <a:t>, </a:t>
-            </a:r>
-            <a:r>
-              <a:rPr sz="1300" b="1">
-                <a:solidFill>
-                  <a:srgbClr val="1A7F37"/>
-                </a:solidFill>
-                <a:latin typeface="Noto Sans Mono CJK KR"/>
-              </a:rPr>
-              <a:t>자체</a:t>
-            </a:r>
-            <a:r>
-              <a:rPr sz="1300" b="1">
-                <a:solidFill>
-                  <a:srgbClr val="1A7F37"/>
-                </a:solidFill>
-                <a:latin typeface="Noto Sans Mono"/>
-              </a:rPr>
-              <a:t> </a:t>
-            </a:r>
-            <a:r>
-              <a:rPr sz="1300" b="1">
-                <a:solidFill>
-                  <a:srgbClr val="1A7F37"/>
-                </a:solidFill>
-                <a:latin typeface="Noto Sans Mono CJK KR"/>
-              </a:rPr>
-              <a:t>워커</a:t>
-            </a:r>
-            <a:r>
-              <a:rPr sz="1300" b="1">
-                <a:solidFill>
-                  <a:srgbClr val="1A7F37"/>
-                </a:solidFill>
-                <a:latin typeface="Noto Sans Mono"/>
-              </a:rPr>
-              <a:t> </a:t>
-            </a:r>
-            <a:r>
-              <a:rPr sz="1300" b="1">
-                <a:solidFill>
-                  <a:srgbClr val="1A7F37"/>
-                </a:solidFill>
-                <a:latin typeface="Noto Sans Mono CJK KR"/>
-              </a:rPr>
-              <a:t>큐로</a:t>
-            </a:r>
-            <a:r>
-              <a:rPr sz="1300" b="1">
-                <a:solidFill>
-                  <a:srgbClr val="1A7F37"/>
-                </a:solidFill>
-                <a:latin typeface="Noto Sans Mono"/>
-              </a:rPr>
-              <a:t> </a:t>
-            </a:r>
-            <a:r>
-              <a:rPr sz="1300" b="1">
-                <a:solidFill>
-                  <a:srgbClr val="1A7F37"/>
-                </a:solidFill>
-                <a:latin typeface="Noto Sans Mono CJK KR"/>
-              </a:rPr>
-              <a:t>의존</a:t>
-            </a:r>
-            <a:r>
-              <a:rPr sz="1300" b="1">
-                <a:solidFill>
-                  <a:srgbClr val="1A7F37"/>
-                </a:solidFill>
-                <a:latin typeface="Noto Sans Mono"/>
-              </a:rPr>
-              <a:t> </a:t>
-            </a:r>
-            <a:r>
-              <a:rPr sz="1300" b="1">
-                <a:solidFill>
-                  <a:srgbClr val="1A7F37"/>
-                </a:solidFill>
-                <a:latin typeface="Noto Sans Mono CJK KR"/>
-              </a:rPr>
-              <a:t>자체를</a:t>
-            </a:r>
-            <a:r>
-              <a:rPr sz="1300" b="1">
-                <a:solidFill>
-                  <a:srgbClr val="1A7F37"/>
-                </a:solidFill>
-                <a:latin typeface="Noto Sans Mono"/>
-              </a:rPr>
-              <a:t> </a:t>
-            </a:r>
-            <a:r>
-              <a:rPr sz="1300" b="1">
-                <a:solidFill>
-                  <a:srgbClr val="1A7F37"/>
-                </a:solidFill>
-                <a:latin typeface="Noto Sans Mono CJK KR"/>
-              </a:rPr>
-              <a:t>제거</a:t>
-            </a:r>
-          </a:p>
-        </p:txBody>
-      </p:sp>
-      <p:sp>
-        <p:nvSpPr>
-          <p:cNvPr id="16" name="Rounded Rectangle 15"/>
-          <p:cNvSpPr/>
-          <p:nvPr/>
-        </p:nvSpPr>
-        <p:spPr>
-          <a:xfrm>
-            <a:off x="740664" y="3246120"/>
-            <a:ext cx="10698480" cy="484632"/>
-          </a:xfrm>
-          <a:prstGeom prst="roundRect">
-            <a:avLst>
-              <a:gd name="adj" fmla="val 9000"/>
-            </a:avLst>
-          </a:prstGeom>
-          <a:solidFill>
-            <a:srgbClr val="FFFFFF"/>
-          </a:solidFill>
-          <a:ln w="9525">
-            <a:solidFill>
-              <a:srgbClr val="E4E8EC"/>
-            </a:solidFill>
-          </a:ln>
-          <a:effectLst/>
-        </p:spPr>
-        <p:style>
-          <a:lnRef idx="1">
-            <a:schemeClr val="accent1"/>
-          </a:lnRef>
-          <a:fillRef idx="3">
-            <a:schemeClr val="accent1"/>
-          </a:fillRef>
-          <a:effectRef idx="2">
-            <a:schemeClr val="accent1"/>
-          </a:effectRef>
-          <a:fontRef idx="minor">
-            <a:schemeClr val="lt1"/>
-          </a:fontRef>
-        </p:style>
-        <p:txBody>
-          <a:bodyPr rtlCol="0" anchor="ctr"/>
-          <a:lstStyle/>
-          <a:p>
-            <a:pPr algn="ctr"/>
-          </a:p>
-        </p:txBody>
-      </p:sp>
-      <p:sp>
-        <p:nvSpPr>
-          <p:cNvPr id="17" name="TextBox 16"/>
-          <p:cNvSpPr txBox="1"/>
-          <p:nvPr/>
-        </p:nvSpPr>
-        <p:spPr>
-          <a:xfrm>
-            <a:off x="886968" y="3328416"/>
-            <a:ext cx="10405872" cy="182880"/>
-          </a:xfrm>
-          <a:prstGeom prst="rect">
-            <a:avLst/>
-          </a:prstGeom>
-          <a:noFill/>
-        </p:spPr>
-        <p:txBody>
-          <a:bodyPr wrap="square" lIns="0" rIns="0" tIns="0" bIns="0" anchor="t">
-            <a:spAutoFit/>
-          </a:bodyPr>
-          <a:lstStyle/>
-          <a:p>
-            <a:pPr algn="l">
-              <a:lnSpc>
-                <a:spcPct val="125000"/>
-              </a:lnSpc>
-            </a:pPr>
-            <a:r>
-              <a:rPr sz="1000" b="1">
-                <a:solidFill>
-                  <a:srgbClr val="6E7781"/>
-                </a:solidFill>
-                <a:latin typeface="Noto Sans Mono CJK KR"/>
-              </a:rPr>
-              <a:t>판단</a:t>
-            </a:r>
-          </a:p>
-        </p:txBody>
-      </p:sp>
-      <p:sp>
-        <p:nvSpPr>
-          <p:cNvPr id="18" name="TextBox 17"/>
-          <p:cNvSpPr txBox="1"/>
-          <p:nvPr/>
-        </p:nvSpPr>
-        <p:spPr>
-          <a:xfrm>
-            <a:off x="886968" y="3520440"/>
-            <a:ext cx="10405872" cy="155448"/>
-          </a:xfrm>
-          <a:prstGeom prst="rect">
-            <a:avLst/>
-          </a:prstGeom>
-          <a:noFill/>
-        </p:spPr>
-        <p:txBody>
-          <a:bodyPr wrap="square" lIns="0" rIns="0" tIns="0" bIns="0" anchor="t">
-            <a:spAutoFit/>
-          </a:bodyPr>
-          <a:lstStyle/>
-          <a:p>
-            <a:pPr algn="l">
-              <a:lnSpc>
-                <a:spcPct val="125000"/>
-              </a:lnSpc>
-            </a:pPr>
-            <a:r>
-              <a:rPr sz="1100" b="0">
-                <a:solidFill>
-                  <a:srgbClr val="59636E"/>
-                </a:solidFill>
-                <a:latin typeface="Noto Sans CJK KR"/>
-              </a:rPr>
-              <a:t>"검증된 코드"라는 이유로 Lock.cpp는 안 건드리고, std::mutex 기반 전용 WorkerQueue로 JobQueue 의존을 제거.</a:t>
-            </a:r>
-          </a:p>
-        </p:txBody>
-      </p:sp>
-      <p:sp>
-        <p:nvSpPr>
-          <p:cNvPr id="19" name="Rounded Rectangle 18"/>
-          <p:cNvSpPr/>
-          <p:nvPr/>
-        </p:nvSpPr>
-        <p:spPr>
-          <a:xfrm>
-            <a:off x="740664" y="3822192"/>
-            <a:ext cx="10698480" cy="484632"/>
-          </a:xfrm>
-          <a:prstGeom prst="roundRect">
-            <a:avLst>
-              <a:gd name="adj" fmla="val 9000"/>
-            </a:avLst>
-          </a:prstGeom>
-          <a:solidFill>
-            <a:srgbClr val="FFFFFF"/>
-          </a:solidFill>
-          <a:ln w="9525">
-            <a:solidFill>
-              <a:srgbClr val="E4E8EC"/>
-            </a:solidFill>
-          </a:ln>
-          <a:effectLst/>
-        </p:spPr>
-        <p:style>
-          <a:lnRef idx="1">
-            <a:schemeClr val="accent1"/>
-          </a:lnRef>
-          <a:fillRef idx="3">
-            <a:schemeClr val="accent1"/>
-          </a:fillRef>
-          <a:effectRef idx="2">
-            <a:schemeClr val="accent1"/>
-          </a:effectRef>
-          <a:fontRef idx="minor">
-            <a:schemeClr val="lt1"/>
-          </a:fontRef>
-        </p:style>
-        <p:txBody>
-          <a:bodyPr rtlCol="0" anchor="ctr"/>
-          <a:lstStyle/>
-          <a:p>
-            <a:pPr algn="ctr"/>
-          </a:p>
-        </p:txBody>
-      </p:sp>
-      <p:sp>
-        <p:nvSpPr>
-          <p:cNvPr id="20" name="TextBox 19"/>
-          <p:cNvSpPr txBox="1"/>
-          <p:nvPr/>
-        </p:nvSpPr>
-        <p:spPr>
-          <a:xfrm>
-            <a:off x="886968" y="3904488"/>
-            <a:ext cx="10405872" cy="182880"/>
-          </a:xfrm>
-          <a:prstGeom prst="rect">
-            <a:avLst/>
-          </a:prstGeom>
-          <a:noFill/>
-        </p:spPr>
-        <p:txBody>
-          <a:bodyPr wrap="square" lIns="0" rIns="0" tIns="0" bIns="0" anchor="t">
-            <a:spAutoFit/>
-          </a:bodyPr>
-          <a:lstStyle/>
-          <a:p>
-            <a:pPr algn="l">
-              <a:lnSpc>
-                <a:spcPct val="125000"/>
-              </a:lnSpc>
-            </a:pPr>
-            <a:r>
-              <a:rPr sz="1000" b="1">
-                <a:solidFill>
-                  <a:srgbClr val="6E7781"/>
-                </a:solidFill>
-                <a:latin typeface="Noto Sans Mono CJK KR"/>
-              </a:rPr>
-              <a:t>검증</a:t>
-            </a:r>
-          </a:p>
-        </p:txBody>
-      </p:sp>
-      <p:sp>
-        <p:nvSpPr>
-          <p:cNvPr id="21" name="TextBox 20"/>
-          <p:cNvSpPr txBox="1"/>
-          <p:nvPr/>
-        </p:nvSpPr>
-        <p:spPr>
-          <a:xfrm>
-            <a:off x="886968" y="4096512"/>
-            <a:ext cx="10405872" cy="155448"/>
-          </a:xfrm>
-          <a:prstGeom prst="rect">
-            <a:avLst/>
-          </a:prstGeom>
-          <a:noFill/>
-        </p:spPr>
-        <p:txBody>
-          <a:bodyPr wrap="square" lIns="0" rIns="0" tIns="0" bIns="0" anchor="t">
-            <a:spAutoFit/>
-          </a:bodyPr>
-          <a:lstStyle/>
-          <a:p>
-            <a:pPr algn="l">
-              <a:lnSpc>
-                <a:spcPct val="125000"/>
-              </a:lnSpc>
-            </a:pPr>
-            <a:r>
-              <a:rPr sz="1100" b="0">
-                <a:solidFill>
-                  <a:srgbClr val="1A7F37"/>
-                </a:solidFill>
-                <a:latin typeface="Noto Sans CJK KR"/>
-              </a:rPr>
-              <a:t>6단계 부하 매트릭스 크래시 없이 완주, 코드도 더 단순해짐.</a:t>
-            </a:r>
-          </a:p>
-        </p:txBody>
-      </p:sp>
-      <p:sp>
-        <p:nvSpPr>
-          <p:cNvPr id="22" name="Rounded Rectangle 21"/>
-          <p:cNvSpPr/>
-          <p:nvPr/>
-        </p:nvSpPr>
-        <p:spPr>
-          <a:xfrm>
-            <a:off x="502920" y="4663440"/>
-            <a:ext cx="11155680" cy="1763649"/>
-          </a:xfrm>
-          <a:prstGeom prst="roundRect">
-            <a:avLst>
-              <a:gd name="adj" fmla="val 3500"/>
-            </a:avLst>
-          </a:prstGeom>
-          <a:solidFill>
-            <a:srgbClr val="EAEEF2"/>
-          </a:solidFill>
-          <a:ln w="9525">
-            <a:solidFill>
-              <a:srgbClr val="D0D7DE"/>
-            </a:solidFill>
-          </a:ln>
-          <a:effectLst/>
-        </p:spPr>
-        <p:style>
-          <a:lnRef idx="1">
-            <a:schemeClr val="accent1"/>
-          </a:lnRef>
-          <a:fillRef idx="3">
-            <a:schemeClr val="accent1"/>
-          </a:fillRef>
-          <a:effectRef idx="2">
-            <a:schemeClr val="accent1"/>
-          </a:effectRef>
-          <a:fontRef idx="minor">
-            <a:schemeClr val="lt1"/>
-          </a:fontRef>
-        </p:style>
-        <p:txBody>
-          <a:bodyPr rtlCol="0" anchor="ctr"/>
-          <a:lstStyle/>
-          <a:p>
-            <a:pPr algn="ctr"/>
-          </a:p>
-        </p:txBody>
-      </p:sp>
-      <p:sp>
-        <p:nvSpPr>
-          <p:cNvPr id="23" name="TextBox 22"/>
-          <p:cNvSpPr txBox="1"/>
-          <p:nvPr/>
-        </p:nvSpPr>
-        <p:spPr>
-          <a:xfrm>
-            <a:off x="649224" y="4773168"/>
-            <a:ext cx="10863072" cy="1544193"/>
-          </a:xfrm>
-          <a:prstGeom prst="rect">
-            <a:avLst/>
-          </a:prstGeom>
-          <a:noFill/>
-        </p:spPr>
-        <p:txBody>
-          <a:bodyPr wrap="square" lIns="0" rIns="0" tIns="0" bIns="0">
-            <a:spAutoFit/>
-          </a:bodyPr>
-          <a:lstStyle/>
-          <a:p>
-            <a:pPr algn="l">
-              <a:lnSpc>
-                <a:spcPct val="130000"/>
-              </a:lnSpc>
-            </a:pPr>
-            <a:r>
-              <a:rPr sz="1100" b="0">
-                <a:solidFill>
-                  <a:srgbClr val="6E7781"/>
-                </a:solidFill>
-                <a:latin typeface="Noto Sans Mono"/>
-              </a:rPr>
-              <a:t>// Lock.cpp — WriteUnlock() </a:t>
-            </a:r>
-            <a:r>
-              <a:rPr sz="1100" b="0">
-                <a:solidFill>
-                  <a:srgbClr val="6E7781"/>
-                </a:solidFill>
-                <a:latin typeface="Noto Sans Mono CJK KR"/>
-              </a:rPr>
-              <a:t>내부</a:t>
-            </a:r>
-            <a:r>
-              <a:rPr sz="1100" b="0">
-                <a:solidFill>
-                  <a:srgbClr val="6E7781"/>
-                </a:solidFill>
-                <a:latin typeface="Noto Sans Mono"/>
-              </a:rPr>
-              <a:t>, </a:t>
-            </a:r>
-            <a:r>
-              <a:rPr sz="1100" b="0">
-                <a:solidFill>
-                  <a:srgbClr val="6E7781"/>
-                </a:solidFill>
-                <a:latin typeface="Noto Sans Mono CJK KR"/>
-              </a:rPr>
-              <a:t>소유자</a:t>
-            </a:r>
-            <a:r>
-              <a:rPr sz="1100" b="0">
-                <a:solidFill>
-                  <a:srgbClr val="6E7781"/>
-                </a:solidFill>
-                <a:latin typeface="Noto Sans Mono"/>
-              </a:rPr>
-              <a:t> </a:t>
-            </a:r>
-            <a:r>
-              <a:rPr sz="1100" b="0">
-                <a:solidFill>
-                  <a:srgbClr val="6E7781"/>
-                </a:solidFill>
-                <a:latin typeface="Noto Sans Mono CJK KR"/>
-              </a:rPr>
-              <a:t>언락</a:t>
-            </a:r>
-            <a:r>
-              <a:rPr sz="1100" b="0">
-                <a:solidFill>
-                  <a:srgbClr val="6E7781"/>
-                </a:solidFill>
-                <a:latin typeface="Noto Sans Mono"/>
-              </a:rPr>
-              <a:t> </a:t>
-            </a:r>
-            <a:r>
-              <a:rPr sz="1100" b="0">
-                <a:solidFill>
-                  <a:srgbClr val="6E7781"/>
-                </a:solidFill>
-                <a:latin typeface="Noto Sans Mono CJK KR"/>
-              </a:rPr>
-              <a:t>분기</a:t>
-            </a:r>
-          </a:p>
-          <a:p>
-            <a:pPr algn="l">
-              <a:lnSpc>
-                <a:spcPct val="130000"/>
-              </a:lnSpc>
-            </a:pPr>
-            <a:r>
-              <a:rPr sz="1100" b="0">
-                <a:solidFill>
-                  <a:srgbClr val="1F2328"/>
-                </a:solidFill>
-                <a:latin typeface="Noto Sans Mono"/>
-              </a:rPr>
-              <a:t>if ((threadId &amp; </a:t>
-            </a:r>
-            <a:r>
-              <a:rPr sz="1100" b="0">
-                <a:solidFill>
-                  <a:srgbClr val="0550AE"/>
-                </a:solidFill>
-                <a:latin typeface="Noto Sans Mono"/>
-              </a:rPr>
-              <a:t>0xFFFF</a:t>
-            </a:r>
-            <a:r>
-              <a:rPr sz="1100" b="0">
-                <a:solidFill>
-                  <a:srgbClr val="1F2328"/>
-                </a:solidFill>
-                <a:latin typeface="Noto Sans Mono"/>
-              </a:rPr>
-              <a:t>) == lockThreadId)</a:t>
-            </a:r>
-          </a:p>
-          <a:p>
-            <a:pPr algn="l">
-              <a:lnSpc>
-                <a:spcPct val="130000"/>
-              </a:lnSpc>
-            </a:pPr>
-            <a:r>
-              <a:rPr sz="1100" b="0">
-                <a:solidFill>
-                  <a:srgbClr val="1F2328"/>
-                </a:solidFill>
-                <a:latin typeface="Noto Sans Mono"/>
-              </a:rPr>
-              <a:t>{</a:t>
-            </a:r>
-          </a:p>
-          <a:p>
-            <a:pPr algn="l">
-              <a:lnSpc>
-                <a:spcPct val="130000"/>
-              </a:lnSpc>
-            </a:pPr>
-            <a:r>
-              <a:rPr sz="1100" b="0">
-                <a:solidFill>
-                  <a:srgbClr val="1F2328"/>
-                </a:solidFill>
-                <a:latin typeface="Noto Sans Mono"/>
-              </a:rPr>
-              <a:t>    _lockFlag.fetch_add(</a:t>
-            </a:r>
-            <a:r>
-              <a:rPr sz="1100" b="0">
-                <a:solidFill>
-                  <a:srgbClr val="0550AE"/>
-                </a:solidFill>
-                <a:latin typeface="Noto Sans Mono"/>
-              </a:rPr>
-              <a:t>1</a:t>
-            </a:r>
-            <a:r>
-              <a:rPr sz="1100" b="0">
-                <a:solidFill>
-                  <a:srgbClr val="6E7781"/>
-                </a:solidFill>
-                <a:latin typeface="Noto Sans Mono"/>
-              </a:rPr>
-              <a:t>);   // </a:t>
-            </a:r>
-            <a:r>
-              <a:rPr sz="1100" b="0">
-                <a:solidFill>
-                  <a:srgbClr val="6E7781"/>
-                </a:solidFill>
-                <a:latin typeface="Noto Sans Mono CJK KR"/>
-              </a:rPr>
-              <a:t>버그</a:t>
-            </a:r>
-            <a:r>
-              <a:rPr sz="1100" b="0">
-                <a:solidFill>
-                  <a:srgbClr val="6E7781"/>
-                </a:solidFill>
-                <a:latin typeface="Noto Sans Mono"/>
-              </a:rPr>
-              <a:t>: </a:t>
-            </a:r>
-            <a:r>
-              <a:rPr sz="1100" b="0">
-                <a:solidFill>
-                  <a:srgbClr val="6E7781"/>
-                </a:solidFill>
-                <a:latin typeface="Noto Sans Mono CJK KR"/>
-              </a:rPr>
-              <a:t>무관한</a:t>
-            </a:r>
-            <a:r>
-              <a:rPr sz="1100" b="0">
-                <a:solidFill>
-                  <a:srgbClr val="6E7781"/>
-                </a:solidFill>
-                <a:latin typeface="Noto Sans Mono"/>
-              </a:rPr>
-              <a:t> </a:t>
-            </a:r>
-            <a:r>
-              <a:rPr sz="1100" b="0">
-                <a:solidFill>
-                  <a:srgbClr val="6E7781"/>
-                </a:solidFill>
-                <a:latin typeface="Noto Sans Mono CJK KR"/>
-              </a:rPr>
-              <a:t>하위</a:t>
-            </a:r>
-            <a:r>
-              <a:rPr sz="1100" b="0">
-                <a:solidFill>
-                  <a:srgbClr val="6E7781"/>
-                </a:solidFill>
-                <a:latin typeface="Noto Sans Mono"/>
-              </a:rPr>
-              <a:t> </a:t>
-            </a:r>
-            <a:r>
-              <a:rPr sz="1100" b="0">
-                <a:solidFill>
-                  <a:srgbClr val="6E7781"/>
-                </a:solidFill>
-                <a:latin typeface="Noto Sans Mono CJK KR"/>
-              </a:rPr>
-              <a:t>비트만</a:t>
-            </a:r>
-            <a:r>
-              <a:rPr sz="1100" b="0">
-                <a:solidFill>
-                  <a:srgbClr val="6E7781"/>
-                </a:solidFill>
-                <a:latin typeface="Noto Sans Mono"/>
-              </a:rPr>
-              <a:t> </a:t>
-            </a:r>
-            <a:r>
-              <a:rPr sz="1100" b="0">
-                <a:solidFill>
-                  <a:srgbClr val="6E7781"/>
-                </a:solidFill>
-                <a:latin typeface="Noto Sans Mono CJK KR"/>
-              </a:rPr>
-              <a:t>증가</a:t>
-            </a:r>
-          </a:p>
-          <a:p>
-            <a:pPr algn="l">
-              <a:lnSpc>
-                <a:spcPct val="130000"/>
-              </a:lnSpc>
-            </a:pPr>
-            <a:r>
-              <a:rPr sz="1100" b="0">
-                <a:solidFill>
-                  <a:srgbClr val="6E7781"/>
-                </a:solidFill>
-                <a:latin typeface="Noto Sans Mono"/>
-              </a:rPr>
-              <a:t>    return;                   // </a:t>
-            </a:r>
-            <a:r>
-              <a:rPr sz="1100" b="0">
-                <a:solidFill>
-                  <a:srgbClr val="6E7781"/>
-                </a:solidFill>
-                <a:latin typeface="Noto Sans Mono CJK KR"/>
-              </a:rPr>
-              <a:t>소유자</a:t>
-            </a:r>
-            <a:r>
-              <a:rPr sz="1100" b="0">
-                <a:solidFill>
-                  <a:srgbClr val="6E7781"/>
-                </a:solidFill>
-                <a:latin typeface="Noto Sans Mono"/>
-              </a:rPr>
-              <a:t> </a:t>
-            </a:r>
-            <a:r>
-              <a:rPr sz="1100" b="0">
-                <a:solidFill>
-                  <a:srgbClr val="6E7781"/>
-                </a:solidFill>
-                <a:latin typeface="Noto Sans Mono CJK KR"/>
-              </a:rPr>
-              <a:t>스레드</a:t>
-            </a:r>
-            <a:r>
-              <a:rPr sz="1100" b="0">
-                <a:solidFill>
-                  <a:srgbClr val="6E7781"/>
-                </a:solidFill>
-                <a:latin typeface="Noto Sans Mono"/>
-              </a:rPr>
-              <a:t> id </a:t>
-            </a:r>
-            <a:r>
-              <a:rPr sz="1100" b="0">
-                <a:solidFill>
-                  <a:srgbClr val="6E7781"/>
-                </a:solidFill>
-                <a:latin typeface="Noto Sans Mono CJK KR"/>
-              </a:rPr>
-              <a:t>비트는</a:t>
-            </a:r>
-            <a:r>
-              <a:rPr sz="1100" b="0">
-                <a:solidFill>
-                  <a:srgbClr val="6E7781"/>
-                </a:solidFill>
-                <a:latin typeface="Noto Sans Mono"/>
-              </a:rPr>
-              <a:t> </a:t>
-            </a:r>
-            <a:r>
-              <a:rPr sz="1100" b="0">
-                <a:solidFill>
-                  <a:srgbClr val="6E7781"/>
-                </a:solidFill>
-                <a:latin typeface="Noto Sans Mono CJK KR"/>
-              </a:rPr>
-              <a:t>영원히</a:t>
-            </a:r>
-            <a:r>
-              <a:rPr sz="1100" b="0">
-                <a:solidFill>
-                  <a:srgbClr val="6E7781"/>
-                </a:solidFill>
-                <a:latin typeface="Noto Sans Mono"/>
-              </a:rPr>
-              <a:t> </a:t>
-            </a:r>
-            <a:r>
-              <a:rPr sz="1100" b="0">
-                <a:solidFill>
-                  <a:srgbClr val="6E7781"/>
-                </a:solidFill>
-                <a:latin typeface="Noto Sans Mono CJK KR"/>
-              </a:rPr>
-              <a:t>안</a:t>
-            </a:r>
-            <a:r>
-              <a:rPr sz="1100" b="0">
-                <a:solidFill>
-                  <a:srgbClr val="6E7781"/>
-                </a:solidFill>
-                <a:latin typeface="Noto Sans Mono"/>
-              </a:rPr>
-              <a:t> </a:t>
-            </a:r>
-            <a:r>
-              <a:rPr sz="1100" b="0">
-                <a:solidFill>
-                  <a:srgbClr val="6E7781"/>
-                </a:solidFill>
-                <a:latin typeface="Noto Sans Mono CJK KR"/>
-              </a:rPr>
-              <a:t>지워짐</a:t>
-            </a:r>
-          </a:p>
-          <a:p>
-            <a:pPr algn="l">
-              <a:lnSpc>
-                <a:spcPct val="130000"/>
-              </a:lnSpc>
-            </a:pPr>
-            <a:r>
-              <a:rPr sz="1100" b="0">
-                <a:solidFill>
-                  <a:srgbClr val="1F2328"/>
-                </a:solidFill>
-                <a:latin typeface="Noto Sans Mono"/>
-              </a:rPr>
-              <a:t>}</a:t>
-            </a:r>
-          </a:p>
-        </p:txBody>
-      </p:sp>
-      <p:sp>
-        <p:nvSpPr>
-          <p:cNvPr id="24" name="TextBox 23"/>
-          <p:cNvSpPr txBox="1"/>
-          <p:nvPr/>
-        </p:nvSpPr>
-        <p:spPr>
-          <a:xfrm>
-            <a:off x="11475720" y="6510528"/>
-            <a:ext cx="594360" cy="256032"/>
-          </a:xfrm>
-          <a:prstGeom prst="rect">
-            <a:avLst/>
-          </a:prstGeom>
-          <a:noFill/>
-        </p:spPr>
-        <p:txBody>
-          <a:bodyPr wrap="square" lIns="0" rIns="0" tIns="0" bIns="0" anchor="t">
-            <a:spAutoFit/>
-          </a:bodyPr>
-          <a:lstStyle/>
-          <a:p>
-            <a:pPr algn="r">
-              <a:lnSpc>
-                <a:spcPct val="125000"/>
-              </a:lnSpc>
-            </a:pPr>
-            <a:r>
-              <a:rPr sz="1050" b="0">
-                <a:solidFill>
-                  <a:srgbClr val="6E7781"/>
-                </a:solidFill>
-                <a:latin typeface="Noto Sans Mono"/>
-              </a:rPr>
-              <a:t>14 / 21</a:t>
             </a:r>
           </a:p>
         </p:txBody>
@@ -9344,7 +7656,7 @@
                 </a:solidFill>
                 <a:latin typeface="Noto Sans Mono"/>
               </a:rPr>
-              <a:t>15 / 21</a:t>
+              <a:t>14 / 21</a:t>
             </a:r>
           </a:p>
         </p:txBody>
@@ -11132,7 +9444,7 @@
                 </a:solidFill>
                 <a:latin typeface="Noto Sans Mono"/>
               </a:rPr>
-              <a:t>16 / 21</a:t>
+              <a:t>15 / 21</a:t>
             </a:r>
           </a:p>
         </p:txBody>
@@ -11520,7 +9832,7 @@
                 </a:solidFill>
                 <a:latin typeface="Noto Sans CJK KR"/>
               </a:rPr>
-              <a:t>epoll_wait</a:t>
+              <a:t>fcntl</a:t>
             </a:r>
           </a:p>
         </p:txBody>
@@ -11559,7 +9871,7 @@
                 </a:solidFill>
                 <a:latin typeface="Noto Sans CJK KR"/>
               </a:rPr>
-              <a:t>155</a:t>
+              <a:t>885</a:t>
             </a:r>
           </a:p>
         </p:txBody>
@@ -11598,7 +9910,7 @@
                 </a:solidFill>
                 <a:latin typeface="Noto Sans CJK KR"/>
               </a:rPr>
-              <a:t>스핀 없이 블로킹, 사이클당 약 2.6회</a:t>
+              <a:t>agent_alerts.db WAL 파일 잠금(Phase A 신규) — Collector와 같은 패턴</a:t>
             </a:r>
           </a:p>
         </p:txBody>
@@ -11711,7 +10023,7 @@
                 </a:solidFill>
                 <a:latin typeface="Noto Sans CJK KR"/>
               </a:rPr>
-              <a:t>1,921회 / 19.4ms</a:t>
+              <a:t>3,005회 / 338.9ms</a:t>
             </a:r>
           </a:p>
         </p:txBody>
@@ -11750,7 +10062,7 @@
                 </a:solidFill>
                 <a:latin typeface="Noto Sans CJK KR"/>
               </a:rPr>
-              <a:t>5분(≈60사이클), 대기가 압도적</a:t>
+              <a:t>5분(≈60사이클), Phase A 이후 재측정 — 여전히 0.11%로 무시 가능</a:t>
             </a:r>
           </a:p>
         </p:txBody>
@@ -12042,7 +10354,7 @@
                 </a:solidFill>
                 <a:latin typeface="Noto Sans Mono"/>
               </a:rPr>
-              <a:t> 0.017%</a:t>
+              <a:t> 0.11%</a:t>
             </a:r>
           </a:p>
         </p:txBody>
@@ -12081,7 +10393,7 @@
                 </a:solidFill>
                 <a:latin typeface="Noto Sans CJK KR"/>
               </a:rPr>
-              <a:t>유휴 대기(epoll_wait)가 거의 전부</a:t>
+              <a:t>syscall 총 시간 기준 — 유휴 대기가 거의 전부</a:t>
             </a:r>
           </a:p>
         </p:txBody>
@@ -12212,7 +10524,7 @@
                 </a:solidFill>
                 <a:latin typeface="Noto Sans Mono"/>
               </a:rPr>
-              <a:t>27 / 27 </a:t>
+              <a:t>36 / 36 </a:t>
             </a:r>
             <a:r>
               <a:rPr sz="1450" b="0">
@@ -12260,7 +10572,7 @@
                 </a:solidFill>
                 <a:latin typeface="Noto Sans CJK KR"/>
               </a:rPr>
-              <a:t>C++ GoogleTest 9개 + .NET xUnit 18개</a:t>
+              <a:t>C++ GoogleTest 18개(암호화 9+Qt 알림판정 9) + .NET xUnit 18개</a:t>
             </a:r>
           </a:p>
         </p:txBody>
@@ -17215,7 +15527,7 @@
                 </a:solidFill>
                 <a:latin typeface="Noto Sans CJK KR"/>
               </a:rPr>
-              <a:t>GitHub 레포지토리에서 소스 코드 전체를 확인하실 수 있습니다 — 궁금한 점은 이메일로 편하게 연락해 주세요.</a:t>
+              <a:t>소스 코드는 비공개 저장소로 관리하고 있습니다 — 궁금한 점이나 코드 열람 요청은 이메일로 편하게 연락해 주세요.</a:t>
             </a:r>
           </a:p>
         </p:txBody>
@@ -17428,7 +15740,7 @@
                 </a:solidFill>
                 <a:latin typeface="Noto Sans Mono"/>
               </a:rPr>
-              <a:t>GITHUB</a:t>
+              <a:t>SOURCE CODE</a:t>
             </a:r>
           </a:p>
         </p:txBody>
@@ -17467,7 +15779,7 @@
                 </a:solidFill>
                 <a:latin typeface="Noto Sans Mono"/>
               </a:rPr>
-              <a:t>github.com/shkim4548/APM</a:t>
+              <a:t>요청 시 이메일로 개별 공유</a:t>
             </a:r>
           </a:p>
         </p:txBody>
@@ -17697,7 +16009,7 @@
                 </a:solidFill>
                 <a:latin typeface="Noto Sans Mono"/>
               </a:rPr>
-              <a:t>27</a:t>
+              <a:t>36</a:t>
             </a:r>
           </a:p>
         </p:txBody>
@@ -17775,7 +16087,7 @@
                 </a:solidFill>
                 <a:latin typeface="Noto Sans Mono"/>
               </a:rPr>
-              <a:t>10</a:t>
+              <a:t>13.8MB</a:t>
             </a:r>
           </a:p>
         </p:txBody>
@@ -17814,7 +16126,7 @@
                 </a:solidFill>
                 <a:latin typeface="Noto Sans CJK KR"/>
               </a:rPr>
-              <a:t>버그 발견/수정</a:t>
+              <a:t>RSS 5분 고정</a:t>
             </a:r>
           </a:p>
         </p:txBody>
@@ -19480,7 +17792,7 @@
                 </a:solidFill>
                 <a:latin typeface="Noto Sans Mono"/>
               </a:rPr>
-              <a:t>27</a:t>
+              <a:t>36</a:t>
             </a:r>
           </a:p>
         </p:txBody>
@@ -19519,7 +17831,7 @@
                 </a:solidFill>
                 <a:latin typeface="Noto Sans CJK KR"/>
               </a:rPr>
-              <a:t>단위 테스트 전부 통과(C++ 9 + .NET 18)</a:t>
+              <a:t>단위 테스트 전부 통과(C++ 18 + .NET 18)</a:t>
             </a:r>
           </a:p>
         </p:txBody>
@@ -19984,7 +18296,7 @@
                 </a:solidFill>
                 <a:latin typeface="Noto Sans Mono"/>
               </a:rPr>
-              <a:t>10</a:t>
+              <a:t>4</a:t>
             </a:r>
           </a:p>
         </p:txBody>
@@ -20023,7 +18335,7 @@
                 </a:solidFill>
                 <a:latin typeface="Noto Sans CJK KR"/>
               </a:rPr>
-              <a:t>실행 검증 중 발견·수정한 버그</a:t>
+              <a:t>Qt 로컬 제어 명령 실측 검증(시작/중지/재연결/로그레벨)</a:t>
             </a:r>
           </a:p>
         </p:txBody>
@@ -21930,6 +20242,1659 @@
 </p:sld>
 </file>
 
+<file path=ppt/slides/slide22.xml><?xml version="1.0" encoding="utf-8"?>
+<p:sld xmlns:a="http://schemas.openxmlformats.org/drawingml/2006/main" xmlns:p="http://schemas.openxmlformats.org/presentationml/2006/main" xmlns:r="http://schemas.openxmlformats.org/officeDocument/2006/relationships">
+  <p:cSld>
+    <p:spTree>
+      <p:nvGrpSpPr>
+        <p:cNvPr id="1" name=""/>
+        <p:cNvGrpSpPr/>
+        <p:nvPr/>
+      </p:nvGrpSpPr>
+      <p:grpSpPr/>
+      <p:sp>
+        <p:nvSpPr>
+          <p:cNvPr id="2" name="Rectangle 1"/>
+          <p:cNvSpPr/>
+          <p:nvPr/>
+        </p:nvSpPr>
+        <p:spPr>
+          <a:xfrm>
+            <a:off x="0" y="0"/>
+            <a:ext cx="12191695" cy="6858000"/>
+          </a:xfrm>
+          <a:prstGeom prst="rect">
+            <a:avLst/>
+          </a:prstGeom>
+          <a:solidFill>
+            <a:srgbClr val="FFFFFF"/>
+          </a:solidFill>
+          <a:ln>
+            <a:noFill/>
+          </a:ln>
+          <a:effectLst/>
+        </p:spPr>
+        <p:style>
+          <a:lnRef idx="1">
+            <a:schemeClr val="accent1"/>
+          </a:lnRef>
+          <a:fillRef idx="3">
+            <a:schemeClr val="accent1"/>
+          </a:fillRef>
+          <a:effectRef idx="2">
+            <a:schemeClr val="accent1"/>
+          </a:effectRef>
+          <a:fontRef idx="minor">
+            <a:schemeClr val="lt1"/>
+          </a:fontRef>
+        </p:style>
+        <p:txBody>
+          <a:bodyPr rtlCol="0" anchor="ctr"/>
+          <a:lstStyle/>
+          <a:p>
+            <a:pPr algn="ctr"/>
+          </a:p>
+        </p:txBody>
+      </p:sp>
+      <p:sp>
+        <p:nvSpPr>
+          <p:cNvPr id="3" name="TextBox 2"/>
+          <p:cNvSpPr txBox="1"/>
+          <p:nvPr/>
+        </p:nvSpPr>
+        <p:spPr>
+          <a:xfrm>
+            <a:off x="502920" y="320040"/>
+            <a:ext cx="11155680" cy="502920"/>
+          </a:xfrm>
+          <a:prstGeom prst="rect">
+            <a:avLst/>
+          </a:prstGeom>
+          <a:noFill/>
+        </p:spPr>
+        <p:txBody>
+          <a:bodyPr wrap="square" lIns="0" rIns="0" tIns="0" bIns="0" anchor="t">
+            <a:spAutoFit/>
+          </a:bodyPr>
+          <a:lstStyle/>
+          <a:p>
+            <a:pPr algn="l">
+              <a:lnSpc>
+                <a:spcPct val="125000"/>
+              </a:lnSpc>
+            </a:pPr>
+            <a:r>
+              <a:rPr sz="2400" b="1">
+                <a:solidFill>
+                  <a:srgbClr val="1F2328"/>
+                </a:solidFill>
+                <a:latin typeface="Noto Sans Mono CJK KR"/>
+              </a:rPr>
+              <a:t>버그</a:t>
+            </a:r>
+            <a:r>
+              <a:rPr sz="2400" b="1">
+                <a:solidFill>
+                  <a:srgbClr val="1F2328"/>
+                </a:solidFill>
+                <a:latin typeface="Noto Sans Mono"/>
+              </a:rPr>
+              <a:t> </a:t>
+            </a:r>
+            <a:r>
+              <a:rPr sz="2400" b="1">
+                <a:solidFill>
+                  <a:srgbClr val="1F2328"/>
+                </a:solidFill>
+                <a:latin typeface="Noto Sans Mono CJK KR"/>
+              </a:rPr>
+              <a:t>스포트라이트</a:t>
+            </a:r>
+            <a:r>
+              <a:rPr sz="2400" b="1">
+                <a:solidFill>
+                  <a:srgbClr val="1F2328"/>
+                </a:solidFill>
+                <a:latin typeface="Noto Sans Mono"/>
+              </a:rPr>
+              <a:t> — EF Core + SQLite</a:t>
+            </a:r>
+            <a:r>
+              <a:rPr sz="2400" b="1">
+                <a:solidFill>
+                  <a:srgbClr val="1F2328"/>
+                </a:solidFill>
+                <a:latin typeface="Noto Sans Mono CJK KR"/>
+              </a:rPr>
+              <a:t>의</a:t>
+            </a:r>
+            <a:r>
+              <a:rPr sz="2400" b="1">
+                <a:solidFill>
+                  <a:srgbClr val="1F2328"/>
+                </a:solidFill>
+                <a:latin typeface="Noto Sans Mono"/>
+              </a:rPr>
+              <a:t> DateTimeOffset </a:t>
+            </a:r>
+            <a:r>
+              <a:rPr sz="2400" b="1">
+                <a:solidFill>
+                  <a:srgbClr val="1F2328"/>
+                </a:solidFill>
+                <a:latin typeface="Noto Sans Mono CJK KR"/>
+              </a:rPr>
+              <a:t>비교</a:t>
+            </a:r>
+          </a:p>
+        </p:txBody>
+      </p:sp>
+      <p:sp>
+        <p:nvSpPr>
+          <p:cNvPr id="4" name="Rounded Rectangle 3"/>
+          <p:cNvSpPr/>
+          <p:nvPr/>
+        </p:nvSpPr>
+        <p:spPr>
+          <a:xfrm>
+            <a:off x="502920" y="914400"/>
+            <a:ext cx="11155680" cy="1911095"/>
+          </a:xfrm>
+          <a:prstGeom prst="roundRect">
+            <a:avLst>
+              <a:gd name="adj" fmla="val 4000"/>
+            </a:avLst>
+          </a:prstGeom>
+          <a:solidFill>
+            <a:srgbClr val="F6F8FA"/>
+          </a:solidFill>
+          <a:ln w="9525">
+            <a:solidFill>
+              <a:srgbClr val="D0D7DE"/>
+            </a:solidFill>
+          </a:ln>
+          <a:effectLst/>
+        </p:spPr>
+        <p:style>
+          <a:lnRef idx="1">
+            <a:schemeClr val="accent1"/>
+          </a:lnRef>
+          <a:fillRef idx="3">
+            <a:schemeClr val="accent1"/>
+          </a:fillRef>
+          <a:effectRef idx="2">
+            <a:schemeClr val="accent1"/>
+          </a:effectRef>
+          <a:fontRef idx="minor">
+            <a:schemeClr val="lt1"/>
+          </a:fontRef>
+        </p:style>
+        <p:txBody>
+          <a:bodyPr rtlCol="0" anchor="ctr"/>
+          <a:lstStyle/>
+          <a:p>
+            <a:pPr algn="ctr"/>
+          </a:p>
+        </p:txBody>
+      </p:sp>
+      <p:sp>
+        <p:nvSpPr>
+          <p:cNvPr id="5" name="Rectangle 4"/>
+          <p:cNvSpPr/>
+          <p:nvPr/>
+        </p:nvSpPr>
+        <p:spPr>
+          <a:xfrm>
+            <a:off x="502920" y="960120"/>
+            <a:ext cx="54864" cy="1819655"/>
+          </a:xfrm>
+          <a:prstGeom prst="rect">
+            <a:avLst/>
+          </a:prstGeom>
+          <a:solidFill>
+            <a:srgbClr val="CF222E"/>
+          </a:solidFill>
+          <a:ln>
+            <a:noFill/>
+          </a:ln>
+          <a:effectLst/>
+        </p:spPr>
+        <p:style>
+          <a:lnRef idx="1">
+            <a:schemeClr val="accent1"/>
+          </a:lnRef>
+          <a:fillRef idx="3">
+            <a:schemeClr val="accent1"/>
+          </a:fillRef>
+          <a:effectRef idx="2">
+            <a:schemeClr val="accent1"/>
+          </a:effectRef>
+          <a:fontRef idx="minor">
+            <a:schemeClr val="lt1"/>
+          </a:fontRef>
+        </p:style>
+        <p:txBody>
+          <a:bodyPr rtlCol="0" anchor="ctr"/>
+          <a:lstStyle/>
+          <a:p>
+            <a:pPr algn="ctr"/>
+          </a:p>
+        </p:txBody>
+      </p:sp>
+      <p:sp>
+        <p:nvSpPr>
+          <p:cNvPr id="6" name="TextBox 5"/>
+          <p:cNvSpPr txBox="1"/>
+          <p:nvPr/>
+        </p:nvSpPr>
+        <p:spPr>
+          <a:xfrm>
+            <a:off x="740664" y="1042416"/>
+            <a:ext cx="10698480" cy="274320"/>
+          </a:xfrm>
+          <a:prstGeom prst="rect">
+            <a:avLst/>
+          </a:prstGeom>
+          <a:noFill/>
+        </p:spPr>
+        <p:txBody>
+          <a:bodyPr wrap="square" lIns="0" rIns="0" tIns="0" bIns="0" anchor="t">
+            <a:spAutoFit/>
+          </a:bodyPr>
+          <a:lstStyle/>
+          <a:p>
+            <a:pPr algn="l">
+              <a:lnSpc>
+                <a:spcPct val="130000"/>
+              </a:lnSpc>
+            </a:pPr>
+            <a:r>
+              <a:rPr sz="1300" b="1">
+                <a:solidFill>
+                  <a:srgbClr val="CF222E"/>
+                </a:solidFill>
+                <a:latin typeface="Noto Sans Mono"/>
+              </a:rPr>
+              <a:t>✕ </a:t>
+            </a:r>
+            <a:r>
+              <a:rPr sz="1300" b="1">
+                <a:solidFill>
+                  <a:srgbClr val="CF222E"/>
+                </a:solidFill>
+                <a:latin typeface="Noto Sans Mono CJK KR"/>
+              </a:rPr>
+              <a:t>문제</a:t>
+            </a:r>
+            <a:r>
+              <a:rPr sz="1300" b="1">
+                <a:solidFill>
+                  <a:srgbClr val="CF222E"/>
+                </a:solidFill>
+                <a:latin typeface="Noto Sans Mono"/>
+              </a:rPr>
+              <a:t> — </a:t>
+            </a:r>
+            <a:r>
+              <a:rPr sz="1300" b="1">
+                <a:solidFill>
+                  <a:srgbClr val="CF222E"/>
+                </a:solidFill>
+                <a:latin typeface="Noto Sans Mono CJK KR"/>
+              </a:rPr>
+              <a:t>요청을</a:t>
+            </a:r>
+            <a:r>
+              <a:rPr sz="1300" b="1">
+                <a:solidFill>
+                  <a:srgbClr val="CF222E"/>
+                </a:solidFill>
+                <a:latin typeface="Noto Sans Mono"/>
+              </a:rPr>
+              <a:t> </a:t>
+            </a:r>
+            <a:r>
+              <a:rPr sz="1300" b="1">
+                <a:solidFill>
+                  <a:srgbClr val="CF222E"/>
+                </a:solidFill>
+                <a:latin typeface="Noto Sans Mono CJK KR"/>
+              </a:rPr>
+              <a:t>받기도</a:t>
+            </a:r>
+            <a:r>
+              <a:rPr sz="1300" b="1">
+                <a:solidFill>
+                  <a:srgbClr val="CF222E"/>
+                </a:solidFill>
+                <a:latin typeface="Noto Sans Mono"/>
+              </a:rPr>
+              <a:t> </a:t>
+            </a:r>
+            <a:r>
+              <a:rPr sz="1300" b="1">
+                <a:solidFill>
+                  <a:srgbClr val="CF222E"/>
+                </a:solidFill>
+                <a:latin typeface="Noto Sans Mono CJK KR"/>
+              </a:rPr>
+              <a:t>전에</a:t>
+            </a:r>
+            <a:r>
+              <a:rPr sz="1300" b="1">
+                <a:solidFill>
+                  <a:srgbClr val="CF222E"/>
+                </a:solidFill>
+                <a:latin typeface="Noto Sans Mono"/>
+              </a:rPr>
+              <a:t> </a:t>
+            </a:r>
+            <a:r>
+              <a:rPr sz="1300" b="1">
+                <a:solidFill>
+                  <a:srgbClr val="CF222E"/>
+                </a:solidFill>
+                <a:latin typeface="Noto Sans Mono CJK KR"/>
+              </a:rPr>
+              <a:t>백그라운드</a:t>
+            </a:r>
+            <a:r>
+              <a:rPr sz="1300" b="1">
+                <a:solidFill>
+                  <a:srgbClr val="CF222E"/>
+                </a:solidFill>
+                <a:latin typeface="Noto Sans Mono"/>
+              </a:rPr>
+              <a:t> </a:t>
+            </a:r>
+            <a:r>
+              <a:rPr sz="1300" b="1">
+                <a:solidFill>
+                  <a:srgbClr val="CF222E"/>
+                </a:solidFill>
+                <a:latin typeface="Noto Sans Mono CJK KR"/>
+              </a:rPr>
+              <a:t>서비스가</a:t>
+            </a:r>
+            <a:r>
+              <a:rPr sz="1300" b="1">
+                <a:solidFill>
+                  <a:srgbClr val="CF222E"/>
+                </a:solidFill>
+                <a:latin typeface="Noto Sans Mono"/>
+              </a:rPr>
+              <a:t> </a:t>
+            </a:r>
+            <a:r>
+              <a:rPr sz="1300" b="1">
+                <a:solidFill>
+                  <a:srgbClr val="CF222E"/>
+                </a:solidFill>
+                <a:latin typeface="Noto Sans Mono CJK KR"/>
+              </a:rPr>
+              <a:t>호스트</a:t>
+            </a:r>
+            <a:r>
+              <a:rPr sz="1300" b="1">
+                <a:solidFill>
+                  <a:srgbClr val="CF222E"/>
+                </a:solidFill>
+                <a:latin typeface="Noto Sans Mono"/>
+              </a:rPr>
+              <a:t> </a:t>
+            </a:r>
+            <a:r>
+              <a:rPr sz="1300" b="1">
+                <a:solidFill>
+                  <a:srgbClr val="CF222E"/>
+                </a:solidFill>
+                <a:latin typeface="Noto Sans Mono CJK KR"/>
+              </a:rPr>
+              <a:t>전체를</a:t>
+            </a:r>
+            <a:r>
+              <a:rPr sz="1300" b="1">
+                <a:solidFill>
+                  <a:srgbClr val="CF222E"/>
+                </a:solidFill>
+                <a:latin typeface="Noto Sans Mono"/>
+              </a:rPr>
+              <a:t> </a:t>
+            </a:r>
+            <a:r>
+              <a:rPr sz="1300" b="1">
+                <a:solidFill>
+                  <a:srgbClr val="CF222E"/>
+                </a:solidFill>
+                <a:latin typeface="Noto Sans Mono CJK KR"/>
+              </a:rPr>
+              <a:t>크래시</a:t>
+            </a:r>
+          </a:p>
+        </p:txBody>
+      </p:sp>
+      <p:sp>
+        <p:nvSpPr>
+          <p:cNvPr id="7" name="Rounded Rectangle 6"/>
+          <p:cNvSpPr/>
+          <p:nvPr/>
+        </p:nvSpPr>
+        <p:spPr>
+          <a:xfrm>
+            <a:off x="740664" y="1371600"/>
+            <a:ext cx="10698480" cy="658368"/>
+          </a:xfrm>
+          <a:prstGeom prst="roundRect">
+            <a:avLst>
+              <a:gd name="adj" fmla="val 9000"/>
+            </a:avLst>
+          </a:prstGeom>
+          <a:solidFill>
+            <a:srgbClr val="FFFFFF"/>
+          </a:solidFill>
+          <a:ln w="9525">
+            <a:solidFill>
+              <a:srgbClr val="E4E8EC"/>
+            </a:solidFill>
+          </a:ln>
+          <a:effectLst/>
+        </p:spPr>
+        <p:style>
+          <a:lnRef idx="1">
+            <a:schemeClr val="accent1"/>
+          </a:lnRef>
+          <a:fillRef idx="3">
+            <a:schemeClr val="accent1"/>
+          </a:fillRef>
+          <a:effectRef idx="2">
+            <a:schemeClr val="accent1"/>
+          </a:effectRef>
+          <a:fontRef idx="minor">
+            <a:schemeClr val="lt1"/>
+          </a:fontRef>
+        </p:style>
+        <p:txBody>
+          <a:bodyPr rtlCol="0" anchor="ctr"/>
+          <a:lstStyle/>
+          <a:p>
+            <a:pPr algn="ctr"/>
+          </a:p>
+        </p:txBody>
+      </p:sp>
+      <p:sp>
+        <p:nvSpPr>
+          <p:cNvPr id="8" name="TextBox 7"/>
+          <p:cNvSpPr txBox="1"/>
+          <p:nvPr/>
+        </p:nvSpPr>
+        <p:spPr>
+          <a:xfrm>
+            <a:off x="886968" y="1453896"/>
+            <a:ext cx="10405872" cy="182880"/>
+          </a:xfrm>
+          <a:prstGeom prst="rect">
+            <a:avLst/>
+          </a:prstGeom>
+          <a:noFill/>
+        </p:spPr>
+        <p:txBody>
+          <a:bodyPr wrap="square" lIns="0" rIns="0" tIns="0" bIns="0" anchor="t">
+            <a:spAutoFit/>
+          </a:bodyPr>
+          <a:lstStyle/>
+          <a:p>
+            <a:pPr algn="l">
+              <a:lnSpc>
+                <a:spcPct val="125000"/>
+              </a:lnSpc>
+            </a:pPr>
+            <a:r>
+              <a:rPr sz="1000" b="1">
+                <a:solidFill>
+                  <a:srgbClr val="6E7781"/>
+                </a:solidFill>
+                <a:latin typeface="Noto Sans Mono CJK KR"/>
+              </a:rPr>
+              <a:t>원인</a:t>
+            </a:r>
+          </a:p>
+        </p:txBody>
+      </p:sp>
+      <p:sp>
+        <p:nvSpPr>
+          <p:cNvPr id="9" name="TextBox 8"/>
+          <p:cNvSpPr txBox="1"/>
+          <p:nvPr/>
+        </p:nvSpPr>
+        <p:spPr>
+          <a:xfrm>
+            <a:off x="886968" y="1645920"/>
+            <a:ext cx="10405872" cy="329184"/>
+          </a:xfrm>
+          <a:prstGeom prst="rect">
+            <a:avLst/>
+          </a:prstGeom>
+          <a:noFill/>
+        </p:spPr>
+        <p:txBody>
+          <a:bodyPr wrap="square" lIns="0" rIns="0" tIns="0" bIns="0" anchor="t">
+            <a:spAutoFit/>
+          </a:bodyPr>
+          <a:lstStyle/>
+          <a:p>
+            <a:pPr algn="l">
+              <a:lnSpc>
+                <a:spcPct val="125000"/>
+              </a:lnSpc>
+            </a:pPr>
+            <a:r>
+              <a:rPr sz="1100" b="0">
+                <a:solidFill>
+                  <a:srgbClr val="59636E"/>
+                </a:solidFill>
+                <a:latin typeface="Noto Sans CJK KR"/>
+              </a:rPr>
+              <a:t>DateTimeOffset 부등호 비교(m.Ts &lt; cutoff)를 EF Core+SQLite가 SQL로 번역하지 못해 InvalidOperationException.</a:t>
+            </a:r>
+          </a:p>
+        </p:txBody>
+      </p:sp>
+      <p:sp>
+        <p:nvSpPr>
+          <p:cNvPr id="10" name="Rounded Rectangle 9"/>
+          <p:cNvSpPr/>
+          <p:nvPr/>
+        </p:nvSpPr>
+        <p:spPr>
+          <a:xfrm>
+            <a:off x="740664" y="2121408"/>
+            <a:ext cx="10698480" cy="484632"/>
+          </a:xfrm>
+          <a:prstGeom prst="roundRect">
+            <a:avLst>
+              <a:gd name="adj" fmla="val 9000"/>
+            </a:avLst>
+          </a:prstGeom>
+          <a:solidFill>
+            <a:srgbClr val="FFFFFF"/>
+          </a:solidFill>
+          <a:ln w="9525">
+            <a:solidFill>
+              <a:srgbClr val="E4E8EC"/>
+            </a:solidFill>
+          </a:ln>
+          <a:effectLst/>
+        </p:spPr>
+        <p:style>
+          <a:lnRef idx="1">
+            <a:schemeClr val="accent1"/>
+          </a:lnRef>
+          <a:fillRef idx="3">
+            <a:schemeClr val="accent1"/>
+          </a:fillRef>
+          <a:effectRef idx="2">
+            <a:schemeClr val="accent1"/>
+          </a:effectRef>
+          <a:fontRef idx="minor">
+            <a:schemeClr val="lt1"/>
+          </a:fontRef>
+        </p:style>
+        <p:txBody>
+          <a:bodyPr rtlCol="0" anchor="ctr"/>
+          <a:lstStyle/>
+          <a:p>
+            <a:pPr algn="ctr"/>
+          </a:p>
+        </p:txBody>
+      </p:sp>
+      <p:sp>
+        <p:nvSpPr>
+          <p:cNvPr id="11" name="TextBox 10"/>
+          <p:cNvSpPr txBox="1"/>
+          <p:nvPr/>
+        </p:nvSpPr>
+        <p:spPr>
+          <a:xfrm>
+            <a:off x="886968" y="2203704"/>
+            <a:ext cx="10405872" cy="182880"/>
+          </a:xfrm>
+          <a:prstGeom prst="rect">
+            <a:avLst/>
+          </a:prstGeom>
+          <a:noFill/>
+        </p:spPr>
+        <p:txBody>
+          <a:bodyPr wrap="square" lIns="0" rIns="0" tIns="0" bIns="0" anchor="t">
+            <a:spAutoFit/>
+          </a:bodyPr>
+          <a:lstStyle/>
+          <a:p>
+            <a:pPr algn="l">
+              <a:lnSpc>
+                <a:spcPct val="125000"/>
+              </a:lnSpc>
+            </a:pPr>
+            <a:r>
+              <a:rPr sz="1000" b="1">
+                <a:solidFill>
+                  <a:srgbClr val="6E7781"/>
+                </a:solidFill>
+                <a:latin typeface="Noto Sans Mono CJK KR"/>
+              </a:rPr>
+              <a:t>발견</a:t>
+            </a:r>
+            <a:r>
+              <a:rPr sz="1000" b="1">
+                <a:solidFill>
+                  <a:srgbClr val="6E7781"/>
+                </a:solidFill>
+                <a:latin typeface="Noto Sans Mono"/>
+              </a:rPr>
+              <a:t> </a:t>
+            </a:r>
+            <a:r>
+              <a:rPr sz="1000" b="1">
+                <a:solidFill>
+                  <a:srgbClr val="6E7781"/>
+                </a:solidFill>
+                <a:latin typeface="Noto Sans Mono CJK KR"/>
+              </a:rPr>
+              <a:t>계기</a:t>
+            </a:r>
+          </a:p>
+        </p:txBody>
+      </p:sp>
+      <p:sp>
+        <p:nvSpPr>
+          <p:cNvPr id="12" name="TextBox 11"/>
+          <p:cNvSpPr txBox="1"/>
+          <p:nvPr/>
+        </p:nvSpPr>
+        <p:spPr>
+          <a:xfrm>
+            <a:off x="886968" y="2395728"/>
+            <a:ext cx="10405872" cy="155448"/>
+          </a:xfrm>
+          <a:prstGeom prst="rect">
+            <a:avLst/>
+          </a:prstGeom>
+          <a:noFill/>
+        </p:spPr>
+        <p:txBody>
+          <a:bodyPr wrap="square" lIns="0" rIns="0" tIns="0" bIns="0" anchor="t">
+            <a:spAutoFit/>
+          </a:bodyPr>
+          <a:lstStyle/>
+          <a:p>
+            <a:pPr algn="l">
+              <a:lnSpc>
+                <a:spcPct val="125000"/>
+              </a:lnSpc>
+            </a:pPr>
+            <a:r>
+              <a:rPr sz="1100" b="0">
+                <a:solidFill>
+                  <a:srgbClr val="59636E"/>
+                </a:solidFill>
+                <a:latin typeface="Noto Sans CJK KR"/>
+              </a:rPr>
+              <a:t>알림·트레이스 페이지 실행 검증 중, 기동 직후 보존 정책 서비스(RetentionService)가 호스트째 종료.</a:t>
+            </a:r>
+          </a:p>
+        </p:txBody>
+      </p:sp>
+      <p:sp>
+        <p:nvSpPr>
+          <p:cNvPr id="13" name="Rounded Rectangle 12"/>
+          <p:cNvSpPr/>
+          <p:nvPr/>
+        </p:nvSpPr>
+        <p:spPr>
+          <a:xfrm>
+            <a:off x="502920" y="2962655"/>
+            <a:ext cx="11155680" cy="1737360"/>
+          </a:xfrm>
+          <a:prstGeom prst="roundRect">
+            <a:avLst>
+              <a:gd name="adj" fmla="val 4000"/>
+            </a:avLst>
+          </a:prstGeom>
+          <a:solidFill>
+            <a:srgbClr val="F6F8FA"/>
+          </a:solidFill>
+          <a:ln w="9525">
+            <a:solidFill>
+              <a:srgbClr val="D0D7DE"/>
+            </a:solidFill>
+          </a:ln>
+          <a:effectLst/>
+        </p:spPr>
+        <p:style>
+          <a:lnRef idx="1">
+            <a:schemeClr val="accent1"/>
+          </a:lnRef>
+          <a:fillRef idx="3">
+            <a:schemeClr val="accent1"/>
+          </a:fillRef>
+          <a:effectRef idx="2">
+            <a:schemeClr val="accent1"/>
+          </a:effectRef>
+          <a:fontRef idx="minor">
+            <a:schemeClr val="lt1"/>
+          </a:fontRef>
+        </p:style>
+        <p:txBody>
+          <a:bodyPr rtlCol="0" anchor="ctr"/>
+          <a:lstStyle/>
+          <a:p>
+            <a:pPr algn="ctr"/>
+          </a:p>
+        </p:txBody>
+      </p:sp>
+      <p:sp>
+        <p:nvSpPr>
+          <p:cNvPr id="14" name="Rectangle 13"/>
+          <p:cNvSpPr/>
+          <p:nvPr/>
+        </p:nvSpPr>
+        <p:spPr>
+          <a:xfrm>
+            <a:off x="502920" y="3008375"/>
+            <a:ext cx="54864" cy="1645920"/>
+          </a:xfrm>
+          <a:prstGeom prst="rect">
+            <a:avLst/>
+          </a:prstGeom>
+          <a:solidFill>
+            <a:srgbClr val="1A7F37"/>
+          </a:solidFill>
+          <a:ln>
+            <a:noFill/>
+          </a:ln>
+          <a:effectLst/>
+        </p:spPr>
+        <p:style>
+          <a:lnRef idx="1">
+            <a:schemeClr val="accent1"/>
+          </a:lnRef>
+          <a:fillRef idx="3">
+            <a:schemeClr val="accent1"/>
+          </a:fillRef>
+          <a:effectRef idx="2">
+            <a:schemeClr val="accent1"/>
+          </a:effectRef>
+          <a:fontRef idx="minor">
+            <a:schemeClr val="lt1"/>
+          </a:fontRef>
+        </p:style>
+        <p:txBody>
+          <a:bodyPr rtlCol="0" anchor="ctr"/>
+          <a:lstStyle/>
+          <a:p>
+            <a:pPr algn="ctr"/>
+          </a:p>
+        </p:txBody>
+      </p:sp>
+      <p:sp>
+        <p:nvSpPr>
+          <p:cNvPr id="15" name="TextBox 14"/>
+          <p:cNvSpPr txBox="1"/>
+          <p:nvPr/>
+        </p:nvSpPr>
+        <p:spPr>
+          <a:xfrm>
+            <a:off x="740664" y="3090671"/>
+            <a:ext cx="10698480" cy="274320"/>
+          </a:xfrm>
+          <a:prstGeom prst="rect">
+            <a:avLst/>
+          </a:prstGeom>
+          <a:noFill/>
+        </p:spPr>
+        <p:txBody>
+          <a:bodyPr wrap="square" lIns="0" rIns="0" tIns="0" bIns="0" anchor="t">
+            <a:spAutoFit/>
+          </a:bodyPr>
+          <a:lstStyle/>
+          <a:p>
+            <a:pPr algn="l">
+              <a:lnSpc>
+                <a:spcPct val="130000"/>
+              </a:lnSpc>
+            </a:pPr>
+            <a:r>
+              <a:rPr sz="1300" b="1">
+                <a:solidFill>
+                  <a:srgbClr val="1A7F37"/>
+                </a:solidFill>
+                <a:latin typeface="Noto Sans Mono"/>
+              </a:rPr>
+              <a:t>✓ </a:t>
+            </a:r>
+            <a:r>
+              <a:rPr sz="1300" b="1">
+                <a:solidFill>
+                  <a:srgbClr val="1A7F37"/>
+                </a:solidFill>
+                <a:latin typeface="Noto Sans Mono CJK KR"/>
+              </a:rPr>
+              <a:t>수정</a:t>
+            </a:r>
+            <a:r>
+              <a:rPr sz="1300" b="1">
+                <a:solidFill>
+                  <a:srgbClr val="1A7F37"/>
+                </a:solidFill>
+                <a:latin typeface="Noto Sans Mono"/>
+              </a:rPr>
+              <a:t> — LINQ </a:t>
+            </a:r>
+            <a:r>
+              <a:rPr sz="1300" b="1">
+                <a:solidFill>
+                  <a:srgbClr val="1A7F37"/>
+                </a:solidFill>
+                <a:latin typeface="Noto Sans Mono CJK KR"/>
+              </a:rPr>
+              <a:t>번역을</a:t>
+            </a:r>
+            <a:r>
+              <a:rPr sz="1300" b="1">
+                <a:solidFill>
+                  <a:srgbClr val="1A7F37"/>
+                </a:solidFill>
+                <a:latin typeface="Noto Sans Mono"/>
+              </a:rPr>
+              <a:t> </a:t>
+            </a:r>
+            <a:r>
+              <a:rPr sz="1300" b="1">
+                <a:solidFill>
+                  <a:srgbClr val="1A7F37"/>
+                </a:solidFill>
+                <a:latin typeface="Noto Sans Mono CJK KR"/>
+              </a:rPr>
+              <a:t>우회하는</a:t>
+            </a:r>
+            <a:r>
+              <a:rPr sz="1300" b="1">
+                <a:solidFill>
+                  <a:srgbClr val="1A7F37"/>
+                </a:solidFill>
+                <a:latin typeface="Noto Sans Mono"/>
+              </a:rPr>
+              <a:t> </a:t>
+            </a:r>
+            <a:r>
+              <a:rPr sz="1300" b="1">
+                <a:solidFill>
+                  <a:srgbClr val="1A7F37"/>
+                </a:solidFill>
+                <a:latin typeface="Noto Sans Mono CJK KR"/>
+              </a:rPr>
+              <a:t>파라미터화</a:t>
+            </a:r>
+            <a:r>
+              <a:rPr sz="1300" b="1">
+                <a:solidFill>
+                  <a:srgbClr val="1A7F37"/>
+                </a:solidFill>
+                <a:latin typeface="Noto Sans Mono"/>
+              </a:rPr>
+              <a:t> raw SQL</a:t>
+            </a:r>
+          </a:p>
+        </p:txBody>
+      </p:sp>
+      <p:sp>
+        <p:nvSpPr>
+          <p:cNvPr id="16" name="Rounded Rectangle 15"/>
+          <p:cNvSpPr/>
+          <p:nvPr/>
+        </p:nvSpPr>
+        <p:spPr>
+          <a:xfrm>
+            <a:off x="740664" y="3419855"/>
+            <a:ext cx="10698480" cy="484632"/>
+          </a:xfrm>
+          <a:prstGeom prst="roundRect">
+            <a:avLst>
+              <a:gd name="adj" fmla="val 9000"/>
+            </a:avLst>
+          </a:prstGeom>
+          <a:solidFill>
+            <a:srgbClr val="FFFFFF"/>
+          </a:solidFill>
+          <a:ln w="9525">
+            <a:solidFill>
+              <a:srgbClr val="E4E8EC"/>
+            </a:solidFill>
+          </a:ln>
+          <a:effectLst/>
+        </p:spPr>
+        <p:style>
+          <a:lnRef idx="1">
+            <a:schemeClr val="accent1"/>
+          </a:lnRef>
+          <a:fillRef idx="3">
+            <a:schemeClr val="accent1"/>
+          </a:fillRef>
+          <a:effectRef idx="2">
+            <a:schemeClr val="accent1"/>
+          </a:effectRef>
+          <a:fontRef idx="minor">
+            <a:schemeClr val="lt1"/>
+          </a:fontRef>
+        </p:style>
+        <p:txBody>
+          <a:bodyPr rtlCol="0" anchor="ctr"/>
+          <a:lstStyle/>
+          <a:p>
+            <a:pPr algn="ctr"/>
+          </a:p>
+        </p:txBody>
+      </p:sp>
+      <p:sp>
+        <p:nvSpPr>
+          <p:cNvPr id="17" name="TextBox 16"/>
+          <p:cNvSpPr txBox="1"/>
+          <p:nvPr/>
+        </p:nvSpPr>
+        <p:spPr>
+          <a:xfrm>
+            <a:off x="886968" y="3502151"/>
+            <a:ext cx="10405872" cy="182880"/>
+          </a:xfrm>
+          <a:prstGeom prst="rect">
+            <a:avLst/>
+          </a:prstGeom>
+          <a:noFill/>
+        </p:spPr>
+        <p:txBody>
+          <a:bodyPr wrap="square" lIns="0" rIns="0" tIns="0" bIns="0" anchor="t">
+            <a:spAutoFit/>
+          </a:bodyPr>
+          <a:lstStyle/>
+          <a:p>
+            <a:pPr algn="l">
+              <a:lnSpc>
+                <a:spcPct val="125000"/>
+              </a:lnSpc>
+            </a:pPr>
+            <a:r>
+              <a:rPr sz="1000" b="1">
+                <a:solidFill>
+                  <a:srgbClr val="6E7781"/>
+                </a:solidFill>
+                <a:latin typeface="Noto Sans Mono CJK KR"/>
+              </a:rPr>
+              <a:t>판단</a:t>
+            </a:r>
+          </a:p>
+        </p:txBody>
+      </p:sp>
+      <p:sp>
+        <p:nvSpPr>
+          <p:cNvPr id="18" name="TextBox 17"/>
+          <p:cNvSpPr txBox="1"/>
+          <p:nvPr/>
+        </p:nvSpPr>
+        <p:spPr>
+          <a:xfrm>
+            <a:off x="886968" y="3694175"/>
+            <a:ext cx="10405872" cy="155448"/>
+          </a:xfrm>
+          <a:prstGeom prst="rect">
+            <a:avLst/>
+          </a:prstGeom>
+          <a:noFill/>
+        </p:spPr>
+        <p:txBody>
+          <a:bodyPr wrap="square" lIns="0" rIns="0" tIns="0" bIns="0" anchor="t">
+            <a:spAutoFit/>
+          </a:bodyPr>
+          <a:lstStyle/>
+          <a:p>
+            <a:pPr algn="l">
+              <a:lnSpc>
+                <a:spcPct val="125000"/>
+              </a:lnSpc>
+            </a:pPr>
+            <a:r>
+              <a:rPr sz="1100" b="0">
+                <a:solidFill>
+                  <a:srgbClr val="59636E"/>
+                </a:solidFill>
+                <a:latin typeface="Noto Sans CJK KR"/>
+              </a:rPr>
+              <a:t>값은 파라미터 바인딩이라 인젝션 안전 — ORM은 유지하고, 번역 한계에 걸리는 지점만 SQL로 내림.</a:t>
+            </a:r>
+          </a:p>
+        </p:txBody>
+      </p:sp>
+      <p:sp>
+        <p:nvSpPr>
+          <p:cNvPr id="19" name="Rounded Rectangle 18"/>
+          <p:cNvSpPr/>
+          <p:nvPr/>
+        </p:nvSpPr>
+        <p:spPr>
+          <a:xfrm>
+            <a:off x="740664" y="3995927"/>
+            <a:ext cx="10698480" cy="484632"/>
+          </a:xfrm>
+          <a:prstGeom prst="roundRect">
+            <a:avLst>
+              <a:gd name="adj" fmla="val 9000"/>
+            </a:avLst>
+          </a:prstGeom>
+          <a:solidFill>
+            <a:srgbClr val="FFFFFF"/>
+          </a:solidFill>
+          <a:ln w="9525">
+            <a:solidFill>
+              <a:srgbClr val="E4E8EC"/>
+            </a:solidFill>
+          </a:ln>
+          <a:effectLst/>
+        </p:spPr>
+        <p:style>
+          <a:lnRef idx="1">
+            <a:schemeClr val="accent1"/>
+          </a:lnRef>
+          <a:fillRef idx="3">
+            <a:schemeClr val="accent1"/>
+          </a:fillRef>
+          <a:effectRef idx="2">
+            <a:schemeClr val="accent1"/>
+          </a:effectRef>
+          <a:fontRef idx="minor">
+            <a:schemeClr val="lt1"/>
+          </a:fontRef>
+        </p:style>
+        <p:txBody>
+          <a:bodyPr rtlCol="0" anchor="ctr"/>
+          <a:lstStyle/>
+          <a:p>
+            <a:pPr algn="ctr"/>
+          </a:p>
+        </p:txBody>
+      </p:sp>
+      <p:sp>
+        <p:nvSpPr>
+          <p:cNvPr id="20" name="TextBox 19"/>
+          <p:cNvSpPr txBox="1"/>
+          <p:nvPr/>
+        </p:nvSpPr>
+        <p:spPr>
+          <a:xfrm>
+            <a:off x="886968" y="4078223"/>
+            <a:ext cx="10405872" cy="182880"/>
+          </a:xfrm>
+          <a:prstGeom prst="rect">
+            <a:avLst/>
+          </a:prstGeom>
+          <a:noFill/>
+        </p:spPr>
+        <p:txBody>
+          <a:bodyPr wrap="square" lIns="0" rIns="0" tIns="0" bIns="0" anchor="t">
+            <a:spAutoFit/>
+          </a:bodyPr>
+          <a:lstStyle/>
+          <a:p>
+            <a:pPr algn="l">
+              <a:lnSpc>
+                <a:spcPct val="125000"/>
+              </a:lnSpc>
+            </a:pPr>
+            <a:r>
+              <a:rPr sz="1000" b="1">
+                <a:solidFill>
+                  <a:srgbClr val="6E7781"/>
+                </a:solidFill>
+                <a:latin typeface="Noto Sans Mono CJK KR"/>
+              </a:rPr>
+              <a:t>검증</a:t>
+            </a:r>
+          </a:p>
+        </p:txBody>
+      </p:sp>
+      <p:sp>
+        <p:nvSpPr>
+          <p:cNvPr id="21" name="TextBox 20"/>
+          <p:cNvSpPr txBox="1"/>
+          <p:nvPr/>
+        </p:nvSpPr>
+        <p:spPr>
+          <a:xfrm>
+            <a:off x="886968" y="4270247"/>
+            <a:ext cx="10405872" cy="155448"/>
+          </a:xfrm>
+          <a:prstGeom prst="rect">
+            <a:avLst/>
+          </a:prstGeom>
+          <a:noFill/>
+        </p:spPr>
+        <p:txBody>
+          <a:bodyPr wrap="square" lIns="0" rIns="0" tIns="0" bIns="0" anchor="t">
+            <a:spAutoFit/>
+          </a:bodyPr>
+          <a:lstStyle/>
+          <a:p>
+            <a:pPr algn="l">
+              <a:lnSpc>
+                <a:spcPct val="125000"/>
+              </a:lnSpc>
+            </a:pPr>
+            <a:r>
+              <a:rPr sz="1100" b="0">
+                <a:solidFill>
+                  <a:srgbClr val="1A7F37"/>
+                </a:solidFill>
+                <a:latin typeface="Noto Sans CJK KR"/>
+              </a:rPr>
+              <a:t>같은 패턴을 재검색해 /apm/traces의 500 에러도 추가 수정 — 알림 실동작 재검증, dotnet test 18/18.</a:t>
+            </a:r>
+          </a:p>
+        </p:txBody>
+      </p:sp>
+      <p:sp>
+        <p:nvSpPr>
+          <p:cNvPr id="22" name="Rounded Rectangle 21"/>
+          <p:cNvSpPr/>
+          <p:nvPr/>
+        </p:nvSpPr>
+        <p:spPr>
+          <a:xfrm>
+            <a:off x="502920" y="4837175"/>
+            <a:ext cx="11155680" cy="1273302"/>
+          </a:xfrm>
+          <a:prstGeom prst="roundRect">
+            <a:avLst>
+              <a:gd name="adj" fmla="val 3500"/>
+            </a:avLst>
+          </a:prstGeom>
+          <a:solidFill>
+            <a:srgbClr val="EAEEF2"/>
+          </a:solidFill>
+          <a:ln w="9525">
+            <a:solidFill>
+              <a:srgbClr val="D0D7DE"/>
+            </a:solidFill>
+          </a:ln>
+          <a:effectLst/>
+        </p:spPr>
+        <p:style>
+          <a:lnRef idx="1">
+            <a:schemeClr val="accent1"/>
+          </a:lnRef>
+          <a:fillRef idx="3">
+            <a:schemeClr val="accent1"/>
+          </a:fillRef>
+          <a:effectRef idx="2">
+            <a:schemeClr val="accent1"/>
+          </a:effectRef>
+          <a:fontRef idx="minor">
+            <a:schemeClr val="lt1"/>
+          </a:fontRef>
+        </p:style>
+        <p:txBody>
+          <a:bodyPr rtlCol="0" anchor="ctr"/>
+          <a:lstStyle/>
+          <a:p>
+            <a:pPr algn="ctr"/>
+          </a:p>
+        </p:txBody>
+      </p:sp>
+      <p:sp>
+        <p:nvSpPr>
+          <p:cNvPr id="23" name="TextBox 22"/>
+          <p:cNvSpPr txBox="1"/>
+          <p:nvPr/>
+        </p:nvSpPr>
+        <p:spPr>
+          <a:xfrm>
+            <a:off x="649224" y="4946903"/>
+            <a:ext cx="10863072" cy="1053846"/>
+          </a:xfrm>
+          <a:prstGeom prst="rect">
+            <a:avLst/>
+          </a:prstGeom>
+          <a:noFill/>
+        </p:spPr>
+        <p:txBody>
+          <a:bodyPr wrap="square" lIns="0" rIns="0" tIns="0" bIns="0">
+            <a:spAutoFit/>
+          </a:bodyPr>
+          <a:lstStyle/>
+          <a:p>
+            <a:pPr algn="l">
+              <a:lnSpc>
+                <a:spcPct val="130000"/>
+              </a:lnSpc>
+            </a:pPr>
+            <a:r>
+              <a:rPr sz="1100" b="0">
+                <a:solidFill>
+                  <a:srgbClr val="6E7781"/>
+                </a:solidFill>
+                <a:latin typeface="Noto Sans Mono"/>
+              </a:rPr>
+              <a:t>// </a:t>
+            </a:r>
+            <a:r>
+              <a:rPr sz="1100" b="0">
+                <a:solidFill>
+                  <a:srgbClr val="6E7781"/>
+                </a:solidFill>
+                <a:latin typeface="Noto Sans Mono CJK KR"/>
+              </a:rPr>
+              <a:t>수정</a:t>
+            </a:r>
+            <a:r>
+              <a:rPr sz="1100" b="0">
+                <a:solidFill>
+                  <a:srgbClr val="6E7781"/>
+                </a:solidFill>
+                <a:latin typeface="Noto Sans Mono"/>
+              </a:rPr>
+              <a:t> </a:t>
+            </a:r>
+            <a:r>
+              <a:rPr sz="1100" b="0">
+                <a:solidFill>
+                  <a:srgbClr val="6E7781"/>
+                </a:solidFill>
+                <a:latin typeface="Noto Sans Mono CJK KR"/>
+              </a:rPr>
+              <a:t>전</a:t>
+            </a:r>
+            <a:r>
+              <a:rPr sz="1100" b="0">
+                <a:solidFill>
+                  <a:srgbClr val="6E7781"/>
+                </a:solidFill>
+                <a:latin typeface="Noto Sans Mono"/>
+              </a:rPr>
+              <a:t> — DateTimeOffset </a:t>
+            </a:r>
+            <a:r>
+              <a:rPr sz="1100" b="0">
+                <a:solidFill>
+                  <a:srgbClr val="6E7781"/>
+                </a:solidFill>
+                <a:latin typeface="Noto Sans Mono CJK KR"/>
+              </a:rPr>
+              <a:t>부등호</a:t>
+            </a:r>
+            <a:r>
+              <a:rPr sz="1100" b="0">
+                <a:solidFill>
+                  <a:srgbClr val="6E7781"/>
+                </a:solidFill>
+                <a:latin typeface="Noto Sans Mono"/>
+              </a:rPr>
+              <a:t> </a:t>
+            </a:r>
+            <a:r>
+              <a:rPr sz="1100" b="0">
+                <a:solidFill>
+                  <a:srgbClr val="6E7781"/>
+                </a:solidFill>
+                <a:latin typeface="Noto Sans Mono CJK KR"/>
+              </a:rPr>
+              <a:t>비교를</a:t>
+            </a:r>
+            <a:r>
+              <a:rPr sz="1100" b="0">
+                <a:solidFill>
+                  <a:srgbClr val="6E7781"/>
+                </a:solidFill>
+                <a:latin typeface="Noto Sans Mono"/>
+              </a:rPr>
+              <a:t> LINQ</a:t>
+            </a:r>
+            <a:r>
+              <a:rPr sz="1100" b="0">
+                <a:solidFill>
+                  <a:srgbClr val="6E7781"/>
+                </a:solidFill>
+                <a:latin typeface="Noto Sans Mono CJK KR"/>
+              </a:rPr>
+              <a:t>로</a:t>
+            </a:r>
+            <a:r>
+              <a:rPr sz="1100" b="0">
+                <a:solidFill>
+                  <a:srgbClr val="6E7781"/>
+                </a:solidFill>
+                <a:latin typeface="Noto Sans Mono"/>
+              </a:rPr>
+              <a:t> → SQL </a:t>
+            </a:r>
+            <a:r>
+              <a:rPr sz="1100" b="0">
+                <a:solidFill>
+                  <a:srgbClr val="6E7781"/>
+                </a:solidFill>
+                <a:latin typeface="Noto Sans Mono CJK KR"/>
+              </a:rPr>
+              <a:t>번역</a:t>
+            </a:r>
+            <a:r>
+              <a:rPr sz="1100" b="0">
+                <a:solidFill>
+                  <a:srgbClr val="6E7781"/>
+                </a:solidFill>
+                <a:latin typeface="Noto Sans Mono"/>
+              </a:rPr>
+              <a:t> </a:t>
+            </a:r>
+            <a:r>
+              <a:rPr sz="1100" b="0">
+                <a:solidFill>
+                  <a:srgbClr val="6E7781"/>
+                </a:solidFill>
+                <a:latin typeface="Noto Sans Mono CJK KR"/>
+              </a:rPr>
+              <a:t>실패</a:t>
+            </a:r>
+          </a:p>
+          <a:p>
+            <a:pPr algn="l">
+              <a:lnSpc>
+                <a:spcPct val="130000"/>
+              </a:lnSpc>
+            </a:pPr>
+            <a:r>
+              <a:rPr sz="1100" b="0">
+                <a:solidFill>
+                  <a:srgbClr val="CF222E"/>
+                </a:solidFill>
+                <a:latin typeface="Noto Sans Mono"/>
+              </a:rPr>
+              <a:t>await </a:t>
+            </a:r>
+            <a:r>
+              <a:rPr sz="1100" b="0">
+                <a:solidFill>
+                  <a:srgbClr val="1F2328"/>
+                </a:solidFill>
+                <a:latin typeface="Noto Sans Mono"/>
+              </a:rPr>
+              <a:t>db.</a:t>
+            </a:r>
+            <a:r>
+              <a:rPr sz="1100" b="0">
+                <a:solidFill>
+                  <a:srgbClr val="0550AE"/>
+                </a:solidFill>
+                <a:latin typeface="Noto Sans Mono"/>
+              </a:rPr>
+              <a:t>Metrics</a:t>
+            </a:r>
+            <a:r>
+              <a:rPr sz="1100" b="0">
+                <a:solidFill>
+                  <a:srgbClr val="1F2328"/>
+                </a:solidFill>
+                <a:latin typeface="Noto Sans Mono"/>
+              </a:rPr>
+              <a:t>.Where(m =&gt; m.Ts &lt; cutoff).</a:t>
+            </a:r>
+            <a:r>
+              <a:rPr sz="1100" b="0">
+                <a:solidFill>
+                  <a:srgbClr val="0550AE"/>
+                </a:solidFill>
+                <a:latin typeface="Noto Sans Mono"/>
+              </a:rPr>
+              <a:t>ExecuteDeleteAsync</a:t>
+            </a:r>
+            <a:r>
+              <a:rPr sz="1100" b="0">
+                <a:solidFill>
+                  <a:srgbClr val="1F2328"/>
+                </a:solidFill>
+                <a:latin typeface="Noto Sans Mono"/>
+              </a:rPr>
+              <a:t>(ct);</a:t>
+            </a:r>
+          </a:p>
+          <a:p>
+            <a:pPr algn="l">
+              <a:lnSpc>
+                <a:spcPct val="130000"/>
+              </a:lnSpc>
+            </a:pPr>
+            <a:r>
+              <a:rPr sz="1100" b="0">
+                <a:solidFill>
+                  <a:srgbClr val="6E7781"/>
+                </a:solidFill>
+                <a:latin typeface="Noto Sans Mono"/>
+              </a:rPr>
+              <a:t>// </a:t>
+            </a:r>
+            <a:r>
+              <a:rPr sz="1100" b="0">
+                <a:solidFill>
+                  <a:srgbClr val="6E7781"/>
+                </a:solidFill>
+                <a:latin typeface="Noto Sans Mono CJK KR"/>
+              </a:rPr>
+              <a:t>수정</a:t>
+            </a:r>
+            <a:r>
+              <a:rPr sz="1100" b="0">
+                <a:solidFill>
+                  <a:srgbClr val="6E7781"/>
+                </a:solidFill>
+                <a:latin typeface="Noto Sans Mono"/>
+              </a:rPr>
+              <a:t> </a:t>
+            </a:r>
+            <a:r>
+              <a:rPr sz="1100" b="0">
+                <a:solidFill>
+                  <a:srgbClr val="6E7781"/>
+                </a:solidFill>
+                <a:latin typeface="Noto Sans Mono CJK KR"/>
+              </a:rPr>
+              <a:t>후</a:t>
+            </a:r>
+            <a:r>
+              <a:rPr sz="1100" b="0">
+                <a:solidFill>
+                  <a:srgbClr val="6E7781"/>
+                </a:solidFill>
+                <a:latin typeface="Noto Sans Mono"/>
+              </a:rPr>
+              <a:t> — LINQ </a:t>
+            </a:r>
+            <a:r>
+              <a:rPr sz="1100" b="0">
+                <a:solidFill>
+                  <a:srgbClr val="6E7781"/>
+                </a:solidFill>
+                <a:latin typeface="Noto Sans Mono CJK KR"/>
+              </a:rPr>
+              <a:t>번역을</a:t>
+            </a:r>
+            <a:r>
+              <a:rPr sz="1100" b="0">
+                <a:solidFill>
+                  <a:srgbClr val="6E7781"/>
+                </a:solidFill>
+                <a:latin typeface="Noto Sans Mono"/>
+              </a:rPr>
+              <a:t> </a:t>
+            </a:r>
+            <a:r>
+              <a:rPr sz="1100" b="0">
+                <a:solidFill>
+                  <a:srgbClr val="6E7781"/>
+                </a:solidFill>
+                <a:latin typeface="Noto Sans Mono CJK KR"/>
+              </a:rPr>
+              <a:t>거치지</a:t>
+            </a:r>
+            <a:r>
+              <a:rPr sz="1100" b="0">
+                <a:solidFill>
+                  <a:srgbClr val="6E7781"/>
+                </a:solidFill>
+                <a:latin typeface="Noto Sans Mono"/>
+              </a:rPr>
+              <a:t> </a:t>
+            </a:r>
+            <a:r>
+              <a:rPr sz="1100" b="0">
+                <a:solidFill>
+                  <a:srgbClr val="6E7781"/>
+                </a:solidFill>
+                <a:latin typeface="Noto Sans Mono CJK KR"/>
+              </a:rPr>
+              <a:t>않는</a:t>
+            </a:r>
+            <a:r>
+              <a:rPr sz="1100" b="0">
+                <a:solidFill>
+                  <a:srgbClr val="6E7781"/>
+                </a:solidFill>
+                <a:latin typeface="Noto Sans Mono"/>
+              </a:rPr>
+              <a:t> </a:t>
+            </a:r>
+            <a:r>
+              <a:rPr sz="1100" b="0">
+                <a:solidFill>
+                  <a:srgbClr val="6E7781"/>
+                </a:solidFill>
+                <a:latin typeface="Noto Sans Mono CJK KR"/>
+              </a:rPr>
+              <a:t>파라미터화</a:t>
+            </a:r>
+            <a:r>
+              <a:rPr sz="1100" b="0">
+                <a:solidFill>
+                  <a:srgbClr val="6E7781"/>
+                </a:solidFill>
+                <a:latin typeface="Noto Sans Mono"/>
+              </a:rPr>
+              <a:t> raw SQL</a:t>
+            </a:r>
+          </a:p>
+          <a:p>
+            <a:pPr algn="l">
+              <a:lnSpc>
+                <a:spcPct val="130000"/>
+              </a:lnSpc>
+            </a:pPr>
+            <a:r>
+              <a:rPr sz="1100" b="0">
+                <a:solidFill>
+                  <a:srgbClr val="CF222E"/>
+                </a:solidFill>
+                <a:latin typeface="Noto Sans Mono"/>
+              </a:rPr>
+              <a:t>await </a:t>
+            </a:r>
+            <a:r>
+              <a:rPr sz="1100" b="0">
+                <a:solidFill>
+                  <a:srgbClr val="1F2328"/>
+                </a:solidFill>
+                <a:latin typeface="Noto Sans Mono"/>
+              </a:rPr>
+              <a:t>db.Database.</a:t>
+            </a:r>
+            <a:r>
+              <a:rPr sz="1100" b="0">
+                <a:solidFill>
+                  <a:srgbClr val="0550AE"/>
+                </a:solidFill>
+                <a:latin typeface="Noto Sans Mono"/>
+              </a:rPr>
+              <a:t>ExecuteSqlInterpolatedAsync</a:t>
+            </a:r>
+            <a:r>
+              <a:rPr sz="1100" b="0">
+                <a:solidFill>
+                  <a:srgbClr val="1F2328"/>
+                </a:solidFill>
+                <a:latin typeface="Noto Sans Mono"/>
+              </a:rPr>
+              <a:t>(</a:t>
+            </a:r>
+            <a:r>
+              <a:rPr sz="1100" b="0">
+                <a:solidFill>
+                  <a:srgbClr val="116329"/>
+                </a:solidFill>
+                <a:latin typeface="Noto Sans Mono"/>
+              </a:rPr>
+              <a:t>$"DELETE FROM Metrics WHERE Ts &lt; {cutoff}"</a:t>
+            </a:r>
+            <a:r>
+              <a:rPr sz="1100" b="0">
+                <a:solidFill>
+                  <a:srgbClr val="1F2328"/>
+                </a:solidFill>
+                <a:latin typeface="Noto Sans Mono"/>
+              </a:rPr>
+              <a:t>, ct);</a:t>
+            </a:r>
+          </a:p>
+        </p:txBody>
+      </p:sp>
+      <p:sp>
+        <p:nvSpPr>
+          <p:cNvPr id="24" name="TextBox 23"/>
+          <p:cNvSpPr txBox="1"/>
+          <p:nvPr/>
+        </p:nvSpPr>
+        <p:spPr>
+          <a:xfrm>
+            <a:off x="11475720" y="6510528"/>
+            <a:ext cx="594360" cy="256032"/>
+          </a:xfrm>
+          <a:prstGeom prst="rect">
+            <a:avLst/>
+          </a:prstGeom>
+          <a:noFill/>
+        </p:spPr>
+        <p:txBody>
+          <a:bodyPr wrap="square" lIns="0" rIns="0" tIns="0" bIns="0" anchor="t">
+            <a:spAutoFit/>
+          </a:bodyPr>
+          <a:lstStyle/>
+          <a:p>
+            <a:pPr algn="r">
+              <a:lnSpc>
+                <a:spcPct val="125000"/>
+              </a:lnSpc>
+            </a:pPr>
+            <a:r>
+              <a:rPr sz="1050" b="0">
+                <a:solidFill>
+                  <a:srgbClr val="6E7781"/>
+                </a:solidFill>
+                <a:latin typeface="Noto Sans Mono"/>
+              </a:rPr>
+              <a:t>16 / 21</a:t>
+            </a:r>
+          </a:p>
+        </p:txBody>
+      </p:sp>
+    </p:spTree>
+  </p:cSld>
+  <p:clrMapOvr>
+    <a:masterClrMapping/>
+  </p:clrMapOvr>
+</p:sld>
+</file>
+
 <file path=ppt/slides/slide3.xml><?xml version="1.0" encoding="utf-8"?>
 <p:sld xmlns:a="http://schemas.openxmlformats.org/drawingml/2006/main" xmlns:p="http://schemas.openxmlformats.org/presentationml/2006/main" xmlns:r="http://schemas.openxmlformats.org/officeDocument/2006/relationships">
   <p:cSld>
@@ -22132,7 +22097,7 @@
                 </a:solidFill>
                 <a:latin typeface="Noto Sans CJK KR"/>
               </a:rPr>
-              <a:t>PROJECT_TECHNICAL_REVIEW.md §1 전체 파이프라인 — Agent → Collector → APM_Console, 3개 프로세스.</a:t>
+              <a:t>PROJECT_TECHNICAL_REVIEW.md §1 전체 파이프라인 — Agent → Collector → APM_Console 원격 경로 + Qt 로컬 대시보드(같은 장비, Console과 무관).</a:t>
             </a:r>
           </a:p>
         </p:txBody>
@@ -23301,7 +23266,7 @@
                 </a:solidFill>
                 <a:latin typeface="Noto Sans CJK KR"/>
               </a:rPr>
-              <a:t>: (1) Agent 데이터를 로컬 SQLite에 저장하는 "수집 서버", (2) 저장한 데이터를 APM_Console로 넘기는 "중계자". 이 둘은 서로 독립적 — 저장이 실패해도 전송은 별개로 진행되고, 전송(WebServer 연결)이 끊겨도 로컬 저장은 계속된다.</a:t>
+              <a:t>: (1) Agent 데이터를 로컬 SQLite(apm_metrics.db)에 저장하는 "수집 서버", (2) 저장한 데이터를 APM_Console로 넘기는 "중계자" — 이 둘은 서로 독립적이다. Qt 로컬 대시보드는 이 apm_metrics.db와 Agent의 agent_alerts.db를 직접 읽는 세 번째 채널로, Console과는 완전히 무관하게 동작한다(로컬 IPC로 Agent 제어도 겸함).</a:t>
             </a:r>
           </a:p>
         </p:txBody>
@@ -23582,7 +23547,7 @@
                 </a:solidFill>
                 <a:latin typeface="Noto Sans CJK KR"/>
               </a:rPr>
-              <a:t>5라운드에 걸친 스케일 개선(9~13p)이 실제로 어떤 스레드 배치로 귀결됐는지 — 공유 상태는 정확히 한 스레드만 건드리게 설계.</a:t>
+              <a:t>5라운드에 걸친 스케일 개선(12~15p)이 실제로 어떤 스레드 배치로 귀결됐는지 — 공유 상태는 정확히 한 스레드만 건드리게 설계.</a:t>
             </a:r>
           </a:p>
         </p:txBody>
@@ -24697,7 +24662,7 @@
                 </a:solidFill>
                 <a:latin typeface="Noto Sans CJK KR"/>
               </a:rPr>
-              <a:t> — stdin은 별도 스레드로 읽되 실제 전송은 asio::post()로 네트워크 스레드에 위임(락 불필요). 단, 워커가 1개→3개로 늘며 스레드 간 락 경합(futex)이 300-agent 규모의 새 병목으로 떠올랐다(9~12p 참고) — 트레이드오프 없는 개선은 없었다.</a:t>
+              <a:t> — stdin은 별도 스레드로 읽되 실제 전송은 asio::post()로 네트워크 스레드에 위임(락 불필요). 단, 워커가 1개→3개로 늘며 스레드 간 락 경합(futex)이 300-agent 규모의 새 병목으로 떠올랐다(12~15p 참고) — 트레이드오프 없는 개선은 없었다.</a:t>
             </a:r>
           </a:p>
         </p:txBody>
@@ -31007,6 +30972,60 @@
                 </a:solidFill>
                 <a:latin typeface="Noto Sans Mono CJK KR"/>
               </a:rPr>
+              <a:t>단일</a:t>
+            </a:r>
+            <a:r>
+              <a:rPr sz="1250" b="1">
+                <a:solidFill>
+                  <a:srgbClr val="1F2328"/>
+                </a:solidFill>
+                <a:latin typeface="Noto Sans Mono"/>
+              </a:rPr>
+              <a:t> </a:t>
+            </a:r>
+            <a:r>
+              <a:rPr sz="1250" b="1">
+                <a:solidFill>
+                  <a:srgbClr val="1F2328"/>
+                </a:solidFill>
+                <a:latin typeface="Noto Sans Mono CJK KR"/>
+              </a:rPr>
+              <a:t>프로세스</a:t>
+            </a:r>
+            <a:r>
+              <a:rPr sz="1250" b="1">
+                <a:solidFill>
+                  <a:srgbClr val="1F2328"/>
+                </a:solidFill>
+                <a:latin typeface="Noto Sans Mono"/>
+              </a:rPr>
+              <a:t> </a:t>
+            </a:r>
+            <a:r>
+              <a:rPr sz="1250" b="1">
+                <a:solidFill>
+                  <a:srgbClr val="1F2328"/>
+                </a:solidFill>
+                <a:latin typeface="Noto Sans Mono CJK KR"/>
+              </a:rPr>
+              <a:t>범위를</a:t>
+            </a:r>
+            <a:r>
+              <a:rPr sz="1250" b="1">
+                <a:solidFill>
+                  <a:srgbClr val="1F2328"/>
+                </a:solidFill>
+                <a:latin typeface="Noto Sans Mono"/>
+              </a:rPr>
+              <a:t> </a:t>
+            </a:r>
+            <a:r>
+              <a:rPr sz="1250" b="1">
+                <a:solidFill>
+                  <a:srgbClr val="1F2328"/>
+                </a:solidFill>
+                <a:latin typeface="Noto Sans Mono CJK KR"/>
+              </a:rPr>
               <a:t>여기서</a:t>
             </a:r>
             <a:r>
@@ -31025,25 +31044,7 @@
                 </a:solidFill>
                 <a:latin typeface="Noto Sans Mono CJK KR"/>
               </a:rPr>
-              <a:t>멈추기로</a:t>
-            </a:r>
-            <a:r>
-              <a:rPr sz="1250" b="1">
-                <a:solidFill>
-                  <a:srgbClr val="1F2328"/>
-                </a:solidFill>
-                <a:latin typeface="Noto Sans Mono"/>
-              </a:rPr>
-              <a:t> </a:t>
-            </a:r>
-            <a:r>
-              <a:rPr sz="1250" b="1">
-                <a:solidFill>
-                  <a:srgbClr val="1F2328"/>
-                </a:solidFill>
-                <a:latin typeface="Noto Sans Mono CJK KR"/>
-              </a:rPr>
-              <a:t>함</a:t>
+              <a:t>확정</a:t>
             </a:r>
             <a:r>
               <a:rPr sz="1250" b="0">
@@ -31052,7 +31053,7 @@
                 </a:solidFill>
                 <a:latin typeface="Noto Sans CJK KR"/>
               </a:rPr>
-              <a:t> — 남은 병목(futex, 스레드 간 락 경합)은 단일 프로세스·개발 머신 한 대의 현실적 한계로 판단. 실제 운영이라면 Collector 수평 확장이 정공법.</a:t>
+              <a:t> — 남은 병목(futex, 스레드 간 락 경합)은 단일 프로세스 최적화가 아니라 Collector 수평 분산이 담당할 영역이라 판단, 여기서 범위를 확정했다.</a:t>
             </a:r>
           </a:p>
         </p:txBody>
